--- a/docs/专利介绍_CPU内存故障自隔离.pptx
+++ b/docs/专利介绍_CPU内存故障自隔离.pptx
@@ -3094,7 +3094,7 @@
       <p:grpSpPr/>
       <p:sp>
         <p:nvSpPr>
-          <p:cNvPr id="2" name="Rounded Rectangle 1"/>
+          <p:cNvPr id="2" name="Rectangle 1"/>
           <p:cNvSpPr/>
           <p:nvPr/>
         </p:nvSpPr>
@@ -3103,13 +3103,11 @@
             <a:off x="0" y="0"/>
             <a:ext cx="12191695" cy="6858000"/>
           </a:xfrm>
-          <a:prstGeom prst="roundRect">
-            <a:avLst>
-              <a:gd name="adj" fmla="val 6000"/>
-            </a:avLst>
+          <a:prstGeom prst="rect">
+            <a:avLst/>
           </a:prstGeom>
           <a:solidFill>
-            <a:srgbClr val="1F2D5A"/>
+            <a:srgbClr val="FFFFFF"/>
           </a:solidFill>
           <a:ln>
             <a:noFill/>
@@ -3140,22 +3138,20 @@
       </p:sp>
       <p:sp>
         <p:nvSpPr>
-          <p:cNvPr id="3" name="Rounded Rectangle 2"/>
+          <p:cNvPr id="3" name="Rectangle 2"/>
           <p:cNvSpPr/>
           <p:nvPr/>
         </p:nvSpPr>
         <p:spPr>
           <a:xfrm>
-            <a:off x="0" y="2331720"/>
-            <a:ext cx="12191695" cy="54864"/>
-          </a:xfrm>
-          <a:prstGeom prst="roundRect">
-            <a:avLst>
-              <a:gd name="adj" fmla="val 6000"/>
-            </a:avLst>
+            <a:off x="0" y="0"/>
+            <a:ext cx="12191695" cy="4160520"/>
+          </a:xfrm>
+          <a:prstGeom prst="rect">
+            <a:avLst/>
           </a:prstGeom>
           <a:solidFill>
-            <a:srgbClr val="2E5BC8"/>
+            <a:srgbClr val="CF0A2C"/>
           </a:solidFill>
           <a:ln>
             <a:noFill/>
@@ -3186,14 +3182,58 @@
       </p:sp>
       <p:sp>
         <p:nvSpPr>
-          <p:cNvPr id="4" name="TextBox 3"/>
+          <p:cNvPr id="4" name="Rectangle 3"/>
+          <p:cNvSpPr/>
+          <p:nvPr/>
+        </p:nvSpPr>
+        <p:spPr>
+          <a:xfrm>
+            <a:off x="0" y="4160520"/>
+            <a:ext cx="12191695" cy="91440"/>
+          </a:xfrm>
+          <a:prstGeom prst="rect">
+            <a:avLst/>
+          </a:prstGeom>
+          <a:solidFill>
+            <a:srgbClr val="A30822"/>
+          </a:solidFill>
+          <a:ln>
+            <a:noFill/>
+          </a:ln>
+          <a:effectLst/>
+        </p:spPr>
+        <p:style>
+          <a:lnRef idx="1">
+            <a:schemeClr val="accent1"/>
+          </a:lnRef>
+          <a:fillRef idx="3">
+            <a:schemeClr val="accent1"/>
+          </a:fillRef>
+          <a:effectRef idx="2">
+            <a:schemeClr val="accent1"/>
+          </a:effectRef>
+          <a:fontRef idx="minor">
+            <a:schemeClr val="lt1"/>
+          </a:fontRef>
+        </p:style>
+        <p:txBody>
+          <a:bodyPr rtlCol="0" anchor="ctr"/>
+          <a:lstStyle/>
+          <a:p>
+            <a:pPr algn="ctr"/>
+          </a:p>
+        </p:txBody>
+      </p:sp>
+      <p:sp>
+        <p:nvSpPr>
+          <p:cNvPr id="5" name="TextBox 4"/>
           <p:cNvSpPr txBox="1"/>
           <p:nvPr/>
         </p:nvSpPr>
         <p:spPr>
           <a:xfrm>
-            <a:off x="822960" y="822960"/>
-            <a:ext cx="10515600" cy="548640"/>
+            <a:off x="822960" y="777240"/>
+            <a:ext cx="10515600" cy="457200"/>
           </a:xfrm>
           <a:prstGeom prst="rect">
             <a:avLst/>
@@ -3218,27 +3258,27 @@
               </a:spcAft>
             </a:pPr>
             <a:r>
-              <a:rPr sz="2000" b="1">
-                <a:solidFill>
-                  <a:srgbClr val="9FB4E8"/>
+              <a:rPr sz="1600" b="1">
+                <a:solidFill>
+                  <a:srgbClr val="F4C9CF"/>
                 </a:solidFill>
                 <a:latin typeface="Microsoft YaHei"/>
               </a:rPr>
-              <a:t>专 利 介 绍</a:t>
-            </a:r>
-          </a:p>
-        </p:txBody>
-      </p:sp>
-      <p:sp>
-        <p:nvSpPr>
-          <p:cNvPr id="5" name="TextBox 4"/>
+              <a:t>PATENT  |  专 利 介 绍</a:t>
+            </a:r>
+          </a:p>
+        </p:txBody>
+      </p:sp>
+      <p:sp>
+        <p:nvSpPr>
+          <p:cNvPr id="6" name="TextBox 5"/>
           <p:cNvSpPr txBox="1"/>
           <p:nvPr/>
         </p:nvSpPr>
         <p:spPr>
           <a:xfrm>
-            <a:off x="822960" y="1554480"/>
-            <a:ext cx="10515600" cy="1463040"/>
+            <a:off x="822960" y="1417320"/>
+            <a:ext cx="10698480" cy="1645920"/>
           </a:xfrm>
           <a:prstGeom prst="rect">
             <a:avLst/>
@@ -3253,7 +3293,7 @@
           <a:p>
             <a:pPr algn="l">
               <a:lnSpc>
-                <a:spcPct val="115000"/>
+                <a:spcPct val="118000"/>
               </a:lnSpc>
               <a:spcBef>
                 <a:spcPts val="0"/>
@@ -3263,7 +3303,7 @@
               </a:spcAft>
             </a:pPr>
             <a:r>
-              <a:rPr sz="3400" b="1">
+              <a:rPr sz="3300" b="1">
                 <a:solidFill>
                   <a:srgbClr val="FFFFFF"/>
                 </a:solidFill>
@@ -3275,7 +3315,7 @@
           <a:p>
             <a:pPr algn="l">
               <a:lnSpc>
-                <a:spcPct val="115000"/>
+                <a:spcPct val="118000"/>
               </a:lnSpc>
               <a:spcBef>
                 <a:spcPts val="0"/>
@@ -3285,7 +3325,7 @@
               </a:spcAft>
             </a:pPr>
             <a:r>
-              <a:rPr sz="3400" b="1">
+              <a:rPr sz="3300" b="1">
                 <a:solidFill>
                   <a:srgbClr val="FFFFFF"/>
                 </a:solidFill>
@@ -3298,14 +3338,58 @@
       </p:sp>
       <p:sp>
         <p:nvSpPr>
-          <p:cNvPr id="6" name="TextBox 5"/>
+          <p:cNvPr id="7" name="Rectangle 6"/>
+          <p:cNvSpPr/>
+          <p:nvPr/>
+        </p:nvSpPr>
+        <p:spPr>
+          <a:xfrm>
+            <a:off x="868680" y="2971800"/>
+            <a:ext cx="822960" cy="38100"/>
+          </a:xfrm>
+          <a:prstGeom prst="rect">
+            <a:avLst/>
+          </a:prstGeom>
+          <a:solidFill>
+            <a:srgbClr val="FFFFFF"/>
+          </a:solidFill>
+          <a:ln>
+            <a:noFill/>
+          </a:ln>
+          <a:effectLst/>
+        </p:spPr>
+        <p:style>
+          <a:lnRef idx="1">
+            <a:schemeClr val="accent1"/>
+          </a:lnRef>
+          <a:fillRef idx="3">
+            <a:schemeClr val="accent1"/>
+          </a:fillRef>
+          <a:effectRef idx="2">
+            <a:schemeClr val="accent1"/>
+          </a:effectRef>
+          <a:fontRef idx="minor">
+            <a:schemeClr val="lt1"/>
+          </a:fontRef>
+        </p:style>
+        <p:txBody>
+          <a:bodyPr rtlCol="0" anchor="ctr"/>
+          <a:lstStyle/>
+          <a:p>
+            <a:pPr algn="ctr"/>
+          </a:p>
+        </p:txBody>
+      </p:sp>
+      <p:sp>
+        <p:nvSpPr>
+          <p:cNvPr id="8" name="TextBox 7"/>
           <p:cNvSpPr txBox="1"/>
           <p:nvPr/>
         </p:nvSpPr>
         <p:spPr>
           <a:xfrm>
-            <a:off x="822960" y="2743200"/>
-            <a:ext cx="10515600" cy="548640"/>
+            <a:off x="822960" y="3200400"/>
+            <a:ext cx="10698480" cy="640080"/>
           </a:xfrm>
           <a:prstGeom prst="rect">
             <a:avLst/>
@@ -3330,9 +3414,9 @@
               </a:spcAft>
             </a:pPr>
             <a:r>
-              <a:rPr sz="2200" b="1">
-                <a:solidFill>
-                  <a:srgbClr val="FFD26A"/>
+              <a:rPr sz="2100" b="1">
+                <a:solidFill>
+                  <a:srgbClr val="FFFFFF"/>
                 </a:solidFill>
                 <a:latin typeface="Microsoft YaHei"/>
               </a:rPr>
@@ -3343,25 +3427,27 @@
       </p:sp>
       <p:sp>
         <p:nvSpPr>
-          <p:cNvPr id="7" name="Rounded Rectangle 6"/>
+          <p:cNvPr id="9" name="Rounded Rectangle 8"/>
           <p:cNvSpPr/>
           <p:nvPr/>
         </p:nvSpPr>
         <p:spPr>
           <a:xfrm>
-            <a:off x="822960" y="3657600"/>
-            <a:ext cx="3383280" cy="640080"/>
+            <a:off x="822960" y="4617720"/>
+            <a:ext cx="3456432" cy="658368"/>
           </a:xfrm>
           <a:prstGeom prst="roundRect">
             <a:avLst>
-              <a:gd name="adj" fmla="val 6000"/>
+              <a:gd name="adj" fmla="val 50000"/>
             </a:avLst>
           </a:prstGeom>
           <a:solidFill>
-            <a:srgbClr val="6B3FA0"/>
+            <a:srgbClr val="FFFFFF"/>
           </a:solidFill>
-          <a:ln>
-            <a:noFill/>
+          <a:ln w="19050">
+            <a:solidFill>
+              <a:srgbClr val="CF0A2C"/>
+            </a:solidFill>
           </a:ln>
           <a:effectLst/>
         </p:spPr>
@@ -3389,14 +3475,14 @@
       </p:sp>
       <p:sp>
         <p:nvSpPr>
-          <p:cNvPr id="8" name="TextBox 7"/>
+          <p:cNvPr id="10" name="TextBox 9"/>
           <p:cNvSpPr txBox="1"/>
           <p:nvPr/>
         </p:nvSpPr>
         <p:spPr>
           <a:xfrm>
-            <a:off x="822960" y="3657600"/>
-            <a:ext cx="3383280" cy="640080"/>
+            <a:off x="822960" y="4617720"/>
+            <a:ext cx="3456432" cy="658368"/>
           </a:xfrm>
           <a:prstGeom prst="rect">
             <a:avLst/>
@@ -3423,7 +3509,7 @@
             <a:r>
               <a:rPr sz="1400" b="1">
                 <a:solidFill>
-                  <a:srgbClr val="FFFFFF"/>
+                  <a:srgbClr val="CF0A2C"/>
                 </a:solidFill>
                 <a:latin typeface="Microsoft YaHei"/>
               </a:rPr>
@@ -3434,25 +3520,27 @@
       </p:sp>
       <p:sp>
         <p:nvSpPr>
-          <p:cNvPr id="9" name="Rounded Rectangle 8"/>
+          <p:cNvPr id="11" name="Rounded Rectangle 10"/>
           <p:cNvSpPr/>
           <p:nvPr/>
         </p:nvSpPr>
         <p:spPr>
           <a:xfrm>
-            <a:off x="4389120" y="3657600"/>
-            <a:ext cx="3383280" cy="640080"/>
+            <a:off x="4453128" y="4617720"/>
+            <a:ext cx="3456432" cy="658368"/>
           </a:xfrm>
           <a:prstGeom prst="roundRect">
             <a:avLst>
-              <a:gd name="adj" fmla="val 6000"/>
+              <a:gd name="adj" fmla="val 50000"/>
             </a:avLst>
           </a:prstGeom>
           <a:solidFill>
-            <a:srgbClr val="1E8E3E"/>
+            <a:srgbClr val="FFFFFF"/>
           </a:solidFill>
-          <a:ln>
-            <a:noFill/>
+          <a:ln w="19050">
+            <a:solidFill>
+              <a:srgbClr val="CF0A2C"/>
+            </a:solidFill>
           </a:ln>
           <a:effectLst/>
         </p:spPr>
@@ -3480,14 +3568,14 @@
       </p:sp>
       <p:sp>
         <p:nvSpPr>
-          <p:cNvPr id="10" name="TextBox 9"/>
+          <p:cNvPr id="12" name="TextBox 11"/>
           <p:cNvSpPr txBox="1"/>
           <p:nvPr/>
         </p:nvSpPr>
         <p:spPr>
           <a:xfrm>
-            <a:off x="4389120" y="3657600"/>
-            <a:ext cx="3383280" cy="640080"/>
+            <a:off x="4453128" y="4617720"/>
+            <a:ext cx="3456432" cy="658368"/>
           </a:xfrm>
           <a:prstGeom prst="rect">
             <a:avLst/>
@@ -3514,7 +3602,7 @@
             <a:r>
               <a:rPr sz="1400" b="1">
                 <a:solidFill>
-                  <a:srgbClr val="FFFFFF"/>
+                  <a:srgbClr val="CF0A2C"/>
                 </a:solidFill>
                 <a:latin typeface="Microsoft YaHei"/>
               </a:rPr>
@@ -3525,25 +3613,27 @@
       </p:sp>
       <p:sp>
         <p:nvSpPr>
-          <p:cNvPr id="11" name="Rounded Rectangle 10"/>
+          <p:cNvPr id="13" name="Rounded Rectangle 12"/>
           <p:cNvSpPr/>
           <p:nvPr/>
         </p:nvSpPr>
         <p:spPr>
           <a:xfrm>
-            <a:off x="7955280" y="3657600"/>
-            <a:ext cx="3383280" cy="640080"/>
+            <a:off x="8083296" y="4617720"/>
+            <a:ext cx="3456432" cy="658368"/>
           </a:xfrm>
           <a:prstGeom prst="roundRect">
             <a:avLst>
-              <a:gd name="adj" fmla="val 6000"/>
+              <a:gd name="adj" fmla="val 50000"/>
             </a:avLst>
           </a:prstGeom>
           <a:solidFill>
-            <a:srgbClr val="2E5BC8"/>
+            <a:srgbClr val="FFFFFF"/>
           </a:solidFill>
-          <a:ln>
-            <a:noFill/>
+          <a:ln w="19050">
+            <a:solidFill>
+              <a:srgbClr val="CF0A2C"/>
+            </a:solidFill>
           </a:ln>
           <a:effectLst/>
         </p:spPr>
@@ -3571,14 +3661,14 @@
       </p:sp>
       <p:sp>
         <p:nvSpPr>
-          <p:cNvPr id="12" name="TextBox 11"/>
+          <p:cNvPr id="14" name="TextBox 13"/>
           <p:cNvSpPr txBox="1"/>
           <p:nvPr/>
         </p:nvSpPr>
         <p:spPr>
           <a:xfrm>
-            <a:off x="7955280" y="3657600"/>
-            <a:ext cx="3383280" cy="640080"/>
+            <a:off x="8083296" y="4617720"/>
+            <a:ext cx="3456432" cy="658368"/>
           </a:xfrm>
           <a:prstGeom prst="rect">
             <a:avLst/>
@@ -3605,25 +3695,25 @@
             <a:r>
               <a:rPr sz="1400" b="1">
                 <a:solidFill>
-                  <a:srgbClr val="FFFFFF"/>
+                  <a:srgbClr val="CF0A2C"/>
                 </a:solidFill>
                 <a:latin typeface="Microsoft YaHei"/>
               </a:rPr>
-              <a:t>CPU + 内存双故障域</a:t>
-            </a:r>
-          </a:p>
-        </p:txBody>
-      </p:sp>
-      <p:sp>
-        <p:nvSpPr>
-          <p:cNvPr id="13" name="TextBox 12"/>
+              <a:t>CPU + 内存 双故障域</a:t>
+            </a:r>
+          </a:p>
+        </p:txBody>
+      </p:sp>
+      <p:sp>
+        <p:nvSpPr>
+          <p:cNvPr id="15" name="TextBox 14"/>
           <p:cNvSpPr txBox="1"/>
           <p:nvPr/>
         </p:nvSpPr>
         <p:spPr>
           <a:xfrm>
-            <a:off x="822960" y="5943600"/>
-            <a:ext cx="10515600" cy="457200"/>
+            <a:off x="822960" y="5989320"/>
+            <a:ext cx="10698480" cy="457200"/>
           </a:xfrm>
           <a:prstGeom prst="rect">
             <a:avLst/>
@@ -3650,11 +3740,11 @@
             <a:r>
               <a:rPr sz="1300" b="0">
                 <a:solidFill>
-                  <a:srgbClr val="B9C4DF"/>
+                  <a:srgbClr val="595959"/>
                 </a:solidFill>
                 <a:latin typeface="Microsoft YaHei"/>
               </a:rPr>
-              <a:t>实现：cpu_fault_isolate.ko（CFI + MFI）   |   实证：Huawei 2288H V5 + HCE2 物理机   |   2026-06</a:t>
+              <a:t>实现：cpu_fault_isolate.ko（CFI + MFI）    |    实证：Huawei 2288H V5 + HCE2 物理机    |    2026-06</a:t>
             </a:r>
           </a:p>
         </p:txBody>
@@ -3679,22 +3769,20 @@
       <p:grpSpPr/>
       <p:sp>
         <p:nvSpPr>
-          <p:cNvPr id="2" name="Rounded Rectangle 1"/>
+          <p:cNvPr id="2" name="Rectangle 1"/>
           <p:cNvSpPr/>
           <p:nvPr/>
         </p:nvSpPr>
         <p:spPr>
           <a:xfrm>
             <a:off x="0" y="0"/>
-            <a:ext cx="12191695" cy="109728"/>
-          </a:xfrm>
-          <a:prstGeom prst="roundRect">
-            <a:avLst>
-              <a:gd name="adj" fmla="val 6000"/>
-            </a:avLst>
+            <a:ext cx="12191695" cy="6858000"/>
+          </a:xfrm>
+          <a:prstGeom prst="rect">
+            <a:avLst/>
           </a:prstGeom>
           <a:solidFill>
-            <a:srgbClr val="C0392B"/>
+            <a:srgbClr val="FFFFFF"/>
           </a:solidFill>
           <a:ln>
             <a:noFill/>
@@ -3725,22 +3813,20 @@
       </p:sp>
       <p:sp>
         <p:nvSpPr>
-          <p:cNvPr id="3" name="Rounded Rectangle 2"/>
+          <p:cNvPr id="3" name="Rectangle 2"/>
           <p:cNvSpPr/>
           <p:nvPr/>
         </p:nvSpPr>
         <p:spPr>
           <a:xfrm>
-            <a:off x="457200" y="384048"/>
-            <a:ext cx="457200" cy="457200"/>
-          </a:xfrm>
-          <a:prstGeom prst="roundRect">
-            <a:avLst>
-              <a:gd name="adj" fmla="val 6000"/>
-            </a:avLst>
+            <a:off x="457200" y="420624"/>
+            <a:ext cx="146304" cy="512064"/>
+          </a:xfrm>
+          <a:prstGeom prst="rect">
+            <a:avLst/>
           </a:prstGeom>
           <a:solidFill>
-            <a:srgbClr val="C0392B"/>
+            <a:srgbClr val="CF0A2C"/>
           </a:solidFill>
           <a:ln>
             <a:noFill/>
@@ -3777,8 +3863,8 @@
         </p:nvSpPr>
         <p:spPr>
           <a:xfrm>
-            <a:off x="457200" y="384048"/>
-            <a:ext cx="457200" cy="457200"/>
+            <a:off x="731520" y="365760"/>
+            <a:ext cx="1005840" cy="603504"/>
           </a:xfrm>
           <a:prstGeom prst="rect">
             <a:avLst/>
@@ -3787,6 +3873,519 @@
         </p:spPr>
         <p:txBody>
           <a:bodyPr wrap="square" anchor="ctr" lIns="50800" rIns="50800" tIns="25400" bIns="25400">
+            <a:spAutoFit/>
+          </a:bodyPr>
+          <a:lstStyle/>
+          <a:p>
+            <a:pPr algn="l">
+              <a:lnSpc>
+                <a:spcPct val="100000"/>
+              </a:lnSpc>
+              <a:spcBef>
+                <a:spcPts val="0"/>
+              </a:spcBef>
+              <a:spcAft>
+                <a:spcPts val="400"/>
+              </a:spcAft>
+            </a:pPr>
+            <a:r>
+              <a:rPr sz="3000" b="1">
+                <a:solidFill>
+                  <a:srgbClr val="CF0A2C"/>
+                </a:solidFill>
+                <a:latin typeface="Microsoft YaHei"/>
+              </a:rPr>
+              <a:t>01</a:t>
+            </a:r>
+          </a:p>
+        </p:txBody>
+      </p:sp>
+      <p:sp>
+        <p:nvSpPr>
+          <p:cNvPr id="5" name="TextBox 4"/>
+          <p:cNvSpPr txBox="1"/>
+          <p:nvPr/>
+        </p:nvSpPr>
+        <p:spPr>
+          <a:xfrm>
+            <a:off x="1600200" y="365760"/>
+            <a:ext cx="9875520" cy="603504"/>
+          </a:xfrm>
+          <a:prstGeom prst="rect">
+            <a:avLst/>
+          </a:prstGeom>
+          <a:noFill/>
+        </p:spPr>
+        <p:txBody>
+          <a:bodyPr wrap="square" anchor="ctr" lIns="50800" rIns="50800" tIns="25400" bIns="25400">
+            <a:spAutoFit/>
+          </a:bodyPr>
+          <a:lstStyle/>
+          <a:p>
+            <a:pPr algn="l">
+              <a:lnSpc>
+                <a:spcPct val="100000"/>
+              </a:lnSpc>
+              <a:spcBef>
+                <a:spcPts val="0"/>
+              </a:spcBef>
+              <a:spcAft>
+                <a:spcPts val="400"/>
+              </a:spcAft>
+            </a:pPr>
+            <a:r>
+              <a:rPr sz="2600" b="1">
+                <a:solidFill>
+                  <a:srgbClr val="1A1A1A"/>
+                </a:solidFill>
+                <a:latin typeface="Microsoft YaHei"/>
+              </a:rPr>
+              <a:t>问题：单器件故障 → 整机宕机</a:t>
+            </a:r>
+          </a:p>
+        </p:txBody>
+      </p:sp>
+      <p:sp>
+        <p:nvSpPr>
+          <p:cNvPr id="6" name="Rectangle 5"/>
+          <p:cNvSpPr/>
+          <p:nvPr/>
+        </p:nvSpPr>
+        <p:spPr>
+          <a:xfrm>
+            <a:off x="731520" y="1024128"/>
+            <a:ext cx="10725912" cy="25400"/>
+          </a:xfrm>
+          <a:prstGeom prst="rect">
+            <a:avLst/>
+          </a:prstGeom>
+          <a:solidFill>
+            <a:srgbClr val="CF0A2C"/>
+          </a:solidFill>
+          <a:ln>
+            <a:noFill/>
+          </a:ln>
+          <a:effectLst/>
+        </p:spPr>
+        <p:style>
+          <a:lnRef idx="1">
+            <a:schemeClr val="accent1"/>
+          </a:lnRef>
+          <a:fillRef idx="3">
+            <a:schemeClr val="accent1"/>
+          </a:fillRef>
+          <a:effectRef idx="2">
+            <a:schemeClr val="accent1"/>
+          </a:effectRef>
+          <a:fontRef idx="minor">
+            <a:schemeClr val="lt1"/>
+          </a:fontRef>
+        </p:style>
+        <p:txBody>
+          <a:bodyPr rtlCol="0" anchor="ctr"/>
+          <a:lstStyle/>
+          <a:p>
+            <a:pPr algn="ctr"/>
+          </a:p>
+        </p:txBody>
+      </p:sp>
+      <p:sp>
+        <p:nvSpPr>
+          <p:cNvPr id="7" name="TextBox 6"/>
+          <p:cNvSpPr txBox="1"/>
+          <p:nvPr/>
+        </p:nvSpPr>
+        <p:spPr>
+          <a:xfrm>
+            <a:off x="9692640" y="420624"/>
+            <a:ext cx="1783080" cy="365760"/>
+          </a:xfrm>
+          <a:prstGeom prst="rect">
+            <a:avLst/>
+          </a:prstGeom>
+          <a:noFill/>
+        </p:spPr>
+        <p:txBody>
+          <a:bodyPr wrap="square" anchor="ctr" lIns="50800" rIns="50800" tIns="25400" bIns="25400">
+            <a:spAutoFit/>
+          </a:bodyPr>
+          <a:lstStyle/>
+          <a:p>
+            <a:pPr algn="r">
+              <a:lnSpc>
+                <a:spcPct val="100000"/>
+              </a:lnSpc>
+              <a:spcBef>
+                <a:spcPts val="0"/>
+              </a:spcBef>
+              <a:spcAft>
+                <a:spcPts val="400"/>
+              </a:spcAft>
+            </a:pPr>
+            <a:r>
+              <a:rPr sz="1100" b="0">
+                <a:solidFill>
+                  <a:srgbClr val="595959"/>
+                </a:solidFill>
+                <a:latin typeface="Microsoft YaHei"/>
+              </a:rPr>
+              <a:t>专利介绍</a:t>
+            </a:r>
+          </a:p>
+        </p:txBody>
+      </p:sp>
+      <p:sp>
+        <p:nvSpPr>
+          <p:cNvPr id="8" name="TextBox 7"/>
+          <p:cNvSpPr txBox="1"/>
+          <p:nvPr/>
+        </p:nvSpPr>
+        <p:spPr>
+          <a:xfrm>
+            <a:off x="731520" y="1188720"/>
+            <a:ext cx="10881360" cy="457200"/>
+          </a:xfrm>
+          <a:prstGeom prst="rect">
+            <a:avLst/>
+          </a:prstGeom>
+          <a:noFill/>
+        </p:spPr>
+        <p:txBody>
+          <a:bodyPr wrap="square" anchor="t" lIns="50800" rIns="50800" tIns="25400" bIns="25400">
+            <a:spAutoFit/>
+          </a:bodyPr>
+          <a:lstStyle/>
+          <a:p>
+            <a:pPr algn="l">
+              <a:lnSpc>
+                <a:spcPct val="100000"/>
+              </a:lnSpc>
+              <a:spcBef>
+                <a:spcPts val="0"/>
+              </a:spcBef>
+              <a:spcAft>
+                <a:spcPts val="400"/>
+              </a:spcAft>
+            </a:pPr>
+            <a:r>
+              <a:rPr sz="1600" b="0">
+                <a:solidFill>
+                  <a:srgbClr val="1A1A1A"/>
+                </a:solidFill>
+                <a:latin typeface="Microsoft YaHei"/>
+              </a:rPr>
+              <a:t>单台云宿主机承载 </a:t>
+            </a:r>
+            <a:r>
+              <a:rPr sz="1600" b="1">
+                <a:solidFill>
+                  <a:srgbClr val="CF0A2C"/>
+                </a:solidFill>
+                <a:latin typeface="Microsoft YaHei"/>
+              </a:rPr>
+              <a:t>上百个 VM</a:t>
+            </a:r>
+            <a:r>
+              <a:rPr sz="1600" b="0">
+                <a:solidFill>
+                  <a:srgbClr val="1A1A1A"/>
+                </a:solidFill>
+                <a:latin typeface="Microsoft YaHei"/>
+              </a:rPr>
+              <a:t>。任一 CPU 缓存 / TLB / 总线或内存器件出现不可纠正错误（UCE）：</a:t>
+            </a:r>
+          </a:p>
+        </p:txBody>
+      </p:sp>
+      <p:sp>
+        <p:nvSpPr>
+          <p:cNvPr id="9" name="Rectangle 8"/>
+          <p:cNvSpPr/>
+          <p:nvPr/>
+        </p:nvSpPr>
+        <p:spPr>
+          <a:xfrm>
+            <a:off x="731520" y="1810512"/>
+            <a:ext cx="10725912" cy="868680"/>
+          </a:xfrm>
+          <a:prstGeom prst="rect">
+            <a:avLst/>
+          </a:prstGeom>
+          <a:solidFill>
+            <a:srgbClr val="FBECEE"/>
+          </a:solidFill>
+          <a:ln w="19050">
+            <a:solidFill>
+              <a:srgbClr val="CF0A2C"/>
+            </a:solidFill>
+          </a:ln>
+          <a:effectLst/>
+        </p:spPr>
+        <p:style>
+          <a:lnRef idx="1">
+            <a:schemeClr val="accent1"/>
+          </a:lnRef>
+          <a:fillRef idx="3">
+            <a:schemeClr val="accent1"/>
+          </a:fillRef>
+          <a:effectRef idx="2">
+            <a:schemeClr val="accent1"/>
+          </a:effectRef>
+          <a:fontRef idx="minor">
+            <a:schemeClr val="lt1"/>
+          </a:fontRef>
+        </p:style>
+        <p:txBody>
+          <a:bodyPr rtlCol="0" anchor="ctr"/>
+          <a:lstStyle/>
+          <a:p>
+            <a:pPr algn="ctr"/>
+          </a:p>
+        </p:txBody>
+      </p:sp>
+      <p:sp>
+        <p:nvSpPr>
+          <p:cNvPr id="10" name="TextBox 9"/>
+          <p:cNvSpPr txBox="1"/>
+          <p:nvPr/>
+        </p:nvSpPr>
+        <p:spPr>
+          <a:xfrm>
+            <a:off x="914400" y="1810512"/>
+            <a:ext cx="10424160" cy="868680"/>
+          </a:xfrm>
+          <a:prstGeom prst="rect">
+            <a:avLst/>
+          </a:prstGeom>
+          <a:noFill/>
+        </p:spPr>
+        <p:txBody>
+          <a:bodyPr wrap="square" anchor="ctr" lIns="50800" rIns="50800" tIns="25400" bIns="25400">
+            <a:spAutoFit/>
+          </a:bodyPr>
+          <a:lstStyle/>
+          <a:p>
+            <a:pPr algn="l">
+              <a:lnSpc>
+                <a:spcPct val="100000"/>
+              </a:lnSpc>
+              <a:spcBef>
+                <a:spcPts val="0"/>
+              </a:spcBef>
+              <a:spcAft>
+                <a:spcPts val="400"/>
+              </a:spcAft>
+            </a:pPr>
+            <a:r>
+              <a:rPr sz="1500" b="1">
+                <a:solidFill>
+                  <a:srgbClr val="A30822"/>
+                </a:solidFill>
+                <a:latin typeface="Microsoft YaHei"/>
+              </a:rPr>
+              <a:t>单核 Cache 1bit 翻转  →  do_machine_check() 早期 mce_panic()  →  整机 panic + kdump + 重启  →  全部 VM 同时掉线</a:t>
+            </a:r>
+          </a:p>
+        </p:txBody>
+      </p:sp>
+      <p:sp>
+        <p:nvSpPr>
+          <p:cNvPr id="11" name="TextBox 10"/>
+          <p:cNvSpPr txBox="1"/>
+          <p:nvPr/>
+        </p:nvSpPr>
+        <p:spPr>
+          <a:xfrm>
+            <a:off x="731520" y="2834640"/>
+            <a:ext cx="10881360" cy="457200"/>
+          </a:xfrm>
+          <a:prstGeom prst="rect">
+            <a:avLst/>
+          </a:prstGeom>
+          <a:noFill/>
+        </p:spPr>
+        <p:txBody>
+          <a:bodyPr wrap="square" anchor="t" lIns="50800" rIns="50800" tIns="25400" bIns="25400">
+            <a:spAutoFit/>
+          </a:bodyPr>
+          <a:lstStyle/>
+          <a:p>
+            <a:pPr algn="l">
+              <a:lnSpc>
+                <a:spcPct val="100000"/>
+              </a:lnSpc>
+              <a:spcBef>
+                <a:spcPts val="0"/>
+              </a:spcBef>
+              <a:spcAft>
+                <a:spcPts val="400"/>
+              </a:spcAft>
+            </a:pPr>
+            <a:r>
+              <a:rPr sz="1400" b="0">
+                <a:solidFill>
+                  <a:srgbClr val="595959"/>
+                </a:solidFill>
+                <a:latin typeface="Microsoft YaHei"/>
+              </a:rPr>
+              <a:t>故障爆炸半径被放大到整机；事件在 panic 时刻来不及进入可处置的解码链，丧失“局部隔离、整体存活”的机会。</a:t>
+            </a:r>
+          </a:p>
+        </p:txBody>
+      </p:sp>
+      <p:sp>
+        <p:nvSpPr>
+          <p:cNvPr id="12" name="TextBox 11"/>
+          <p:cNvSpPr txBox="1"/>
+          <p:nvPr/>
+        </p:nvSpPr>
+        <p:spPr>
+          <a:xfrm>
+            <a:off x="731520" y="3474720"/>
+            <a:ext cx="10881360" cy="365760"/>
+          </a:xfrm>
+          <a:prstGeom prst="rect">
+            <a:avLst/>
+          </a:prstGeom>
+          <a:noFill/>
+        </p:spPr>
+        <p:txBody>
+          <a:bodyPr wrap="square" anchor="t" lIns="50800" rIns="50800" tIns="25400" bIns="25400">
+            <a:spAutoFit/>
+          </a:bodyPr>
+          <a:lstStyle/>
+          <a:p>
+            <a:pPr algn="l">
+              <a:lnSpc>
+                <a:spcPct val="100000"/>
+              </a:lnSpc>
+              <a:spcBef>
+                <a:spcPts val="0"/>
+              </a:spcBef>
+              <a:spcAft>
+                <a:spcPts val="400"/>
+              </a:spcAft>
+            </a:pPr>
+            <a:r>
+              <a:rPr sz="1600" b="1">
+                <a:solidFill>
+                  <a:srgbClr val="1A1A1A"/>
+                </a:solidFill>
+                <a:latin typeface="Microsoft YaHei"/>
+              </a:rPr>
+              <a:t>云厂商的现实约束（决定了方案形态）：</a:t>
+            </a:r>
+          </a:p>
+        </p:txBody>
+      </p:sp>
+      <p:sp>
+        <p:nvSpPr>
+          <p:cNvPr id="13" name="Rectangle 12"/>
+          <p:cNvSpPr/>
+          <p:nvPr/>
+        </p:nvSpPr>
+        <p:spPr>
+          <a:xfrm>
+            <a:off x="731520" y="3931920"/>
+            <a:ext cx="2606040" cy="1417320"/>
+          </a:xfrm>
+          <a:prstGeom prst="rect">
+            <a:avLst/>
+          </a:prstGeom>
+          <a:solidFill>
+            <a:srgbClr val="F4F4F4"/>
+          </a:solidFill>
+          <a:ln w="12700">
+            <a:solidFill>
+              <a:srgbClr val="D9D9D9"/>
+            </a:solidFill>
+          </a:ln>
+          <a:effectLst/>
+        </p:spPr>
+        <p:style>
+          <a:lnRef idx="1">
+            <a:schemeClr val="accent1"/>
+          </a:lnRef>
+          <a:fillRef idx="3">
+            <a:schemeClr val="accent1"/>
+          </a:fillRef>
+          <a:effectRef idx="2">
+            <a:schemeClr val="accent1"/>
+          </a:effectRef>
+          <a:fontRef idx="minor">
+            <a:schemeClr val="lt1"/>
+          </a:fontRef>
+        </p:style>
+        <p:txBody>
+          <a:bodyPr rtlCol="0" anchor="ctr"/>
+          <a:lstStyle/>
+          <a:p>
+            <a:pPr algn="ctr"/>
+          </a:p>
+        </p:txBody>
+      </p:sp>
+      <p:sp>
+        <p:nvSpPr>
+          <p:cNvPr id="14" name="Rectangle 13"/>
+          <p:cNvSpPr/>
+          <p:nvPr/>
+        </p:nvSpPr>
+        <p:spPr>
+          <a:xfrm>
+            <a:off x="731520" y="3931920"/>
+            <a:ext cx="2606040" cy="91440"/>
+          </a:xfrm>
+          <a:prstGeom prst="rect">
+            <a:avLst/>
+          </a:prstGeom>
+          <a:solidFill>
+            <a:srgbClr val="CF0A2C"/>
+          </a:solidFill>
+          <a:ln>
+            <a:noFill/>
+          </a:ln>
+          <a:effectLst/>
+        </p:spPr>
+        <p:style>
+          <a:lnRef idx="1">
+            <a:schemeClr val="accent1"/>
+          </a:lnRef>
+          <a:fillRef idx="3">
+            <a:schemeClr val="accent1"/>
+          </a:fillRef>
+          <a:effectRef idx="2">
+            <a:schemeClr val="accent1"/>
+          </a:effectRef>
+          <a:fontRef idx="minor">
+            <a:schemeClr val="lt1"/>
+          </a:fontRef>
+        </p:style>
+        <p:txBody>
+          <a:bodyPr rtlCol="0" anchor="ctr"/>
+          <a:lstStyle/>
+          <a:p>
+            <a:pPr algn="ctr"/>
+          </a:p>
+        </p:txBody>
+      </p:sp>
+      <p:sp>
+        <p:nvSpPr>
+          <p:cNvPr id="15" name="TextBox 14"/>
+          <p:cNvSpPr txBox="1"/>
+          <p:nvPr/>
+        </p:nvSpPr>
+        <p:spPr>
+          <a:xfrm>
+            <a:off x="731520" y="4114800"/>
+            <a:ext cx="2606040" cy="457200"/>
+          </a:xfrm>
+          <a:prstGeom prst="rect">
+            <a:avLst/>
+          </a:prstGeom>
+          <a:noFill/>
+        </p:spPr>
+        <p:txBody>
+          <a:bodyPr wrap="square" anchor="t" lIns="50800" rIns="50800" tIns="25400" bIns="25400">
             <a:spAutoFit/>
           </a:bodyPr>
           <a:lstStyle/>
@@ -3803,27 +4402,656 @@
               </a:spcAft>
             </a:pPr>
             <a:r>
-              <a:rPr sz="2200" b="1">
-                <a:solidFill>
-                  <a:srgbClr val="FFFFFF"/>
+              <a:rPr sz="1500" b="1">
+                <a:solidFill>
+                  <a:srgbClr val="CF0A2C"/>
                 </a:solidFill>
                 <a:latin typeface="Microsoft YaHei"/>
               </a:rPr>
-              <a:t>1</a:t>
-            </a:r>
-          </a:p>
-        </p:txBody>
-      </p:sp>
-      <p:sp>
-        <p:nvSpPr>
-          <p:cNvPr id="5" name="TextBox 4"/>
+              <a:t>机型异构</a:t>
+            </a:r>
+          </a:p>
+        </p:txBody>
+      </p:sp>
+      <p:sp>
+        <p:nvSpPr>
+          <p:cNvPr id="16" name="TextBox 15"/>
           <p:cNvSpPr txBox="1"/>
           <p:nvPr/>
         </p:nvSpPr>
         <p:spPr>
           <a:xfrm>
-            <a:off x="1051560" y="365760"/>
-            <a:ext cx="10515600" cy="548640"/>
+            <a:off x="841248" y="4617720"/>
+            <a:ext cx="2386584" cy="731520"/>
+          </a:xfrm>
+          <a:prstGeom prst="rect">
+            <a:avLst/>
+          </a:prstGeom>
+          <a:noFill/>
+        </p:spPr>
+        <p:txBody>
+          <a:bodyPr wrap="square" anchor="t" lIns="50800" rIns="50800" tIns="25400" bIns="25400">
+            <a:spAutoFit/>
+          </a:bodyPr>
+          <a:lstStyle/>
+          <a:p>
+            <a:pPr algn="ctr">
+              <a:lnSpc>
+                <a:spcPct val="108000"/>
+              </a:lnSpc>
+              <a:spcBef>
+                <a:spcPts val="0"/>
+              </a:spcBef>
+              <a:spcAft>
+                <a:spcPts val="400"/>
+              </a:spcAft>
+            </a:pPr>
+            <a:r>
+              <a:rPr sz="1200" b="0">
+                <a:solidFill>
+                  <a:srgbClr val="595959"/>
+                </a:solidFill>
+                <a:latin typeface="Microsoft YaHei"/>
+              </a:rPr>
+              <a:t>Intel / AMD x86 与鲲鹏 arm64 并存</a:t>
+            </a:r>
+          </a:p>
+        </p:txBody>
+      </p:sp>
+      <p:sp>
+        <p:nvSpPr>
+          <p:cNvPr id="17" name="Rectangle 16"/>
+          <p:cNvSpPr/>
+          <p:nvPr/>
+        </p:nvSpPr>
+        <p:spPr>
+          <a:xfrm>
+            <a:off x="3483864" y="3931920"/>
+            <a:ext cx="2606040" cy="1417320"/>
+          </a:xfrm>
+          <a:prstGeom prst="rect">
+            <a:avLst/>
+          </a:prstGeom>
+          <a:solidFill>
+            <a:srgbClr val="F4F4F4"/>
+          </a:solidFill>
+          <a:ln w="12700">
+            <a:solidFill>
+              <a:srgbClr val="D9D9D9"/>
+            </a:solidFill>
+          </a:ln>
+          <a:effectLst/>
+        </p:spPr>
+        <p:style>
+          <a:lnRef idx="1">
+            <a:schemeClr val="accent1"/>
+          </a:lnRef>
+          <a:fillRef idx="3">
+            <a:schemeClr val="accent1"/>
+          </a:fillRef>
+          <a:effectRef idx="2">
+            <a:schemeClr val="accent1"/>
+          </a:effectRef>
+          <a:fontRef idx="minor">
+            <a:schemeClr val="lt1"/>
+          </a:fontRef>
+        </p:style>
+        <p:txBody>
+          <a:bodyPr rtlCol="0" anchor="ctr"/>
+          <a:lstStyle/>
+          <a:p>
+            <a:pPr algn="ctr"/>
+          </a:p>
+        </p:txBody>
+      </p:sp>
+      <p:sp>
+        <p:nvSpPr>
+          <p:cNvPr id="18" name="Rectangle 17"/>
+          <p:cNvSpPr/>
+          <p:nvPr/>
+        </p:nvSpPr>
+        <p:spPr>
+          <a:xfrm>
+            <a:off x="3483864" y="3931920"/>
+            <a:ext cx="2606040" cy="91440"/>
+          </a:xfrm>
+          <a:prstGeom prst="rect">
+            <a:avLst/>
+          </a:prstGeom>
+          <a:solidFill>
+            <a:srgbClr val="CF0A2C"/>
+          </a:solidFill>
+          <a:ln>
+            <a:noFill/>
+          </a:ln>
+          <a:effectLst/>
+        </p:spPr>
+        <p:style>
+          <a:lnRef idx="1">
+            <a:schemeClr val="accent1"/>
+          </a:lnRef>
+          <a:fillRef idx="3">
+            <a:schemeClr val="accent1"/>
+          </a:fillRef>
+          <a:effectRef idx="2">
+            <a:schemeClr val="accent1"/>
+          </a:effectRef>
+          <a:fontRef idx="minor">
+            <a:schemeClr val="lt1"/>
+          </a:fontRef>
+        </p:style>
+        <p:txBody>
+          <a:bodyPr rtlCol="0" anchor="ctr"/>
+          <a:lstStyle/>
+          <a:p>
+            <a:pPr algn="ctr"/>
+          </a:p>
+        </p:txBody>
+      </p:sp>
+      <p:sp>
+        <p:nvSpPr>
+          <p:cNvPr id="19" name="TextBox 18"/>
+          <p:cNvSpPr txBox="1"/>
+          <p:nvPr/>
+        </p:nvSpPr>
+        <p:spPr>
+          <a:xfrm>
+            <a:off x="3483864" y="4114800"/>
+            <a:ext cx="2606040" cy="457200"/>
+          </a:xfrm>
+          <a:prstGeom prst="rect">
+            <a:avLst/>
+          </a:prstGeom>
+          <a:noFill/>
+        </p:spPr>
+        <p:txBody>
+          <a:bodyPr wrap="square" anchor="t" lIns="50800" rIns="50800" tIns="25400" bIns="25400">
+            <a:spAutoFit/>
+          </a:bodyPr>
+          <a:lstStyle/>
+          <a:p>
+            <a:pPr algn="ctr">
+              <a:lnSpc>
+                <a:spcPct val="100000"/>
+              </a:lnSpc>
+              <a:spcBef>
+                <a:spcPts val="0"/>
+              </a:spcBef>
+              <a:spcAft>
+                <a:spcPts val="400"/>
+              </a:spcAft>
+            </a:pPr>
+            <a:r>
+              <a:rPr sz="1500" b="1">
+                <a:solidFill>
+                  <a:srgbClr val="CF0A2C"/>
+                </a:solidFill>
+                <a:latin typeface="Microsoft YaHei"/>
+              </a:rPr>
+              <a:t>内核碎片化</a:t>
+            </a:r>
+          </a:p>
+        </p:txBody>
+      </p:sp>
+      <p:sp>
+        <p:nvSpPr>
+          <p:cNvPr id="20" name="TextBox 19"/>
+          <p:cNvSpPr txBox="1"/>
+          <p:nvPr/>
+        </p:nvSpPr>
+        <p:spPr>
+          <a:xfrm>
+            <a:off x="3593592" y="4617720"/>
+            <a:ext cx="2386584" cy="731520"/>
+          </a:xfrm>
+          <a:prstGeom prst="rect">
+            <a:avLst/>
+          </a:prstGeom>
+          <a:noFill/>
+        </p:spPr>
+        <p:txBody>
+          <a:bodyPr wrap="square" anchor="t" lIns="50800" rIns="50800" tIns="25400" bIns="25400">
+            <a:spAutoFit/>
+          </a:bodyPr>
+          <a:lstStyle/>
+          <a:p>
+            <a:pPr algn="ctr">
+              <a:lnSpc>
+                <a:spcPct val="108000"/>
+              </a:lnSpc>
+              <a:spcBef>
+                <a:spcPts val="0"/>
+              </a:spcBef>
+              <a:spcAft>
+                <a:spcPts val="400"/>
+              </a:spcAft>
+            </a:pPr>
+            <a:r>
+              <a:rPr sz="1200" b="0">
+                <a:solidFill>
+                  <a:srgbClr val="595959"/>
+                </a:solidFill>
+                <a:latin typeface="Microsoft YaHei"/>
+              </a:rPr>
+              <a:t>upstream 与 vendor 内核并存，关键符号未导出、无 sysfs</a:t>
+            </a:r>
+          </a:p>
+        </p:txBody>
+      </p:sp>
+      <p:sp>
+        <p:nvSpPr>
+          <p:cNvPr id="21" name="Rectangle 20"/>
+          <p:cNvSpPr/>
+          <p:nvPr/>
+        </p:nvSpPr>
+        <p:spPr>
+          <a:xfrm>
+            <a:off x="6236208" y="3931920"/>
+            <a:ext cx="2606040" cy="1417320"/>
+          </a:xfrm>
+          <a:prstGeom prst="rect">
+            <a:avLst/>
+          </a:prstGeom>
+          <a:solidFill>
+            <a:srgbClr val="F4F4F4"/>
+          </a:solidFill>
+          <a:ln w="12700">
+            <a:solidFill>
+              <a:srgbClr val="D9D9D9"/>
+            </a:solidFill>
+          </a:ln>
+          <a:effectLst/>
+        </p:spPr>
+        <p:style>
+          <a:lnRef idx="1">
+            <a:schemeClr val="accent1"/>
+          </a:lnRef>
+          <a:fillRef idx="3">
+            <a:schemeClr val="accent1"/>
+          </a:fillRef>
+          <a:effectRef idx="2">
+            <a:schemeClr val="accent1"/>
+          </a:effectRef>
+          <a:fontRef idx="minor">
+            <a:schemeClr val="lt1"/>
+          </a:fontRef>
+        </p:style>
+        <p:txBody>
+          <a:bodyPr rtlCol="0" anchor="ctr"/>
+          <a:lstStyle/>
+          <a:p>
+            <a:pPr algn="ctr"/>
+          </a:p>
+        </p:txBody>
+      </p:sp>
+      <p:sp>
+        <p:nvSpPr>
+          <p:cNvPr id="22" name="Rectangle 21"/>
+          <p:cNvSpPr/>
+          <p:nvPr/>
+        </p:nvSpPr>
+        <p:spPr>
+          <a:xfrm>
+            <a:off x="6236208" y="3931920"/>
+            <a:ext cx="2606040" cy="91440"/>
+          </a:xfrm>
+          <a:prstGeom prst="rect">
+            <a:avLst/>
+          </a:prstGeom>
+          <a:solidFill>
+            <a:srgbClr val="CF0A2C"/>
+          </a:solidFill>
+          <a:ln>
+            <a:noFill/>
+          </a:ln>
+          <a:effectLst/>
+        </p:spPr>
+        <p:style>
+          <a:lnRef idx="1">
+            <a:schemeClr val="accent1"/>
+          </a:lnRef>
+          <a:fillRef idx="3">
+            <a:schemeClr val="accent1"/>
+          </a:fillRef>
+          <a:effectRef idx="2">
+            <a:schemeClr val="accent1"/>
+          </a:effectRef>
+          <a:fontRef idx="minor">
+            <a:schemeClr val="lt1"/>
+          </a:fontRef>
+        </p:style>
+        <p:txBody>
+          <a:bodyPr rtlCol="0" anchor="ctr"/>
+          <a:lstStyle/>
+          <a:p>
+            <a:pPr algn="ctr"/>
+          </a:p>
+        </p:txBody>
+      </p:sp>
+      <p:sp>
+        <p:nvSpPr>
+          <p:cNvPr id="23" name="TextBox 22"/>
+          <p:cNvSpPr txBox="1"/>
+          <p:nvPr/>
+        </p:nvSpPr>
+        <p:spPr>
+          <a:xfrm>
+            <a:off x="6236208" y="4114800"/>
+            <a:ext cx="2606040" cy="457200"/>
+          </a:xfrm>
+          <a:prstGeom prst="rect">
+            <a:avLst/>
+          </a:prstGeom>
+          <a:noFill/>
+        </p:spPr>
+        <p:txBody>
+          <a:bodyPr wrap="square" anchor="t" lIns="50800" rIns="50800" tIns="25400" bIns="25400">
+            <a:spAutoFit/>
+          </a:bodyPr>
+          <a:lstStyle/>
+          <a:p>
+            <a:pPr algn="ctr">
+              <a:lnSpc>
+                <a:spcPct val="100000"/>
+              </a:lnSpc>
+              <a:spcBef>
+                <a:spcPts val="0"/>
+              </a:spcBef>
+              <a:spcAft>
+                <a:spcPts val="400"/>
+              </a:spcAft>
+            </a:pPr>
+            <a:r>
+              <a:rPr sz="1500" b="1">
+                <a:solidFill>
+                  <a:srgbClr val="CF0A2C"/>
+                </a:solidFill>
+                <a:latin typeface="Microsoft YaHei"/>
+              </a:rPr>
+              <a:t>hotplug 不可靠</a:t>
+            </a:r>
+          </a:p>
+        </p:txBody>
+      </p:sp>
+      <p:sp>
+        <p:nvSpPr>
+          <p:cNvPr id="24" name="TextBox 23"/>
+          <p:cNvSpPr txBox="1"/>
+          <p:nvPr/>
+        </p:nvSpPr>
+        <p:spPr>
+          <a:xfrm>
+            <a:off x="6345936" y="4617720"/>
+            <a:ext cx="2386584" cy="731520"/>
+          </a:xfrm>
+          <a:prstGeom prst="rect">
+            <a:avLst/>
+          </a:prstGeom>
+          <a:noFill/>
+        </p:spPr>
+        <p:txBody>
+          <a:bodyPr wrap="square" anchor="t" lIns="50800" rIns="50800" tIns="25400" bIns="25400">
+            <a:spAutoFit/>
+          </a:bodyPr>
+          <a:lstStyle/>
+          <a:p>
+            <a:pPr algn="ctr">
+              <a:lnSpc>
+                <a:spcPct val="108000"/>
+              </a:lnSpc>
+              <a:spcBef>
+                <a:spcPts val="0"/>
+              </a:spcBef>
+              <a:spcAft>
+                <a:spcPts val="400"/>
+              </a:spcAft>
+            </a:pPr>
+            <a:r>
+              <a:rPr sz="1200" b="0">
+                <a:solidFill>
+                  <a:srgbClr val="595959"/>
+                </a:solidFill>
+                <a:latin typeface="Microsoft YaHei"/>
+              </a:rPr>
+              <a:t>vendor 内核 CPU 热插拔回调链存在硬死锁</a:t>
+            </a:r>
+          </a:p>
+        </p:txBody>
+      </p:sp>
+      <p:sp>
+        <p:nvSpPr>
+          <p:cNvPr id="25" name="Rectangle 24"/>
+          <p:cNvSpPr/>
+          <p:nvPr/>
+        </p:nvSpPr>
+        <p:spPr>
+          <a:xfrm>
+            <a:off x="8988552" y="3931920"/>
+            <a:ext cx="2606040" cy="1417320"/>
+          </a:xfrm>
+          <a:prstGeom prst="rect">
+            <a:avLst/>
+          </a:prstGeom>
+          <a:solidFill>
+            <a:srgbClr val="F4F4F4"/>
+          </a:solidFill>
+          <a:ln w="12700">
+            <a:solidFill>
+              <a:srgbClr val="D9D9D9"/>
+            </a:solidFill>
+          </a:ln>
+          <a:effectLst/>
+        </p:spPr>
+        <p:style>
+          <a:lnRef idx="1">
+            <a:schemeClr val="accent1"/>
+          </a:lnRef>
+          <a:fillRef idx="3">
+            <a:schemeClr val="accent1"/>
+          </a:fillRef>
+          <a:effectRef idx="2">
+            <a:schemeClr val="accent1"/>
+          </a:effectRef>
+          <a:fontRef idx="minor">
+            <a:schemeClr val="lt1"/>
+          </a:fontRef>
+        </p:style>
+        <p:txBody>
+          <a:bodyPr rtlCol="0" anchor="ctr"/>
+          <a:lstStyle/>
+          <a:p>
+            <a:pPr algn="ctr"/>
+          </a:p>
+        </p:txBody>
+      </p:sp>
+      <p:sp>
+        <p:nvSpPr>
+          <p:cNvPr id="26" name="Rectangle 25"/>
+          <p:cNvSpPr/>
+          <p:nvPr/>
+        </p:nvSpPr>
+        <p:spPr>
+          <a:xfrm>
+            <a:off x="8988552" y="3931920"/>
+            <a:ext cx="2606040" cy="91440"/>
+          </a:xfrm>
+          <a:prstGeom prst="rect">
+            <a:avLst/>
+          </a:prstGeom>
+          <a:solidFill>
+            <a:srgbClr val="CF0A2C"/>
+          </a:solidFill>
+          <a:ln>
+            <a:noFill/>
+          </a:ln>
+          <a:effectLst/>
+        </p:spPr>
+        <p:style>
+          <a:lnRef idx="1">
+            <a:schemeClr val="accent1"/>
+          </a:lnRef>
+          <a:fillRef idx="3">
+            <a:schemeClr val="accent1"/>
+          </a:fillRef>
+          <a:effectRef idx="2">
+            <a:schemeClr val="accent1"/>
+          </a:effectRef>
+          <a:fontRef idx="minor">
+            <a:schemeClr val="lt1"/>
+          </a:fontRef>
+        </p:style>
+        <p:txBody>
+          <a:bodyPr rtlCol="0" anchor="ctr"/>
+          <a:lstStyle/>
+          <a:p>
+            <a:pPr algn="ctr"/>
+          </a:p>
+        </p:txBody>
+      </p:sp>
+      <p:sp>
+        <p:nvSpPr>
+          <p:cNvPr id="27" name="TextBox 26"/>
+          <p:cNvSpPr txBox="1"/>
+          <p:nvPr/>
+        </p:nvSpPr>
+        <p:spPr>
+          <a:xfrm>
+            <a:off x="8988552" y="4114800"/>
+            <a:ext cx="2606040" cy="457200"/>
+          </a:xfrm>
+          <a:prstGeom prst="rect">
+            <a:avLst/>
+          </a:prstGeom>
+          <a:noFill/>
+        </p:spPr>
+        <p:txBody>
+          <a:bodyPr wrap="square" anchor="t" lIns="50800" rIns="50800" tIns="25400" bIns="25400">
+            <a:spAutoFit/>
+          </a:bodyPr>
+          <a:lstStyle/>
+          <a:p>
+            <a:pPr algn="ctr">
+              <a:lnSpc>
+                <a:spcPct val="100000"/>
+              </a:lnSpc>
+              <a:spcBef>
+                <a:spcPts val="0"/>
+              </a:spcBef>
+              <a:spcAft>
+                <a:spcPts val="400"/>
+              </a:spcAft>
+            </a:pPr>
+            <a:r>
+              <a:rPr sz="1500" b="1">
+                <a:solidFill>
+                  <a:srgbClr val="CF0A2C"/>
+                </a:solidFill>
+                <a:latin typeface="Microsoft YaHei"/>
+              </a:rPr>
+              <a:t>不能改源码</a:t>
+            </a:r>
+          </a:p>
+        </p:txBody>
+      </p:sp>
+      <p:sp>
+        <p:nvSpPr>
+          <p:cNvPr id="28" name="TextBox 27"/>
+          <p:cNvSpPr txBox="1"/>
+          <p:nvPr/>
+        </p:nvSpPr>
+        <p:spPr>
+          <a:xfrm>
+            <a:off x="9098280" y="4617720"/>
+            <a:ext cx="2386584" cy="731520"/>
+          </a:xfrm>
+          <a:prstGeom prst="rect">
+            <a:avLst/>
+          </a:prstGeom>
+          <a:noFill/>
+        </p:spPr>
+        <p:txBody>
+          <a:bodyPr wrap="square" anchor="t" lIns="50800" rIns="50800" tIns="25400" bIns="25400">
+            <a:spAutoFit/>
+          </a:bodyPr>
+          <a:lstStyle/>
+          <a:p>
+            <a:pPr algn="ctr">
+              <a:lnSpc>
+                <a:spcPct val="108000"/>
+              </a:lnSpc>
+              <a:spcBef>
+                <a:spcPts val="0"/>
+              </a:spcBef>
+              <a:spcAft>
+                <a:spcPts val="400"/>
+              </a:spcAft>
+            </a:pPr>
+            <a:r>
+              <a:rPr sz="1200" b="0">
+                <a:solidFill>
+                  <a:srgbClr val="595959"/>
+                </a:solidFill>
+                <a:latin typeface="Microsoft YaHei"/>
+              </a:rPr>
+              <a:t>无法为每个内核版本逐一改并重发内核</a:t>
+            </a:r>
+          </a:p>
+        </p:txBody>
+      </p:sp>
+      <p:sp>
+        <p:nvSpPr>
+          <p:cNvPr id="29" name="Rectangle 28"/>
+          <p:cNvSpPr/>
+          <p:nvPr/>
+        </p:nvSpPr>
+        <p:spPr>
+          <a:xfrm>
+            <a:off x="731520" y="5623560"/>
+            <a:ext cx="10725912" cy="777240"/>
+          </a:xfrm>
+          <a:prstGeom prst="rect">
+            <a:avLst/>
+          </a:prstGeom>
+          <a:solidFill>
+            <a:srgbClr val="CF0A2C"/>
+          </a:solidFill>
+          <a:ln>
+            <a:noFill/>
+          </a:ln>
+          <a:effectLst/>
+        </p:spPr>
+        <p:style>
+          <a:lnRef idx="1">
+            <a:schemeClr val="accent1"/>
+          </a:lnRef>
+          <a:fillRef idx="3">
+            <a:schemeClr val="accent1"/>
+          </a:fillRef>
+          <a:effectRef idx="2">
+            <a:schemeClr val="accent1"/>
+          </a:effectRef>
+          <a:fontRef idx="minor">
+            <a:schemeClr val="lt1"/>
+          </a:fontRef>
+        </p:style>
+        <p:txBody>
+          <a:bodyPr rtlCol="0" anchor="ctr"/>
+          <a:lstStyle/>
+          <a:p>
+            <a:pPr algn="ctr"/>
+          </a:p>
+        </p:txBody>
+      </p:sp>
+      <p:sp>
+        <p:nvSpPr>
+          <p:cNvPr id="30" name="TextBox 29"/>
+          <p:cNvSpPr txBox="1"/>
+          <p:nvPr/>
+        </p:nvSpPr>
+        <p:spPr>
+          <a:xfrm>
+            <a:off x="914400" y="5623560"/>
+            <a:ext cx="10424160" cy="777240"/>
           </a:xfrm>
           <a:prstGeom prst="rect">
             <a:avLst/>
@@ -3848,898 +5076,9 @@
               </a:spcAft>
             </a:pPr>
             <a:r>
-              <a:rPr sz="2600" b="1">
-                <a:solidFill>
-                  <a:srgbClr val="1F2D5A"/>
-                </a:solidFill>
-                <a:latin typeface="Microsoft YaHei"/>
-              </a:rPr>
-              <a:t>问题：单器件故障 → 整机宕机</a:t>
-            </a:r>
-          </a:p>
-        </p:txBody>
-      </p:sp>
-      <p:sp>
-        <p:nvSpPr>
-          <p:cNvPr id="6" name="Rounded Rectangle 5"/>
-          <p:cNvSpPr/>
-          <p:nvPr/>
-        </p:nvSpPr>
-        <p:spPr>
-          <a:xfrm>
-            <a:off x="1051560" y="932688"/>
-            <a:ext cx="10058400" cy="27940"/>
-          </a:xfrm>
-          <a:prstGeom prst="roundRect">
-            <a:avLst>
-              <a:gd name="adj" fmla="val 6000"/>
-            </a:avLst>
-          </a:prstGeom>
-          <a:solidFill>
-            <a:srgbClr val="C0392B"/>
-          </a:solidFill>
-          <a:ln>
-            <a:noFill/>
-          </a:ln>
-          <a:effectLst/>
-        </p:spPr>
-        <p:style>
-          <a:lnRef idx="1">
-            <a:schemeClr val="accent1"/>
-          </a:lnRef>
-          <a:fillRef idx="3">
-            <a:schemeClr val="accent1"/>
-          </a:fillRef>
-          <a:effectRef idx="2">
-            <a:schemeClr val="accent1"/>
-          </a:effectRef>
-          <a:fontRef idx="minor">
-            <a:schemeClr val="lt1"/>
-          </a:fontRef>
-        </p:style>
-        <p:txBody>
-          <a:bodyPr rtlCol="0" anchor="ctr"/>
-          <a:lstStyle/>
-          <a:p>
-            <a:pPr algn="ctr"/>
-          </a:p>
-        </p:txBody>
-      </p:sp>
-      <p:sp>
-        <p:nvSpPr>
-          <p:cNvPr id="7" name="TextBox 6"/>
-          <p:cNvSpPr txBox="1"/>
-          <p:nvPr/>
-        </p:nvSpPr>
-        <p:spPr>
-          <a:xfrm>
-            <a:off x="548640" y="1143000"/>
-            <a:ext cx="11064240" cy="457200"/>
-          </a:xfrm>
-          <a:prstGeom prst="rect">
-            <a:avLst/>
-          </a:prstGeom>
-          <a:noFill/>
-        </p:spPr>
-        <p:txBody>
-          <a:bodyPr wrap="square" anchor="t" lIns="50800" rIns="50800" tIns="25400" bIns="25400">
-            <a:spAutoFit/>
-          </a:bodyPr>
-          <a:lstStyle/>
-          <a:p>
-            <a:pPr algn="l">
-              <a:lnSpc>
-                <a:spcPct val="100000"/>
-              </a:lnSpc>
-              <a:spcBef>
-                <a:spcPts val="0"/>
-              </a:spcBef>
-              <a:spcAft>
-                <a:spcPts val="400"/>
-              </a:spcAft>
-            </a:pPr>
-            <a:r>
-              <a:rPr sz="1600" b="0">
-                <a:solidFill>
-                  <a:srgbClr val="222222"/>
-                </a:solidFill>
-                <a:latin typeface="Microsoft YaHei"/>
-              </a:rPr>
-              <a:t>单台云宿主机承载 </a:t>
-            </a:r>
-            <a:r>
-              <a:rPr sz="1600" b="1">
-                <a:solidFill>
-                  <a:srgbClr val="C0392B"/>
-                </a:solidFill>
-                <a:latin typeface="Microsoft YaHei"/>
-              </a:rPr>
-              <a:t>上百个 VM</a:t>
-            </a:r>
-            <a:r>
-              <a:rPr sz="1600" b="0">
-                <a:solidFill>
-                  <a:srgbClr val="222222"/>
-                </a:solidFill>
-                <a:latin typeface="Microsoft YaHei"/>
-              </a:rPr>
-              <a:t>。任一 CPU 缓存 / TLB / 总线或内存器件出现不可纠正错误（UCE）：</a:t>
-            </a:r>
-          </a:p>
-        </p:txBody>
-      </p:sp>
-      <p:sp>
-        <p:nvSpPr>
-          <p:cNvPr id="8" name="Rounded Rectangle 7"/>
-          <p:cNvSpPr/>
-          <p:nvPr/>
-        </p:nvSpPr>
-        <p:spPr>
-          <a:xfrm>
-            <a:off x="548640" y="1783080"/>
-            <a:ext cx="11064240" cy="914400"/>
-          </a:xfrm>
-          <a:prstGeom prst="roundRect">
-            <a:avLst>
-              <a:gd name="adj" fmla="val 6000"/>
-            </a:avLst>
-          </a:prstGeom>
-          <a:solidFill>
-            <a:srgbClr val="F2F4F8"/>
-          </a:solidFill>
-          <a:ln w="19050">
-            <a:solidFill>
-              <a:srgbClr val="C0392B"/>
-            </a:solidFill>
-          </a:ln>
-          <a:effectLst/>
-        </p:spPr>
-        <p:style>
-          <a:lnRef idx="1">
-            <a:schemeClr val="accent1"/>
-          </a:lnRef>
-          <a:fillRef idx="3">
-            <a:schemeClr val="accent1"/>
-          </a:fillRef>
-          <a:effectRef idx="2">
-            <a:schemeClr val="accent1"/>
-          </a:effectRef>
-          <a:fontRef idx="minor">
-            <a:schemeClr val="lt1"/>
-          </a:fontRef>
-        </p:style>
-        <p:txBody>
-          <a:bodyPr rtlCol="0" anchor="ctr"/>
-          <a:lstStyle/>
-          <a:p>
-            <a:pPr algn="ctr"/>
-          </a:p>
-        </p:txBody>
-      </p:sp>
-      <p:sp>
-        <p:nvSpPr>
-          <p:cNvPr id="9" name="TextBox 8"/>
-          <p:cNvSpPr txBox="1"/>
-          <p:nvPr/>
-        </p:nvSpPr>
-        <p:spPr>
-          <a:xfrm>
-            <a:off x="731520" y="1783080"/>
-            <a:ext cx="10698480" cy="914400"/>
-          </a:xfrm>
-          <a:prstGeom prst="rect">
-            <a:avLst/>
-          </a:prstGeom>
-          <a:noFill/>
-        </p:spPr>
-        <p:txBody>
-          <a:bodyPr wrap="square" anchor="ctr" lIns="50800" rIns="50800" tIns="25400" bIns="25400">
-            <a:spAutoFit/>
-          </a:bodyPr>
-          <a:lstStyle/>
-          <a:p>
-            <a:pPr algn="l">
-              <a:lnSpc>
-                <a:spcPct val="100000"/>
-              </a:lnSpc>
-              <a:spcBef>
-                <a:spcPts val="0"/>
-              </a:spcBef>
-              <a:spcAft>
-                <a:spcPts val="400"/>
-              </a:spcAft>
-            </a:pPr>
-            <a:r>
-              <a:rPr sz="1600" b="1">
-                <a:solidFill>
-                  <a:srgbClr val="222222"/>
-                </a:solidFill>
-                <a:latin typeface="Microsoft YaHei"/>
-              </a:rPr>
-              <a:t>单核 Cache 1bit 翻转  →  do_machine_check() 早期 mce_panic()  →  整机 panic + kdump + 重启  →  全部 VM 同时掉线</a:t>
-            </a:r>
-          </a:p>
-        </p:txBody>
-      </p:sp>
-      <p:sp>
-        <p:nvSpPr>
-          <p:cNvPr id="10" name="TextBox 9"/>
-          <p:cNvSpPr txBox="1"/>
-          <p:nvPr/>
-        </p:nvSpPr>
-        <p:spPr>
-          <a:xfrm>
-            <a:off x="548640" y="2880360"/>
-            <a:ext cx="11064240" cy="457200"/>
-          </a:xfrm>
-          <a:prstGeom prst="rect">
-            <a:avLst/>
-          </a:prstGeom>
-          <a:noFill/>
-        </p:spPr>
-        <p:txBody>
-          <a:bodyPr wrap="square" anchor="t" lIns="50800" rIns="50800" tIns="25400" bIns="25400">
-            <a:spAutoFit/>
-          </a:bodyPr>
-          <a:lstStyle/>
-          <a:p>
-            <a:pPr algn="l">
-              <a:lnSpc>
-                <a:spcPct val="100000"/>
-              </a:lnSpc>
-              <a:spcBef>
-                <a:spcPts val="0"/>
-              </a:spcBef>
-              <a:spcAft>
-                <a:spcPts val="400"/>
-              </a:spcAft>
-            </a:pPr>
-            <a:r>
-              <a:rPr sz="1400" b="0">
-                <a:solidFill>
-                  <a:srgbClr val="555555"/>
-                </a:solidFill>
-                <a:latin typeface="Microsoft YaHei"/>
-              </a:rPr>
-              <a:t>故障爆炸半径被放大到整机；事件在 panic 时刻来不及进入可处置的解码链，丧失“局部隔离、整体存活”的机会。</a:t>
-            </a:r>
-          </a:p>
-        </p:txBody>
-      </p:sp>
-      <p:sp>
-        <p:nvSpPr>
-          <p:cNvPr id="11" name="TextBox 10"/>
-          <p:cNvSpPr txBox="1"/>
-          <p:nvPr/>
-        </p:nvSpPr>
-        <p:spPr>
-          <a:xfrm>
-            <a:off x="548640" y="3520440"/>
-            <a:ext cx="11064240" cy="365760"/>
-          </a:xfrm>
-          <a:prstGeom prst="rect">
-            <a:avLst/>
-          </a:prstGeom>
-          <a:noFill/>
-        </p:spPr>
-        <p:txBody>
-          <a:bodyPr wrap="square" anchor="t" lIns="50800" rIns="50800" tIns="25400" bIns="25400">
-            <a:spAutoFit/>
-          </a:bodyPr>
-          <a:lstStyle/>
-          <a:p>
-            <a:pPr algn="l">
-              <a:lnSpc>
-                <a:spcPct val="100000"/>
-              </a:lnSpc>
-              <a:spcBef>
-                <a:spcPts val="0"/>
-              </a:spcBef>
-              <a:spcAft>
-                <a:spcPts val="400"/>
-              </a:spcAft>
-            </a:pPr>
-            <a:r>
-              <a:rPr sz="1600" b="1">
-                <a:solidFill>
-                  <a:srgbClr val="1F2D5A"/>
-                </a:solidFill>
-                <a:latin typeface="Microsoft YaHei"/>
-              </a:rPr>
-              <a:t>云厂商的现实约束（决定了方案形态）：</a:t>
-            </a:r>
-          </a:p>
-        </p:txBody>
-      </p:sp>
-      <p:sp>
-        <p:nvSpPr>
-          <p:cNvPr id="12" name="Rounded Rectangle 11"/>
-          <p:cNvSpPr/>
-          <p:nvPr/>
-        </p:nvSpPr>
-        <p:spPr>
-          <a:xfrm>
-            <a:off x="548640" y="3977639"/>
-            <a:ext cx="2679192" cy="1371600"/>
-          </a:xfrm>
-          <a:prstGeom prst="roundRect">
-            <a:avLst>
-              <a:gd name="adj" fmla="val 6000"/>
-            </a:avLst>
-          </a:prstGeom>
-          <a:solidFill>
-            <a:srgbClr val="FFFFFF"/>
-          </a:solidFill>
-          <a:ln w="15240">
-            <a:solidFill>
-              <a:srgbClr val="C0392B"/>
-            </a:solidFill>
-          </a:ln>
-          <a:effectLst/>
-        </p:spPr>
-        <p:style>
-          <a:lnRef idx="1">
-            <a:schemeClr val="accent1"/>
-          </a:lnRef>
-          <a:fillRef idx="3">
-            <a:schemeClr val="accent1"/>
-          </a:fillRef>
-          <a:effectRef idx="2">
-            <a:schemeClr val="accent1"/>
-          </a:effectRef>
-          <a:fontRef idx="minor">
-            <a:schemeClr val="lt1"/>
-          </a:fontRef>
-        </p:style>
-        <p:txBody>
-          <a:bodyPr rtlCol="0" anchor="ctr"/>
-          <a:lstStyle/>
-          <a:p>
-            <a:pPr algn="ctr"/>
-          </a:p>
-        </p:txBody>
-      </p:sp>
-      <p:sp>
-        <p:nvSpPr>
-          <p:cNvPr id="13" name="TextBox 12"/>
-          <p:cNvSpPr txBox="1"/>
-          <p:nvPr/>
-        </p:nvSpPr>
-        <p:spPr>
-          <a:xfrm>
-            <a:off x="548640" y="4114800"/>
-            <a:ext cx="2679192" cy="457200"/>
-          </a:xfrm>
-          <a:prstGeom prst="rect">
-            <a:avLst/>
-          </a:prstGeom>
-          <a:noFill/>
-        </p:spPr>
-        <p:txBody>
-          <a:bodyPr wrap="square" anchor="t" lIns="50800" rIns="50800" tIns="25400" bIns="25400">
-            <a:spAutoFit/>
-          </a:bodyPr>
-          <a:lstStyle/>
-          <a:p>
-            <a:pPr algn="ctr">
-              <a:lnSpc>
-                <a:spcPct val="100000"/>
-              </a:lnSpc>
-              <a:spcBef>
-                <a:spcPts val="0"/>
-              </a:spcBef>
-              <a:spcAft>
-                <a:spcPts val="400"/>
-              </a:spcAft>
-            </a:pPr>
-            <a:r>
               <a:rPr sz="1500" b="1">
                 <a:solidFill>
-                  <a:srgbClr val="C0392B"/>
-                </a:solidFill>
-                <a:latin typeface="Microsoft YaHei"/>
-              </a:rPr>
-              <a:t>机型异构</a:t>
-            </a:r>
-          </a:p>
-        </p:txBody>
-      </p:sp>
-      <p:sp>
-        <p:nvSpPr>
-          <p:cNvPr id="14" name="TextBox 13"/>
-          <p:cNvSpPr txBox="1"/>
-          <p:nvPr/>
-        </p:nvSpPr>
-        <p:spPr>
-          <a:xfrm>
-            <a:off x="640080" y="4617720"/>
-            <a:ext cx="2496312" cy="731520"/>
-          </a:xfrm>
-          <a:prstGeom prst="rect">
-            <a:avLst/>
-          </a:prstGeom>
-          <a:noFill/>
-        </p:spPr>
-        <p:txBody>
-          <a:bodyPr wrap="square" anchor="t" lIns="50800" rIns="50800" tIns="25400" bIns="25400">
-            <a:spAutoFit/>
-          </a:bodyPr>
-          <a:lstStyle/>
-          <a:p>
-            <a:pPr algn="ctr">
-              <a:lnSpc>
-                <a:spcPct val="105000"/>
-              </a:lnSpc>
-              <a:spcBef>
-                <a:spcPts val="0"/>
-              </a:spcBef>
-              <a:spcAft>
-                <a:spcPts val="400"/>
-              </a:spcAft>
-            </a:pPr>
-            <a:r>
-              <a:rPr sz="1200" b="0">
-                <a:solidFill>
-                  <a:srgbClr val="555555"/>
-                </a:solidFill>
-                <a:latin typeface="Microsoft YaHei"/>
-              </a:rPr>
-              <a:t>Intel / AMD x86 与鲲鹏 arm64 并存</a:t>
-            </a:r>
-          </a:p>
-        </p:txBody>
-      </p:sp>
-      <p:sp>
-        <p:nvSpPr>
-          <p:cNvPr id="15" name="Rounded Rectangle 14"/>
-          <p:cNvSpPr/>
-          <p:nvPr/>
-        </p:nvSpPr>
-        <p:spPr>
-          <a:xfrm>
-            <a:off x="3346704" y="3977639"/>
-            <a:ext cx="2679192" cy="1371600"/>
-          </a:xfrm>
-          <a:prstGeom prst="roundRect">
-            <a:avLst>
-              <a:gd name="adj" fmla="val 6000"/>
-            </a:avLst>
-          </a:prstGeom>
-          <a:solidFill>
-            <a:srgbClr val="FFFFFF"/>
-          </a:solidFill>
-          <a:ln w="15240">
-            <a:solidFill>
-              <a:srgbClr val="C0392B"/>
-            </a:solidFill>
-          </a:ln>
-          <a:effectLst/>
-        </p:spPr>
-        <p:style>
-          <a:lnRef idx="1">
-            <a:schemeClr val="accent1"/>
-          </a:lnRef>
-          <a:fillRef idx="3">
-            <a:schemeClr val="accent1"/>
-          </a:fillRef>
-          <a:effectRef idx="2">
-            <a:schemeClr val="accent1"/>
-          </a:effectRef>
-          <a:fontRef idx="minor">
-            <a:schemeClr val="lt1"/>
-          </a:fontRef>
-        </p:style>
-        <p:txBody>
-          <a:bodyPr rtlCol="0" anchor="ctr"/>
-          <a:lstStyle/>
-          <a:p>
-            <a:pPr algn="ctr"/>
-          </a:p>
-        </p:txBody>
-      </p:sp>
-      <p:sp>
-        <p:nvSpPr>
-          <p:cNvPr id="16" name="TextBox 15"/>
-          <p:cNvSpPr txBox="1"/>
-          <p:nvPr/>
-        </p:nvSpPr>
-        <p:spPr>
-          <a:xfrm>
-            <a:off x="3346704" y="4114800"/>
-            <a:ext cx="2679192" cy="457200"/>
-          </a:xfrm>
-          <a:prstGeom prst="rect">
-            <a:avLst/>
-          </a:prstGeom>
-          <a:noFill/>
-        </p:spPr>
-        <p:txBody>
-          <a:bodyPr wrap="square" anchor="t" lIns="50800" rIns="50800" tIns="25400" bIns="25400">
-            <a:spAutoFit/>
-          </a:bodyPr>
-          <a:lstStyle/>
-          <a:p>
-            <a:pPr algn="ctr">
-              <a:lnSpc>
-                <a:spcPct val="100000"/>
-              </a:lnSpc>
-              <a:spcBef>
-                <a:spcPts val="0"/>
-              </a:spcBef>
-              <a:spcAft>
-                <a:spcPts val="400"/>
-              </a:spcAft>
-            </a:pPr>
-            <a:r>
-              <a:rPr sz="1500" b="1">
-                <a:solidFill>
-                  <a:srgbClr val="C0392B"/>
-                </a:solidFill>
-                <a:latin typeface="Microsoft YaHei"/>
-              </a:rPr>
-              <a:t>内核碎片化</a:t>
-            </a:r>
-          </a:p>
-        </p:txBody>
-      </p:sp>
-      <p:sp>
-        <p:nvSpPr>
-          <p:cNvPr id="17" name="TextBox 16"/>
-          <p:cNvSpPr txBox="1"/>
-          <p:nvPr/>
-        </p:nvSpPr>
-        <p:spPr>
-          <a:xfrm>
-            <a:off x="3438144" y="4617720"/>
-            <a:ext cx="2496312" cy="731520"/>
-          </a:xfrm>
-          <a:prstGeom prst="rect">
-            <a:avLst/>
-          </a:prstGeom>
-          <a:noFill/>
-        </p:spPr>
-        <p:txBody>
-          <a:bodyPr wrap="square" anchor="t" lIns="50800" rIns="50800" tIns="25400" bIns="25400">
-            <a:spAutoFit/>
-          </a:bodyPr>
-          <a:lstStyle/>
-          <a:p>
-            <a:pPr algn="ctr">
-              <a:lnSpc>
-                <a:spcPct val="105000"/>
-              </a:lnSpc>
-              <a:spcBef>
-                <a:spcPts val="0"/>
-              </a:spcBef>
-              <a:spcAft>
-                <a:spcPts val="400"/>
-              </a:spcAft>
-            </a:pPr>
-            <a:r>
-              <a:rPr sz="1200" b="0">
-                <a:solidFill>
-                  <a:srgbClr val="555555"/>
-                </a:solidFill>
-                <a:latin typeface="Microsoft YaHei"/>
-              </a:rPr>
-              <a:t>upstream 与 vendor 内核并存，关键符号未导出、无 sysfs</a:t>
-            </a:r>
-          </a:p>
-        </p:txBody>
-      </p:sp>
-      <p:sp>
-        <p:nvSpPr>
-          <p:cNvPr id="18" name="Rounded Rectangle 17"/>
-          <p:cNvSpPr/>
-          <p:nvPr/>
-        </p:nvSpPr>
-        <p:spPr>
-          <a:xfrm>
-            <a:off x="6144768" y="3977639"/>
-            <a:ext cx="2679192" cy="1371600"/>
-          </a:xfrm>
-          <a:prstGeom prst="roundRect">
-            <a:avLst>
-              <a:gd name="adj" fmla="val 6000"/>
-            </a:avLst>
-          </a:prstGeom>
-          <a:solidFill>
-            <a:srgbClr val="FFFFFF"/>
-          </a:solidFill>
-          <a:ln w="15240">
-            <a:solidFill>
-              <a:srgbClr val="C0392B"/>
-            </a:solidFill>
-          </a:ln>
-          <a:effectLst/>
-        </p:spPr>
-        <p:style>
-          <a:lnRef idx="1">
-            <a:schemeClr val="accent1"/>
-          </a:lnRef>
-          <a:fillRef idx="3">
-            <a:schemeClr val="accent1"/>
-          </a:fillRef>
-          <a:effectRef idx="2">
-            <a:schemeClr val="accent1"/>
-          </a:effectRef>
-          <a:fontRef idx="minor">
-            <a:schemeClr val="lt1"/>
-          </a:fontRef>
-        </p:style>
-        <p:txBody>
-          <a:bodyPr rtlCol="0" anchor="ctr"/>
-          <a:lstStyle/>
-          <a:p>
-            <a:pPr algn="ctr"/>
-          </a:p>
-        </p:txBody>
-      </p:sp>
-      <p:sp>
-        <p:nvSpPr>
-          <p:cNvPr id="19" name="TextBox 18"/>
-          <p:cNvSpPr txBox="1"/>
-          <p:nvPr/>
-        </p:nvSpPr>
-        <p:spPr>
-          <a:xfrm>
-            <a:off x="6144768" y="4114800"/>
-            <a:ext cx="2679192" cy="457200"/>
-          </a:xfrm>
-          <a:prstGeom prst="rect">
-            <a:avLst/>
-          </a:prstGeom>
-          <a:noFill/>
-        </p:spPr>
-        <p:txBody>
-          <a:bodyPr wrap="square" anchor="t" lIns="50800" rIns="50800" tIns="25400" bIns="25400">
-            <a:spAutoFit/>
-          </a:bodyPr>
-          <a:lstStyle/>
-          <a:p>
-            <a:pPr algn="ctr">
-              <a:lnSpc>
-                <a:spcPct val="100000"/>
-              </a:lnSpc>
-              <a:spcBef>
-                <a:spcPts val="0"/>
-              </a:spcBef>
-              <a:spcAft>
-                <a:spcPts val="400"/>
-              </a:spcAft>
-            </a:pPr>
-            <a:r>
-              <a:rPr sz="1500" b="1">
-                <a:solidFill>
-                  <a:srgbClr val="C0392B"/>
-                </a:solidFill>
-                <a:latin typeface="Microsoft YaHei"/>
-              </a:rPr>
-              <a:t>hotplug 不可靠</a:t>
-            </a:r>
-          </a:p>
-        </p:txBody>
-      </p:sp>
-      <p:sp>
-        <p:nvSpPr>
-          <p:cNvPr id="20" name="TextBox 19"/>
-          <p:cNvSpPr txBox="1"/>
-          <p:nvPr/>
-        </p:nvSpPr>
-        <p:spPr>
-          <a:xfrm>
-            <a:off x="6236208" y="4617720"/>
-            <a:ext cx="2496312" cy="731520"/>
-          </a:xfrm>
-          <a:prstGeom prst="rect">
-            <a:avLst/>
-          </a:prstGeom>
-          <a:noFill/>
-        </p:spPr>
-        <p:txBody>
-          <a:bodyPr wrap="square" anchor="t" lIns="50800" rIns="50800" tIns="25400" bIns="25400">
-            <a:spAutoFit/>
-          </a:bodyPr>
-          <a:lstStyle/>
-          <a:p>
-            <a:pPr algn="ctr">
-              <a:lnSpc>
-                <a:spcPct val="105000"/>
-              </a:lnSpc>
-              <a:spcBef>
-                <a:spcPts val="0"/>
-              </a:spcBef>
-              <a:spcAft>
-                <a:spcPts val="400"/>
-              </a:spcAft>
-            </a:pPr>
-            <a:r>
-              <a:rPr sz="1200" b="0">
-                <a:solidFill>
-                  <a:srgbClr val="555555"/>
-                </a:solidFill>
-                <a:latin typeface="Microsoft YaHei"/>
-              </a:rPr>
-              <a:t>vendor 内核 CPU 热插拔回调链存在硬死锁</a:t>
-            </a:r>
-          </a:p>
-        </p:txBody>
-      </p:sp>
-      <p:sp>
-        <p:nvSpPr>
-          <p:cNvPr id="21" name="Rounded Rectangle 20"/>
-          <p:cNvSpPr/>
-          <p:nvPr/>
-        </p:nvSpPr>
-        <p:spPr>
-          <a:xfrm>
-            <a:off x="8942832" y="3977639"/>
-            <a:ext cx="2679192" cy="1371600"/>
-          </a:xfrm>
-          <a:prstGeom prst="roundRect">
-            <a:avLst>
-              <a:gd name="adj" fmla="val 6000"/>
-            </a:avLst>
-          </a:prstGeom>
-          <a:solidFill>
-            <a:srgbClr val="FFFFFF"/>
-          </a:solidFill>
-          <a:ln w="15240">
-            <a:solidFill>
-              <a:srgbClr val="C0392B"/>
-            </a:solidFill>
-          </a:ln>
-          <a:effectLst/>
-        </p:spPr>
-        <p:style>
-          <a:lnRef idx="1">
-            <a:schemeClr val="accent1"/>
-          </a:lnRef>
-          <a:fillRef idx="3">
-            <a:schemeClr val="accent1"/>
-          </a:fillRef>
-          <a:effectRef idx="2">
-            <a:schemeClr val="accent1"/>
-          </a:effectRef>
-          <a:fontRef idx="minor">
-            <a:schemeClr val="lt1"/>
-          </a:fontRef>
-        </p:style>
-        <p:txBody>
-          <a:bodyPr rtlCol="0" anchor="ctr"/>
-          <a:lstStyle/>
-          <a:p>
-            <a:pPr algn="ctr"/>
-          </a:p>
-        </p:txBody>
-      </p:sp>
-      <p:sp>
-        <p:nvSpPr>
-          <p:cNvPr id="22" name="TextBox 21"/>
-          <p:cNvSpPr txBox="1"/>
-          <p:nvPr/>
-        </p:nvSpPr>
-        <p:spPr>
-          <a:xfrm>
-            <a:off x="8942832" y="4114800"/>
-            <a:ext cx="2679192" cy="457200"/>
-          </a:xfrm>
-          <a:prstGeom prst="rect">
-            <a:avLst/>
-          </a:prstGeom>
-          <a:noFill/>
-        </p:spPr>
-        <p:txBody>
-          <a:bodyPr wrap="square" anchor="t" lIns="50800" rIns="50800" tIns="25400" bIns="25400">
-            <a:spAutoFit/>
-          </a:bodyPr>
-          <a:lstStyle/>
-          <a:p>
-            <a:pPr algn="ctr">
-              <a:lnSpc>
-                <a:spcPct val="100000"/>
-              </a:lnSpc>
-              <a:spcBef>
-                <a:spcPts val="0"/>
-              </a:spcBef>
-              <a:spcAft>
-                <a:spcPts val="400"/>
-              </a:spcAft>
-            </a:pPr>
-            <a:r>
-              <a:rPr sz="1500" b="1">
-                <a:solidFill>
-                  <a:srgbClr val="C0392B"/>
-                </a:solidFill>
-                <a:latin typeface="Microsoft YaHei"/>
-              </a:rPr>
-              <a:t>不能改源码</a:t>
-            </a:r>
-          </a:p>
-        </p:txBody>
-      </p:sp>
-      <p:sp>
-        <p:nvSpPr>
-          <p:cNvPr id="23" name="TextBox 22"/>
-          <p:cNvSpPr txBox="1"/>
-          <p:nvPr/>
-        </p:nvSpPr>
-        <p:spPr>
-          <a:xfrm>
-            <a:off x="9034272" y="4617720"/>
-            <a:ext cx="2496312" cy="731520"/>
-          </a:xfrm>
-          <a:prstGeom prst="rect">
-            <a:avLst/>
-          </a:prstGeom>
-          <a:noFill/>
-        </p:spPr>
-        <p:txBody>
-          <a:bodyPr wrap="square" anchor="t" lIns="50800" rIns="50800" tIns="25400" bIns="25400">
-            <a:spAutoFit/>
-          </a:bodyPr>
-          <a:lstStyle/>
-          <a:p>
-            <a:pPr algn="ctr">
-              <a:lnSpc>
-                <a:spcPct val="105000"/>
-              </a:lnSpc>
-              <a:spcBef>
-                <a:spcPts val="0"/>
-              </a:spcBef>
-              <a:spcAft>
-                <a:spcPts val="400"/>
-              </a:spcAft>
-            </a:pPr>
-            <a:r>
-              <a:rPr sz="1200" b="0">
-                <a:solidFill>
-                  <a:srgbClr val="555555"/>
-                </a:solidFill>
-                <a:latin typeface="Microsoft YaHei"/>
-              </a:rPr>
-              <a:t>无法为每个内核版本逐一改并重发内核</a:t>
-            </a:r>
-          </a:p>
-        </p:txBody>
-      </p:sp>
-      <p:sp>
-        <p:nvSpPr>
-          <p:cNvPr id="24" name="TextBox 23"/>
-          <p:cNvSpPr txBox="1"/>
-          <p:nvPr/>
-        </p:nvSpPr>
-        <p:spPr>
-          <a:xfrm>
-            <a:off x="548640" y="5577840"/>
-            <a:ext cx="11064240" cy="822960"/>
-          </a:xfrm>
-          <a:prstGeom prst="rect">
-            <a:avLst/>
-          </a:prstGeom>
-          <a:noFill/>
-        </p:spPr>
-        <p:txBody>
-          <a:bodyPr wrap="square" anchor="ctr" lIns="50800" rIns="50800" tIns="25400" bIns="25400">
-            <a:spAutoFit/>
-          </a:bodyPr>
-          <a:lstStyle/>
-          <a:p>
-            <a:pPr algn="l">
-              <a:lnSpc>
-                <a:spcPct val="100000"/>
-              </a:lnSpc>
-              <a:spcBef>
-                <a:spcPts val="0"/>
-              </a:spcBef>
-              <a:spcAft>
-                <a:spcPts val="400"/>
-              </a:spcAft>
-            </a:pPr>
-            <a:r>
-              <a:rPr sz="1500" b="1">
-                <a:solidFill>
-                  <a:srgbClr val="1F2D5A"/>
+                  <a:srgbClr val="FFFFFF"/>
                 </a:solidFill>
                 <a:latin typeface="Microsoft YaHei"/>
               </a:rPr>
@@ -4768,22 +5107,20 @@
       <p:grpSpPr/>
       <p:sp>
         <p:nvSpPr>
-          <p:cNvPr id="2" name="Rounded Rectangle 1"/>
+          <p:cNvPr id="2" name="Rectangle 1"/>
           <p:cNvSpPr/>
           <p:nvPr/>
         </p:nvSpPr>
         <p:spPr>
           <a:xfrm>
             <a:off x="0" y="0"/>
-            <a:ext cx="12191695" cy="109728"/>
-          </a:xfrm>
-          <a:prstGeom prst="roundRect">
-            <a:avLst>
-              <a:gd name="adj" fmla="val 6000"/>
-            </a:avLst>
+            <a:ext cx="12191695" cy="6858000"/>
+          </a:xfrm>
+          <a:prstGeom prst="rect">
+            <a:avLst/>
           </a:prstGeom>
           <a:solidFill>
-            <a:srgbClr val="6B3FA0"/>
+            <a:srgbClr val="FFFFFF"/>
           </a:solidFill>
           <a:ln>
             <a:noFill/>
@@ -4814,22 +5151,20 @@
       </p:sp>
       <p:sp>
         <p:nvSpPr>
-          <p:cNvPr id="3" name="Rounded Rectangle 2"/>
+          <p:cNvPr id="3" name="Rectangle 2"/>
           <p:cNvSpPr/>
           <p:nvPr/>
         </p:nvSpPr>
         <p:spPr>
           <a:xfrm>
-            <a:off x="457200" y="384048"/>
-            <a:ext cx="457200" cy="457200"/>
-          </a:xfrm>
-          <a:prstGeom prst="roundRect">
-            <a:avLst>
-              <a:gd name="adj" fmla="val 6000"/>
-            </a:avLst>
+            <a:off x="457200" y="420624"/>
+            <a:ext cx="146304" cy="512064"/>
+          </a:xfrm>
+          <a:prstGeom prst="rect">
+            <a:avLst/>
           </a:prstGeom>
           <a:solidFill>
-            <a:srgbClr val="6B3FA0"/>
+            <a:srgbClr val="CF0A2C"/>
           </a:solidFill>
           <a:ln>
             <a:noFill/>
@@ -4866,8 +5201,231 @@
         </p:nvSpPr>
         <p:spPr>
           <a:xfrm>
-            <a:off x="457200" y="384048"/>
-            <a:ext cx="457200" cy="457200"/>
+            <a:off x="731520" y="365760"/>
+            <a:ext cx="1005840" cy="603504"/>
+          </a:xfrm>
+          <a:prstGeom prst="rect">
+            <a:avLst/>
+          </a:prstGeom>
+          <a:noFill/>
+        </p:spPr>
+        <p:txBody>
+          <a:bodyPr wrap="square" anchor="ctr" lIns="50800" rIns="50800" tIns="25400" bIns="25400">
+            <a:spAutoFit/>
+          </a:bodyPr>
+          <a:lstStyle/>
+          <a:p>
+            <a:pPr algn="l">
+              <a:lnSpc>
+                <a:spcPct val="100000"/>
+              </a:lnSpc>
+              <a:spcBef>
+                <a:spcPts val="0"/>
+              </a:spcBef>
+              <a:spcAft>
+                <a:spcPts val="400"/>
+              </a:spcAft>
+            </a:pPr>
+            <a:r>
+              <a:rPr sz="3000" b="1">
+                <a:solidFill>
+                  <a:srgbClr val="CF0A2C"/>
+                </a:solidFill>
+                <a:latin typeface="Microsoft YaHei"/>
+              </a:rPr>
+              <a:t>02</a:t>
+            </a:r>
+          </a:p>
+        </p:txBody>
+      </p:sp>
+      <p:sp>
+        <p:nvSpPr>
+          <p:cNvPr id="5" name="TextBox 4"/>
+          <p:cNvSpPr txBox="1"/>
+          <p:nvPr/>
+        </p:nvSpPr>
+        <p:spPr>
+          <a:xfrm>
+            <a:off x="1600200" y="365760"/>
+            <a:ext cx="9875520" cy="603504"/>
+          </a:xfrm>
+          <a:prstGeom prst="rect">
+            <a:avLst/>
+          </a:prstGeom>
+          <a:noFill/>
+        </p:spPr>
+        <p:txBody>
+          <a:bodyPr wrap="square" anchor="ctr" lIns="50800" rIns="50800" tIns="25400" bIns="25400">
+            <a:spAutoFit/>
+          </a:bodyPr>
+          <a:lstStyle/>
+          <a:p>
+            <a:pPr algn="l">
+              <a:lnSpc>
+                <a:spcPct val="100000"/>
+              </a:lnSpc>
+              <a:spcBef>
+                <a:spcPts val="0"/>
+              </a:spcBef>
+              <a:spcAft>
+                <a:spcPts val="400"/>
+              </a:spcAft>
+            </a:pPr>
+            <a:r>
+              <a:rPr sz="2600" b="1">
+                <a:solidFill>
+                  <a:srgbClr val="1A1A1A"/>
+                </a:solidFill>
+                <a:latin typeface="Microsoft YaHei"/>
+              </a:rPr>
+              <a:t>现有技术与 GAP</a:t>
+            </a:r>
+          </a:p>
+        </p:txBody>
+      </p:sp>
+      <p:sp>
+        <p:nvSpPr>
+          <p:cNvPr id="6" name="Rectangle 5"/>
+          <p:cNvSpPr/>
+          <p:nvPr/>
+        </p:nvSpPr>
+        <p:spPr>
+          <a:xfrm>
+            <a:off x="731520" y="1024128"/>
+            <a:ext cx="10725912" cy="25400"/>
+          </a:xfrm>
+          <a:prstGeom prst="rect">
+            <a:avLst/>
+          </a:prstGeom>
+          <a:solidFill>
+            <a:srgbClr val="CF0A2C"/>
+          </a:solidFill>
+          <a:ln>
+            <a:noFill/>
+          </a:ln>
+          <a:effectLst/>
+        </p:spPr>
+        <p:style>
+          <a:lnRef idx="1">
+            <a:schemeClr val="accent1"/>
+          </a:lnRef>
+          <a:fillRef idx="3">
+            <a:schemeClr val="accent1"/>
+          </a:fillRef>
+          <a:effectRef idx="2">
+            <a:schemeClr val="accent1"/>
+          </a:effectRef>
+          <a:fontRef idx="minor">
+            <a:schemeClr val="lt1"/>
+          </a:fontRef>
+        </p:style>
+        <p:txBody>
+          <a:bodyPr rtlCol="0" anchor="ctr"/>
+          <a:lstStyle/>
+          <a:p>
+            <a:pPr algn="ctr"/>
+          </a:p>
+        </p:txBody>
+      </p:sp>
+      <p:sp>
+        <p:nvSpPr>
+          <p:cNvPr id="7" name="TextBox 6"/>
+          <p:cNvSpPr txBox="1"/>
+          <p:nvPr/>
+        </p:nvSpPr>
+        <p:spPr>
+          <a:xfrm>
+            <a:off x="9692640" y="420624"/>
+            <a:ext cx="1783080" cy="365760"/>
+          </a:xfrm>
+          <a:prstGeom prst="rect">
+            <a:avLst/>
+          </a:prstGeom>
+          <a:noFill/>
+        </p:spPr>
+        <p:txBody>
+          <a:bodyPr wrap="square" anchor="ctr" lIns="50800" rIns="50800" tIns="25400" bIns="25400">
+            <a:spAutoFit/>
+          </a:bodyPr>
+          <a:lstStyle/>
+          <a:p>
+            <a:pPr algn="r">
+              <a:lnSpc>
+                <a:spcPct val="100000"/>
+              </a:lnSpc>
+              <a:spcBef>
+                <a:spcPts val="0"/>
+              </a:spcBef>
+              <a:spcAft>
+                <a:spcPts val="400"/>
+              </a:spcAft>
+            </a:pPr>
+            <a:r>
+              <a:rPr sz="1100" b="0">
+                <a:solidFill>
+                  <a:srgbClr val="595959"/>
+                </a:solidFill>
+                <a:latin typeface="Microsoft YaHei"/>
+              </a:rPr>
+              <a:t>专利介绍</a:t>
+            </a:r>
+          </a:p>
+        </p:txBody>
+      </p:sp>
+      <p:sp>
+        <p:nvSpPr>
+          <p:cNvPr id="8" name="Rectangle 7"/>
+          <p:cNvSpPr/>
+          <p:nvPr/>
+        </p:nvSpPr>
+        <p:spPr>
+          <a:xfrm>
+            <a:off x="731520" y="1207008"/>
+            <a:ext cx="3108960" cy="457200"/>
+          </a:xfrm>
+          <a:prstGeom prst="rect">
+            <a:avLst/>
+          </a:prstGeom>
+          <a:solidFill>
+            <a:srgbClr val="CF0A2C"/>
+          </a:solidFill>
+          <a:ln>
+            <a:noFill/>
+          </a:ln>
+          <a:effectLst/>
+        </p:spPr>
+        <p:style>
+          <a:lnRef idx="1">
+            <a:schemeClr val="accent1"/>
+          </a:lnRef>
+          <a:fillRef idx="3">
+            <a:schemeClr val="accent1"/>
+          </a:fillRef>
+          <a:effectRef idx="2">
+            <a:schemeClr val="accent1"/>
+          </a:effectRef>
+          <a:fontRef idx="minor">
+            <a:schemeClr val="lt1"/>
+          </a:fontRef>
+        </p:style>
+        <p:txBody>
+          <a:bodyPr rtlCol="0" anchor="ctr"/>
+          <a:lstStyle/>
+          <a:p>
+            <a:pPr algn="ctr"/>
+          </a:p>
+        </p:txBody>
+      </p:sp>
+      <p:sp>
+        <p:nvSpPr>
+          <p:cNvPr id="9" name="TextBox 8"/>
+          <p:cNvSpPr txBox="1"/>
+          <p:nvPr/>
+        </p:nvSpPr>
+        <p:spPr>
+          <a:xfrm>
+            <a:off x="731520" y="1207008"/>
+            <a:ext cx="3108960" cy="457200"/>
           </a:xfrm>
           <a:prstGeom prst="rect">
             <a:avLst/>
@@ -4892,80 +5450,33 @@
               </a:spcAft>
             </a:pPr>
             <a:r>
-              <a:rPr sz="2200" b="1">
+              <a:rPr sz="1400" b="1">
                 <a:solidFill>
                   <a:srgbClr val="FFFFFF"/>
                 </a:solidFill>
                 <a:latin typeface="Microsoft YaHei"/>
               </a:rPr>
-              <a:t>2</a:t>
-            </a:r>
-          </a:p>
-        </p:txBody>
-      </p:sp>
-      <p:sp>
-        <p:nvSpPr>
-          <p:cNvPr id="5" name="TextBox 4"/>
-          <p:cNvSpPr txBox="1"/>
-          <p:nvPr/>
-        </p:nvSpPr>
-        <p:spPr>
-          <a:xfrm>
-            <a:off x="1051560" y="365760"/>
-            <a:ext cx="10515600" cy="548640"/>
-          </a:xfrm>
-          <a:prstGeom prst="rect">
-            <a:avLst/>
-          </a:prstGeom>
-          <a:noFill/>
-        </p:spPr>
-        <p:txBody>
-          <a:bodyPr wrap="square" anchor="ctr" lIns="50800" rIns="50800" tIns="25400" bIns="25400">
-            <a:spAutoFit/>
-          </a:bodyPr>
-          <a:lstStyle/>
-          <a:p>
-            <a:pPr algn="l">
-              <a:lnSpc>
-                <a:spcPct val="100000"/>
-              </a:lnSpc>
-              <a:spcBef>
-                <a:spcPts val="0"/>
-              </a:spcBef>
-              <a:spcAft>
-                <a:spcPts val="400"/>
-              </a:spcAft>
-            </a:pPr>
-            <a:r>
-              <a:rPr sz="2600" b="1">
-                <a:solidFill>
-                  <a:srgbClr val="1F2D5A"/>
-                </a:solidFill>
-                <a:latin typeface="Microsoft YaHei"/>
-              </a:rPr>
-              <a:t>现有技术与 GAP</a:t>
-            </a:r>
-          </a:p>
-        </p:txBody>
-      </p:sp>
-      <p:sp>
-        <p:nvSpPr>
-          <p:cNvPr id="6" name="Rounded Rectangle 5"/>
+              <a:t>现有技术</a:t>
+            </a:r>
+          </a:p>
+        </p:txBody>
+      </p:sp>
+      <p:sp>
+        <p:nvSpPr>
+          <p:cNvPr id="10" name="Rectangle 9"/>
           <p:cNvSpPr/>
           <p:nvPr/>
         </p:nvSpPr>
         <p:spPr>
           <a:xfrm>
-            <a:off x="1051560" y="932688"/>
-            <a:ext cx="10058400" cy="27940"/>
-          </a:xfrm>
-          <a:prstGeom prst="roundRect">
-            <a:avLst>
-              <a:gd name="adj" fmla="val 6000"/>
-            </a:avLst>
+            <a:off x="3840480" y="1207008"/>
+            <a:ext cx="3840480" cy="457200"/>
+          </a:xfrm>
+          <a:prstGeom prst="rect">
+            <a:avLst/>
           </a:prstGeom>
           <a:solidFill>
-            <a:srgbClr val="6B3FA0"/>
+            <a:srgbClr val="CF0A2C"/>
           </a:solidFill>
           <a:ln>
             <a:noFill/>
@@ -4996,60 +5507,14 @@
       </p:sp>
       <p:sp>
         <p:nvSpPr>
-          <p:cNvPr id="7" name="Rounded Rectangle 6"/>
-          <p:cNvSpPr/>
-          <p:nvPr/>
-        </p:nvSpPr>
-        <p:spPr>
-          <a:xfrm>
-            <a:off x="548640" y="1188720"/>
-            <a:ext cx="3200400" cy="457200"/>
-          </a:xfrm>
-          <a:prstGeom prst="roundRect">
-            <a:avLst>
-              <a:gd name="adj" fmla="val 6000"/>
-            </a:avLst>
-          </a:prstGeom>
-          <a:solidFill>
-            <a:srgbClr val="6B3FA0"/>
-          </a:solidFill>
-          <a:ln>
-            <a:noFill/>
-          </a:ln>
-          <a:effectLst/>
-        </p:spPr>
-        <p:style>
-          <a:lnRef idx="1">
-            <a:schemeClr val="accent1"/>
-          </a:lnRef>
-          <a:fillRef idx="3">
-            <a:schemeClr val="accent1"/>
-          </a:fillRef>
-          <a:effectRef idx="2">
-            <a:schemeClr val="accent1"/>
-          </a:effectRef>
-          <a:fontRef idx="minor">
-            <a:schemeClr val="lt1"/>
-          </a:fontRef>
-        </p:style>
-        <p:txBody>
-          <a:bodyPr rtlCol="0" anchor="ctr"/>
-          <a:lstStyle/>
-          <a:p>
-            <a:pPr algn="ctr"/>
-          </a:p>
-        </p:txBody>
-      </p:sp>
-      <p:sp>
-        <p:nvSpPr>
-          <p:cNvPr id="8" name="TextBox 7"/>
+          <p:cNvPr id="11" name="TextBox 10"/>
           <p:cNvSpPr txBox="1"/>
           <p:nvPr/>
         </p:nvSpPr>
         <p:spPr>
           <a:xfrm>
-            <a:off x="548640" y="1188720"/>
-            <a:ext cx="3200400" cy="457200"/>
+            <a:off x="3840480" y="1207008"/>
+            <a:ext cx="3840480" cy="457200"/>
           </a:xfrm>
           <a:prstGeom prst="rect">
             <a:avLst/>
@@ -5080,29 +5545,27 @@
                 </a:solidFill>
                 <a:latin typeface="Microsoft YaHei"/>
               </a:rPr>
-              <a:t>现有技术</a:t>
-            </a:r>
-          </a:p>
-        </p:txBody>
-      </p:sp>
-      <p:sp>
-        <p:nvSpPr>
-          <p:cNvPr id="9" name="Rounded Rectangle 8"/>
+              <a:t>核心做法</a:t>
+            </a:r>
+          </a:p>
+        </p:txBody>
+      </p:sp>
+      <p:sp>
+        <p:nvSpPr>
+          <p:cNvPr id="12" name="Rectangle 11"/>
           <p:cNvSpPr/>
           <p:nvPr/>
         </p:nvSpPr>
         <p:spPr>
           <a:xfrm>
-            <a:off x="3794760" y="1188720"/>
-            <a:ext cx="3931920" cy="457200"/>
-          </a:xfrm>
-          <a:prstGeom prst="roundRect">
-            <a:avLst>
-              <a:gd name="adj" fmla="val 6000"/>
-            </a:avLst>
+            <a:off x="7680960" y="1207008"/>
+            <a:ext cx="3776472" cy="457200"/>
+          </a:xfrm>
+          <a:prstGeom prst="rect">
+            <a:avLst/>
           </a:prstGeom>
           <a:solidFill>
-            <a:srgbClr val="6B3FA0"/>
+            <a:srgbClr val="CF0A2C"/>
           </a:solidFill>
           <a:ln>
             <a:noFill/>
@@ -5133,14 +5596,14 @@
       </p:sp>
       <p:sp>
         <p:nvSpPr>
-          <p:cNvPr id="10" name="TextBox 9"/>
+          <p:cNvPr id="13" name="TextBox 12"/>
           <p:cNvSpPr txBox="1"/>
           <p:nvPr/>
         </p:nvSpPr>
         <p:spPr>
           <a:xfrm>
-            <a:off x="3794760" y="1188720"/>
-            <a:ext cx="3931920" cy="457200"/>
+            <a:off x="7680960" y="1207008"/>
+            <a:ext cx="3776472" cy="457200"/>
           </a:xfrm>
           <a:prstGeom prst="rect">
             <a:avLst/>
@@ -5171,32 +5634,32 @@
                 </a:solidFill>
                 <a:latin typeface="Microsoft YaHei"/>
               </a:rPr>
-              <a:t>核心做法</a:t>
-            </a:r>
-          </a:p>
-        </p:txBody>
-      </p:sp>
-      <p:sp>
-        <p:nvSpPr>
-          <p:cNvPr id="11" name="Rounded Rectangle 10"/>
+              <a:t>与本方案的 GAP</a:t>
+            </a:r>
+          </a:p>
+        </p:txBody>
+      </p:sp>
+      <p:sp>
+        <p:nvSpPr>
+          <p:cNvPr id="14" name="Rectangle 13"/>
           <p:cNvSpPr/>
           <p:nvPr/>
         </p:nvSpPr>
         <p:spPr>
           <a:xfrm>
-            <a:off x="7772400" y="1188720"/>
-            <a:ext cx="3931920" cy="457200"/>
-          </a:xfrm>
-          <a:prstGeom prst="roundRect">
-            <a:avLst>
-              <a:gd name="adj" fmla="val 6000"/>
-            </a:avLst>
+            <a:off x="731520" y="1682496"/>
+            <a:ext cx="3108960" cy="1170432"/>
+          </a:xfrm>
+          <a:prstGeom prst="rect">
+            <a:avLst/>
           </a:prstGeom>
           <a:solidFill>
-            <a:srgbClr val="6B3FA0"/>
+            <a:srgbClr val="FFFFFF"/>
           </a:solidFill>
-          <a:ln>
-            <a:noFill/>
+          <a:ln w="9525">
+            <a:solidFill>
+              <a:srgbClr val="D9D9D9"/>
+            </a:solidFill>
           </a:ln>
           <a:effectLst/>
         </p:spPr>
@@ -5224,14 +5687,14 @@
       </p:sp>
       <p:sp>
         <p:nvSpPr>
-          <p:cNvPr id="12" name="TextBox 11"/>
+          <p:cNvPr id="15" name="TextBox 14"/>
           <p:cNvSpPr txBox="1"/>
           <p:nvPr/>
         </p:nvSpPr>
         <p:spPr>
           <a:xfrm>
-            <a:off x="7772400" y="1188720"/>
-            <a:ext cx="3931920" cy="457200"/>
+            <a:off x="822960" y="1682496"/>
+            <a:ext cx="2926080" cy="1170432"/>
           </a:xfrm>
           <a:prstGeom prst="rect">
             <a:avLst/>
@@ -5244,9 +5707,9 @@
           </a:bodyPr>
           <a:lstStyle/>
           <a:p>
-            <a:pPr algn="ctr">
+            <a:pPr algn="l">
               <a:lnSpc>
-                <a:spcPct val="100000"/>
+                <a:spcPct val="108000"/>
               </a:lnSpc>
               <a:spcBef>
                 <a:spcPts val="0"/>
@@ -5256,39 +5719,38 @@
               </a:spcAft>
             </a:pPr>
             <a:r>
-              <a:rPr sz="1400" b="1">
-                <a:solidFill>
-                  <a:srgbClr val="FFFFFF"/>
+              <a:rPr sz="1200" b="1">
+                <a:solidFill>
+                  <a:srgbClr val="1A1A1A"/>
                 </a:solidFill>
                 <a:latin typeface="Microsoft YaHei"/>
               </a:rPr>
-              <a:t>与本方案的 GAP</a:t>
-            </a:r>
-          </a:p>
-        </p:txBody>
-      </p:sp>
-      <p:sp>
-        <p:nvSpPr>
-          <p:cNvPr id="13" name="Rounded Rectangle 12"/>
+              <a:t>US 11829265 / 11385974
+VM 宿主机内存 UCE 恢复</a:t>
+            </a:r>
+          </a:p>
+        </p:txBody>
+      </p:sp>
+      <p:sp>
+        <p:nvSpPr>
+          <p:cNvPr id="16" name="Rectangle 15"/>
           <p:cNvSpPr/>
           <p:nvPr/>
         </p:nvSpPr>
         <p:spPr>
           <a:xfrm>
-            <a:off x="548640" y="1691640"/>
-            <a:ext cx="3200400" cy="1143000"/>
-          </a:xfrm>
-          <a:prstGeom prst="roundRect">
-            <a:avLst>
-              <a:gd name="adj" fmla="val 6000"/>
-            </a:avLst>
+            <a:off x="3840480" y="1682496"/>
+            <a:ext cx="3840480" cy="1170432"/>
+          </a:xfrm>
+          <a:prstGeom prst="rect">
+            <a:avLst/>
           </a:prstGeom>
           <a:solidFill>
             <a:srgbClr val="FFFFFF"/>
           </a:solidFill>
           <a:ln w="9525">
             <a:solidFill>
-              <a:srgbClr val="CCCCCC"/>
+              <a:srgbClr val="D9D9D9"/>
             </a:solidFill>
           </a:ln>
           <a:effectLst/>
@@ -5317,14 +5779,14 @@
       </p:sp>
       <p:sp>
         <p:nvSpPr>
-          <p:cNvPr id="14" name="TextBox 13"/>
+          <p:cNvPr id="17" name="TextBox 16"/>
           <p:cNvSpPr txBox="1"/>
           <p:nvPr/>
         </p:nvSpPr>
         <p:spPr>
           <a:xfrm>
-            <a:off x="621792" y="1691640"/>
-            <a:ext cx="3054096" cy="1143000"/>
+            <a:off x="3931920" y="1682496"/>
+            <a:ext cx="3657600" cy="1170432"/>
           </a:xfrm>
           <a:prstGeom prst="rect">
             <a:avLst/>
@@ -5339,7 +5801,7 @@
           <a:p>
             <a:pPr algn="l">
               <a:lnSpc>
-                <a:spcPct val="105000"/>
+                <a:spcPct val="108000"/>
               </a:lnSpc>
               <a:spcBef>
                 <a:spcPts val="0"/>
@@ -5349,40 +5811,37 @@
               </a:spcAft>
             </a:pPr>
             <a:r>
-              <a:rPr sz="1200" b="1">
-                <a:solidFill>
-                  <a:srgbClr val="1F2D5A"/>
+              <a:rPr sz="1200" b="0">
+                <a:solidFill>
+                  <a:srgbClr val="595959"/>
                 </a:solidFill>
                 <a:latin typeface="Microsoft YaHei"/>
               </a:rPr>
-              <a:t>US 11829265 / 11385974
-VM 宿主机内存 UCE 恢复</a:t>
-            </a:r>
-          </a:p>
-        </p:txBody>
-      </p:sp>
-      <p:sp>
-        <p:nvSpPr>
-          <p:cNvPr id="15" name="Rounded Rectangle 14"/>
+              <a:t>内核内置 MCE handler 识别内核访问 guest 内存的 UCE，通知 VMM 注入模拟 MCE 或迁移 VM</a:t>
+            </a:r>
+          </a:p>
+        </p:txBody>
+      </p:sp>
+      <p:sp>
+        <p:nvSpPr>
+          <p:cNvPr id="18" name="Rectangle 17"/>
           <p:cNvSpPr/>
           <p:nvPr/>
         </p:nvSpPr>
         <p:spPr>
           <a:xfrm>
-            <a:off x="3794760" y="1691640"/>
-            <a:ext cx="3931920" cy="1143000"/>
-          </a:xfrm>
-          <a:prstGeom prst="roundRect">
-            <a:avLst>
-              <a:gd name="adj" fmla="val 6000"/>
-            </a:avLst>
+            <a:off x="7680960" y="1682496"/>
+            <a:ext cx="3776472" cy="1170432"/>
+          </a:xfrm>
+          <a:prstGeom prst="rect">
+            <a:avLst/>
           </a:prstGeom>
           <a:solidFill>
-            <a:srgbClr val="FFFFFF"/>
+            <a:srgbClr val="FBECEE"/>
           </a:solidFill>
           <a:ln w="9525">
             <a:solidFill>
-              <a:srgbClr val="CCCCCC"/>
+              <a:srgbClr val="D9D9D9"/>
             </a:solidFill>
           </a:ln>
           <a:effectLst/>
@@ -5411,14 +5870,14 @@
       </p:sp>
       <p:sp>
         <p:nvSpPr>
-          <p:cNvPr id="16" name="TextBox 15"/>
+          <p:cNvPr id="19" name="TextBox 18"/>
           <p:cNvSpPr txBox="1"/>
           <p:nvPr/>
         </p:nvSpPr>
         <p:spPr>
           <a:xfrm>
-            <a:off x="3867912" y="1691640"/>
-            <a:ext cx="3785616" cy="1143000"/>
+            <a:off x="7772400" y="1682496"/>
+            <a:ext cx="3593592" cy="1170432"/>
           </a:xfrm>
           <a:prstGeom prst="rect">
             <a:avLst/>
@@ -5433,7 +5892,7 @@
           <a:p>
             <a:pPr algn="l">
               <a:lnSpc>
-                <a:spcPct val="105000"/>
+                <a:spcPct val="108000"/>
               </a:lnSpc>
               <a:spcBef>
                 <a:spcPts val="0"/>
@@ -5443,39 +5902,37 @@
               </a:spcAft>
             </a:pPr>
             <a:r>
-              <a:rPr sz="1200" b="0">
-                <a:solidFill>
-                  <a:srgbClr val="222222"/>
+              <a:rPr sz="1200" b="1">
+                <a:solidFill>
+                  <a:srgbClr val="A30822"/>
                 </a:solidFill>
                 <a:latin typeface="Microsoft YaHei"/>
               </a:rPr>
-              <a:t>内核内置 MCE handler 识别内核访问 guest 内存的 UCE，通知 VMM 注入模拟 MCE 或迁移 VM</a:t>
-            </a:r>
-          </a:p>
-        </p:txBody>
-      </p:sp>
-      <p:sp>
-        <p:nvSpPr>
-          <p:cNvPr id="17" name="Rounded Rectangle 16"/>
+              <a:t>只管内存、不处理 cache/核心；逻辑内嵌内核需定制；不隔离物理核</a:t>
+            </a:r>
+          </a:p>
+        </p:txBody>
+      </p:sp>
+      <p:sp>
+        <p:nvSpPr>
+          <p:cNvPr id="20" name="Rectangle 19"/>
           <p:cNvSpPr/>
           <p:nvPr/>
         </p:nvSpPr>
         <p:spPr>
           <a:xfrm>
-            <a:off x="7772400" y="1691640"/>
-            <a:ext cx="3931920" cy="1143000"/>
-          </a:xfrm>
-          <a:prstGeom prst="roundRect">
-            <a:avLst>
-              <a:gd name="adj" fmla="val 6000"/>
-            </a:avLst>
+            <a:off x="731520" y="2871216"/>
+            <a:ext cx="3108960" cy="1170432"/>
+          </a:xfrm>
+          <a:prstGeom prst="rect">
+            <a:avLst/>
           </a:prstGeom>
           <a:solidFill>
-            <a:srgbClr val="FDF0EE"/>
+            <a:srgbClr val="F4F4F4"/>
           </a:solidFill>
           <a:ln w="9525">
             <a:solidFill>
-              <a:srgbClr val="CCCCCC"/>
+              <a:srgbClr val="D9D9D9"/>
             </a:solidFill>
           </a:ln>
           <a:effectLst/>
@@ -5504,14 +5961,14 @@
       </p:sp>
       <p:sp>
         <p:nvSpPr>
-          <p:cNvPr id="18" name="TextBox 17"/>
+          <p:cNvPr id="21" name="TextBox 20"/>
           <p:cNvSpPr txBox="1"/>
           <p:nvPr/>
         </p:nvSpPr>
         <p:spPr>
           <a:xfrm>
-            <a:off x="7845552" y="1691640"/>
-            <a:ext cx="3785616" cy="1143000"/>
+            <a:off x="822960" y="2871216"/>
+            <a:ext cx="2926080" cy="1170432"/>
           </a:xfrm>
           <a:prstGeom prst="rect">
             <a:avLst/>
@@ -5526,7 +5983,7 @@
           <a:p>
             <a:pPr algn="l">
               <a:lnSpc>
-                <a:spcPct val="105000"/>
+                <a:spcPct val="108000"/>
               </a:lnSpc>
               <a:spcBef>
                 <a:spcPts val="0"/>
@@ -5538,37 +5995,36 @@
             <a:r>
               <a:rPr sz="1200" b="1">
                 <a:solidFill>
-                  <a:srgbClr val="C0392B"/>
+                  <a:srgbClr val="1A1A1A"/>
                 </a:solidFill>
                 <a:latin typeface="Microsoft YaHei"/>
               </a:rPr>
-              <a:t>只管内存、不处理 cache/核心；逻辑内嵌内核需定制；不隔离物理核</a:t>
-            </a:r>
-          </a:p>
-        </p:txBody>
-      </p:sp>
-      <p:sp>
-        <p:nvSpPr>
-          <p:cNvPr id="19" name="Rounded Rectangle 18"/>
+              <a:t>US 12222830 / 11847036 / 11531607
+失效从核 CPU 故障隔离（AMP）</a:t>
+            </a:r>
+          </a:p>
+        </p:txBody>
+      </p:sp>
+      <p:sp>
+        <p:nvSpPr>
+          <p:cNvPr id="22" name="Rectangle 21"/>
           <p:cNvSpPr/>
           <p:nvPr/>
         </p:nvSpPr>
         <p:spPr>
           <a:xfrm>
-            <a:off x="548640" y="2880360"/>
-            <a:ext cx="3200400" cy="1143000"/>
-          </a:xfrm>
-          <a:prstGeom prst="roundRect">
-            <a:avLst>
-              <a:gd name="adj" fmla="val 6000"/>
-            </a:avLst>
+            <a:off x="3840480" y="2871216"/>
+            <a:ext cx="3840480" cy="1170432"/>
+          </a:xfrm>
+          <a:prstGeom prst="rect">
+            <a:avLst/>
           </a:prstGeom>
           <a:solidFill>
-            <a:srgbClr val="FFFFFF"/>
+            <a:srgbClr val="F4F4F4"/>
           </a:solidFill>
           <a:ln w="9525">
             <a:solidFill>
-              <a:srgbClr val="CCCCCC"/>
+              <a:srgbClr val="D9D9D9"/>
             </a:solidFill>
           </a:ln>
           <a:effectLst/>
@@ -5597,14 +6053,14 @@
       </p:sp>
       <p:sp>
         <p:nvSpPr>
-          <p:cNvPr id="20" name="TextBox 19"/>
+          <p:cNvPr id="23" name="TextBox 22"/>
           <p:cNvSpPr txBox="1"/>
           <p:nvPr/>
         </p:nvSpPr>
         <p:spPr>
           <a:xfrm>
-            <a:off x="621792" y="2880360"/>
-            <a:ext cx="3054096" cy="1143000"/>
+            <a:off x="3931920" y="2871216"/>
+            <a:ext cx="3657600" cy="1170432"/>
           </a:xfrm>
           <a:prstGeom prst="rect">
             <a:avLst/>
@@ -5619,7 +6075,7 @@
           <a:p>
             <a:pPr algn="l">
               <a:lnSpc>
-                <a:spcPct val="105000"/>
+                <a:spcPct val="108000"/>
               </a:lnSpc>
               <a:spcBef>
                 <a:spcPts val="0"/>
@@ -5629,40 +6085,37 @@
               </a:spcAft>
             </a:pPr>
             <a:r>
-              <a:rPr sz="1200" b="1">
-                <a:solidFill>
-                  <a:srgbClr val="1F2D5A"/>
+              <a:rPr sz="1200" b="0">
+                <a:solidFill>
+                  <a:srgbClr val="595959"/>
                 </a:solidFill>
                 <a:latin typeface="Microsoft YaHei"/>
               </a:rPr>
-              <a:t>US 12222830 / 11847036 / 11531607
-失效从核 CPU 故障隔离（AMP）</a:t>
-            </a:r>
-          </a:p>
-        </p:txBody>
-      </p:sp>
-      <p:sp>
-        <p:nvSpPr>
-          <p:cNvPr id="21" name="Rounded Rectangle 20"/>
+              <a:t>裸机非对称多处理：NMI→自定义 panic handler→关停 CPU 核→上下文切回主实例恢复</a:t>
+            </a:r>
+          </a:p>
+        </p:txBody>
+      </p:sp>
+      <p:sp>
+        <p:nvSpPr>
+          <p:cNvPr id="24" name="Rectangle 23"/>
           <p:cNvSpPr/>
           <p:nvPr/>
         </p:nvSpPr>
         <p:spPr>
           <a:xfrm>
-            <a:off x="3794760" y="2880360"/>
-            <a:ext cx="3931920" cy="1143000"/>
-          </a:xfrm>
-          <a:prstGeom prst="roundRect">
-            <a:avLst>
-              <a:gd name="adj" fmla="val 6000"/>
-            </a:avLst>
+            <a:off x="7680960" y="2871216"/>
+            <a:ext cx="3776472" cy="1170432"/>
+          </a:xfrm>
+          <a:prstGeom prst="rect">
+            <a:avLst/>
           </a:prstGeom>
           <a:solidFill>
-            <a:srgbClr val="FFFFFF"/>
+            <a:srgbClr val="F6E2E5"/>
           </a:solidFill>
           <a:ln w="9525">
             <a:solidFill>
-              <a:srgbClr val="CCCCCC"/>
+              <a:srgbClr val="D9D9D9"/>
             </a:solidFill>
           </a:ln>
           <a:effectLst/>
@@ -5691,14 +6144,14 @@
       </p:sp>
       <p:sp>
         <p:nvSpPr>
-          <p:cNvPr id="22" name="TextBox 21"/>
+          <p:cNvPr id="25" name="TextBox 24"/>
           <p:cNvSpPr txBox="1"/>
           <p:nvPr/>
         </p:nvSpPr>
         <p:spPr>
           <a:xfrm>
-            <a:off x="3867912" y="2880360"/>
-            <a:ext cx="3785616" cy="1143000"/>
+            <a:off x="7772400" y="2871216"/>
+            <a:ext cx="3593592" cy="1170432"/>
           </a:xfrm>
           <a:prstGeom prst="rect">
             <a:avLst/>
@@ -5713,7 +6166,7 @@
           <a:p>
             <a:pPr algn="l">
               <a:lnSpc>
-                <a:spcPct val="105000"/>
+                <a:spcPct val="108000"/>
               </a:lnSpc>
               <a:spcBef>
                 <a:spcPts val="0"/>
@@ -5723,39 +6176,37 @@
               </a:spcAft>
             </a:pPr>
             <a:r>
-              <a:rPr sz="1200" b="0">
-                <a:solidFill>
-                  <a:srgbClr val="222222"/>
+              <a:rPr sz="1200" b="1">
+                <a:solidFill>
+                  <a:srgbClr val="A30822"/>
                 </a:solidFill>
                 <a:latin typeface="Microsoft YaHei"/>
               </a:rPr>
-              <a:t>裸机非对称多处理：NMI→自定义 panic handler→关停 CPU 核→上下文切回主实例恢复</a:t>
-            </a:r>
-          </a:p>
-        </p:txBody>
-      </p:sp>
-      <p:sp>
-        <p:nvSpPr>
-          <p:cNvPr id="23" name="Rounded Rectangle 22"/>
+              <a:t>面向裸机 AMP 非云宿主机；真关核+上下文切换；不分缓存层级；无 VM 疏散</a:t>
+            </a:r>
+          </a:p>
+        </p:txBody>
+      </p:sp>
+      <p:sp>
+        <p:nvSpPr>
+          <p:cNvPr id="26" name="Rectangle 25"/>
           <p:cNvSpPr/>
           <p:nvPr/>
         </p:nvSpPr>
         <p:spPr>
           <a:xfrm>
-            <a:off x="7772400" y="2880360"/>
-            <a:ext cx="3931920" cy="1143000"/>
-          </a:xfrm>
-          <a:prstGeom prst="roundRect">
-            <a:avLst>
-              <a:gd name="adj" fmla="val 6000"/>
-            </a:avLst>
+            <a:off x="731520" y="4059936"/>
+            <a:ext cx="3108960" cy="1170432"/>
+          </a:xfrm>
+          <a:prstGeom prst="rect">
+            <a:avLst/>
           </a:prstGeom>
           <a:solidFill>
-            <a:srgbClr val="FDF0EE"/>
+            <a:srgbClr val="FFFFFF"/>
           </a:solidFill>
           <a:ln w="9525">
             <a:solidFill>
-              <a:srgbClr val="CCCCCC"/>
+              <a:srgbClr val="D9D9D9"/>
             </a:solidFill>
           </a:ln>
           <a:effectLst/>
@@ -5784,14 +6235,14 @@
       </p:sp>
       <p:sp>
         <p:nvSpPr>
-          <p:cNvPr id="24" name="TextBox 23"/>
+          <p:cNvPr id="27" name="TextBox 26"/>
           <p:cNvSpPr txBox="1"/>
           <p:nvPr/>
         </p:nvSpPr>
         <p:spPr>
           <a:xfrm>
-            <a:off x="7845552" y="2880360"/>
-            <a:ext cx="3785616" cy="1143000"/>
+            <a:off x="822960" y="4059936"/>
+            <a:ext cx="2926080" cy="1170432"/>
           </a:xfrm>
           <a:prstGeom prst="rect">
             <a:avLst/>
@@ -5806,7 +6257,7 @@
           <a:p>
             <a:pPr algn="l">
               <a:lnSpc>
-                <a:spcPct val="105000"/>
+                <a:spcPct val="108000"/>
               </a:lnSpc>
               <a:spcBef>
                 <a:spcPts val="0"/>
@@ -5818,37 +6269,36 @@
             <a:r>
               <a:rPr sz="1200" b="1">
                 <a:solidFill>
-                  <a:srgbClr val="C0392B"/>
+                  <a:srgbClr val="1A1A1A"/>
                 </a:solidFill>
                 <a:latin typeface="Microsoft YaHei"/>
               </a:rPr>
-              <a:t>面向裸机 AMP 非云宿主机；真关核+上下文切换；不分缓存层级；无 VM 疏散</a:t>
-            </a:r>
-          </a:p>
-        </p:txBody>
-      </p:sp>
-      <p:sp>
-        <p:nvSpPr>
-          <p:cNvPr id="25" name="Rounded Rectangle 24"/>
+              <a:t>内核既有原语
+mce_tolerant / CEC / hotplug / isolcpus</a:t>
+            </a:r>
+          </a:p>
+        </p:txBody>
+      </p:sp>
+      <p:sp>
+        <p:nvSpPr>
+          <p:cNvPr id="28" name="Rectangle 27"/>
           <p:cNvSpPr/>
           <p:nvPr/>
         </p:nvSpPr>
         <p:spPr>
           <a:xfrm>
-            <a:off x="548640" y="4069080"/>
-            <a:ext cx="3200400" cy="1143000"/>
-          </a:xfrm>
-          <a:prstGeom prst="roundRect">
-            <a:avLst>
-              <a:gd name="adj" fmla="val 6000"/>
-            </a:avLst>
+            <a:off x="3840480" y="4059936"/>
+            <a:ext cx="3840480" cy="1170432"/>
+          </a:xfrm>
+          <a:prstGeom prst="rect">
+            <a:avLst/>
           </a:prstGeom>
           <a:solidFill>
             <a:srgbClr val="FFFFFF"/>
           </a:solidFill>
           <a:ln w="9525">
             <a:solidFill>
-              <a:srgbClr val="CCCCCC"/>
+              <a:srgbClr val="D9D9D9"/>
             </a:solidFill>
           </a:ln>
           <a:effectLst/>
@@ -5877,14 +6327,14 @@
       </p:sp>
       <p:sp>
         <p:nvSpPr>
-          <p:cNvPr id="26" name="TextBox 25"/>
+          <p:cNvPr id="29" name="TextBox 28"/>
           <p:cNvSpPr txBox="1"/>
           <p:nvPr/>
         </p:nvSpPr>
         <p:spPr>
           <a:xfrm>
-            <a:off x="621792" y="4069080"/>
-            <a:ext cx="3054096" cy="1143000"/>
+            <a:off x="3931920" y="4059936"/>
+            <a:ext cx="3657600" cy="1170432"/>
           </a:xfrm>
           <a:prstGeom prst="rect">
             <a:avLst/>
@@ -5899,7 +6349,7 @@
           <a:p>
             <a:pPr algn="l">
               <a:lnSpc>
-                <a:spcPct val="105000"/>
+                <a:spcPct val="108000"/>
               </a:lnSpc>
               <a:spcBef>
                 <a:spcPts val="0"/>
@@ -5909,40 +6359,37 @@
               </a:spcAft>
             </a:pPr>
             <a:r>
-              <a:rPr sz="1200" b="1">
-                <a:solidFill>
-                  <a:srgbClr val="1F2D5A"/>
+              <a:rPr sz="1200" b="0">
+                <a:solidFill>
+                  <a:srgbClr val="595959"/>
                 </a:solidFill>
                 <a:latin typeface="Microsoft YaHei"/>
               </a:rPr>
-              <a:t>内核既有原语
-mce_tolerant / CEC / hotplug / isolcpus</a:t>
-            </a:r>
-          </a:p>
-        </p:txBody>
-      </p:sp>
-      <p:sp>
-        <p:nvSpPr>
-          <p:cNvPr id="27" name="Rounded Rectangle 26"/>
+              <a:t>纠错与隔离的孤立单点能力</a:t>
+            </a:r>
+          </a:p>
+        </p:txBody>
+      </p:sp>
+      <p:sp>
+        <p:nvSpPr>
+          <p:cNvPr id="30" name="Rectangle 29"/>
           <p:cNvSpPr/>
           <p:nvPr/>
         </p:nvSpPr>
         <p:spPr>
           <a:xfrm>
-            <a:off x="3794760" y="4069080"/>
-            <a:ext cx="3931920" cy="1143000"/>
-          </a:xfrm>
-          <a:prstGeom prst="roundRect">
-            <a:avLst>
-              <a:gd name="adj" fmla="val 6000"/>
-            </a:avLst>
+            <a:off x="7680960" y="4059936"/>
+            <a:ext cx="3776472" cy="1170432"/>
+          </a:xfrm>
+          <a:prstGeom prst="rect">
+            <a:avLst/>
           </a:prstGeom>
           <a:solidFill>
-            <a:srgbClr val="FFFFFF"/>
+            <a:srgbClr val="FBECEE"/>
           </a:solidFill>
           <a:ln w="9525">
             <a:solidFill>
-              <a:srgbClr val="CCCCCC"/>
+              <a:srgbClr val="D9D9D9"/>
             </a:solidFill>
           </a:ln>
           <a:effectLst/>
@@ -5971,14 +6418,14 @@
       </p:sp>
       <p:sp>
         <p:nvSpPr>
-          <p:cNvPr id="28" name="TextBox 27"/>
+          <p:cNvPr id="31" name="TextBox 30"/>
           <p:cNvSpPr txBox="1"/>
           <p:nvPr/>
         </p:nvSpPr>
         <p:spPr>
           <a:xfrm>
-            <a:off x="3867912" y="4069080"/>
-            <a:ext cx="3785616" cy="1143000"/>
+            <a:off x="7772400" y="4059936"/>
+            <a:ext cx="3593592" cy="1170432"/>
           </a:xfrm>
           <a:prstGeom prst="rect">
             <a:avLst/>
@@ -5993,7 +6440,7 @@
           <a:p>
             <a:pPr algn="l">
               <a:lnSpc>
-                <a:spcPct val="105000"/>
+                <a:spcPct val="108000"/>
               </a:lnSpc>
               <a:spcBef>
                 <a:spcPts val="0"/>
@@ -6003,40 +6450,36 @@
               </a:spcAft>
             </a:pPr>
             <a:r>
-              <a:rPr sz="1200" b="0">
-                <a:solidFill>
-                  <a:srgbClr val="222222"/>
+              <a:rPr sz="1200" b="1">
+                <a:solidFill>
+                  <a:srgbClr val="A30822"/>
                 </a:solidFill>
                 <a:latin typeface="Microsoft YaHei"/>
               </a:rPr>
-              <a:t>纠错与隔离的孤立单点能力</a:t>
-            </a:r>
-          </a:p>
-        </p:txBody>
-      </p:sp>
-      <p:sp>
-        <p:nvSpPr>
-          <p:cNvPr id="29" name="Rounded Rectangle 28"/>
+              <a:t>isolcpus 仅启动期静态；CEC 仅 x86、无上报；hotplug 在 vendor 内核死锁</a:t>
+            </a:r>
+          </a:p>
+        </p:txBody>
+      </p:sp>
+      <p:sp>
+        <p:nvSpPr>
+          <p:cNvPr id="32" name="Rectangle 31"/>
           <p:cNvSpPr/>
           <p:nvPr/>
         </p:nvSpPr>
         <p:spPr>
           <a:xfrm>
-            <a:off x="7772400" y="4069080"/>
-            <a:ext cx="3931920" cy="1143000"/>
-          </a:xfrm>
-          <a:prstGeom prst="roundRect">
-            <a:avLst>
-              <a:gd name="adj" fmla="val 6000"/>
-            </a:avLst>
+            <a:off x="731520" y="5806440"/>
+            <a:ext cx="10725912" cy="777240"/>
+          </a:xfrm>
+          <a:prstGeom prst="rect">
+            <a:avLst/>
           </a:prstGeom>
           <a:solidFill>
-            <a:srgbClr val="FDF0EE"/>
+            <a:srgbClr val="A30822"/>
           </a:solidFill>
-          <a:ln w="9525">
-            <a:solidFill>
-              <a:srgbClr val="CCCCCC"/>
-            </a:solidFill>
+          <a:ln>
+            <a:noFill/>
           </a:ln>
           <a:effectLst/>
         </p:spPr>
@@ -6064,105 +6507,14 @@
       </p:sp>
       <p:sp>
         <p:nvSpPr>
-          <p:cNvPr id="30" name="TextBox 29"/>
+          <p:cNvPr id="33" name="TextBox 32"/>
           <p:cNvSpPr txBox="1"/>
           <p:nvPr/>
         </p:nvSpPr>
         <p:spPr>
           <a:xfrm>
-            <a:off x="7845552" y="4069080"/>
-            <a:ext cx="3785616" cy="1143000"/>
-          </a:xfrm>
-          <a:prstGeom prst="rect">
-            <a:avLst/>
-          </a:prstGeom>
-          <a:noFill/>
-        </p:spPr>
-        <p:txBody>
-          <a:bodyPr wrap="square" anchor="ctr" lIns="50800" rIns="50800" tIns="25400" bIns="25400">
-            <a:spAutoFit/>
-          </a:bodyPr>
-          <a:lstStyle/>
-          <a:p>
-            <a:pPr algn="l">
-              <a:lnSpc>
-                <a:spcPct val="105000"/>
-              </a:lnSpc>
-              <a:spcBef>
-                <a:spcPts val="0"/>
-              </a:spcBef>
-              <a:spcAft>
-                <a:spcPts val="400"/>
-              </a:spcAft>
-            </a:pPr>
-            <a:r>
-              <a:rPr sz="1200" b="1">
-                <a:solidFill>
-                  <a:srgbClr val="C0392B"/>
-                </a:solidFill>
-                <a:latin typeface="Microsoft YaHei"/>
-              </a:rPr>
-              <a:t>isolcpus 仅启动期静态；CEC 仅 x86、无上报；hotplug 在 vendor 内核死锁</a:t>
-            </a:r>
-          </a:p>
-        </p:txBody>
-      </p:sp>
-      <p:sp>
-        <p:nvSpPr>
-          <p:cNvPr id="31" name="Rounded Rectangle 30"/>
-          <p:cNvSpPr/>
-          <p:nvPr/>
-        </p:nvSpPr>
-        <p:spPr>
-          <a:xfrm>
-            <a:off x="548640" y="5806440"/>
-            <a:ext cx="11064240" cy="777240"/>
-          </a:xfrm>
-          <a:prstGeom prst="roundRect">
-            <a:avLst>
-              <a:gd name="adj" fmla="val 6000"/>
-            </a:avLst>
-          </a:prstGeom>
-          <a:solidFill>
-            <a:srgbClr val="1F2D5A"/>
-          </a:solidFill>
-          <a:ln>
-            <a:noFill/>
-          </a:ln>
-          <a:effectLst/>
-        </p:spPr>
-        <p:style>
-          <a:lnRef idx="1">
-            <a:schemeClr val="accent1"/>
-          </a:lnRef>
-          <a:fillRef idx="3">
-            <a:schemeClr val="accent1"/>
-          </a:fillRef>
-          <a:effectRef idx="2">
-            <a:schemeClr val="accent1"/>
-          </a:effectRef>
-          <a:fontRef idx="minor">
-            <a:schemeClr val="lt1"/>
-          </a:fontRef>
-        </p:style>
-        <p:txBody>
-          <a:bodyPr rtlCol="0" anchor="ctr"/>
-          <a:lstStyle/>
-          <a:p>
-            <a:pPr algn="ctr"/>
-          </a:p>
-        </p:txBody>
-      </p:sp>
-      <p:sp>
-        <p:nvSpPr>
-          <p:cNvPr id="32" name="TextBox 31"/>
-          <p:cNvSpPr txBox="1"/>
-          <p:nvPr/>
-        </p:nvSpPr>
-        <p:spPr>
-          <a:xfrm>
-            <a:off x="731520" y="5806440"/>
-            <a:ext cx="10698480" cy="777240"/>
+            <a:off x="914400" y="5806440"/>
+            <a:ext cx="10424160" cy="777240"/>
           </a:xfrm>
           <a:prstGeom prst="rect">
             <a:avLst/>
@@ -6218,22 +6570,20 @@
       <p:grpSpPr/>
       <p:sp>
         <p:nvSpPr>
-          <p:cNvPr id="2" name="Rounded Rectangle 1"/>
+          <p:cNvPr id="2" name="Rectangle 1"/>
           <p:cNvSpPr/>
           <p:nvPr/>
         </p:nvSpPr>
         <p:spPr>
           <a:xfrm>
             <a:off x="0" y="0"/>
-            <a:ext cx="12191695" cy="109728"/>
-          </a:xfrm>
-          <a:prstGeom prst="roundRect">
-            <a:avLst>
-              <a:gd name="adj" fmla="val 6000"/>
-            </a:avLst>
+            <a:ext cx="12191695" cy="6858000"/>
+          </a:xfrm>
+          <a:prstGeom prst="rect">
+            <a:avLst/>
           </a:prstGeom>
           <a:solidFill>
-            <a:srgbClr val="1E8E3E"/>
+            <a:srgbClr val="FFFFFF"/>
           </a:solidFill>
           <a:ln>
             <a:noFill/>
@@ -6264,22 +6614,20 @@
       </p:sp>
       <p:sp>
         <p:nvSpPr>
-          <p:cNvPr id="3" name="Rounded Rectangle 2"/>
+          <p:cNvPr id="3" name="Rectangle 2"/>
           <p:cNvSpPr/>
           <p:nvPr/>
         </p:nvSpPr>
         <p:spPr>
           <a:xfrm>
-            <a:off x="457200" y="384048"/>
-            <a:ext cx="457200" cy="457200"/>
-          </a:xfrm>
-          <a:prstGeom prst="roundRect">
-            <a:avLst>
-              <a:gd name="adj" fmla="val 6000"/>
-            </a:avLst>
+            <a:off x="457200" y="420624"/>
+            <a:ext cx="146304" cy="512064"/>
+          </a:xfrm>
+          <a:prstGeom prst="rect">
+            <a:avLst/>
           </a:prstGeom>
           <a:solidFill>
-            <a:srgbClr val="1E8E3E"/>
+            <a:srgbClr val="CF0A2C"/>
           </a:solidFill>
           <a:ln>
             <a:noFill/>
@@ -6316,8 +6664,277 @@
         </p:nvSpPr>
         <p:spPr>
           <a:xfrm>
-            <a:off x="457200" y="384048"/>
-            <a:ext cx="457200" cy="457200"/>
+            <a:off x="731520" y="365760"/>
+            <a:ext cx="1005840" cy="603504"/>
+          </a:xfrm>
+          <a:prstGeom prst="rect">
+            <a:avLst/>
+          </a:prstGeom>
+          <a:noFill/>
+        </p:spPr>
+        <p:txBody>
+          <a:bodyPr wrap="square" anchor="ctr" lIns="50800" rIns="50800" tIns="25400" bIns="25400">
+            <a:spAutoFit/>
+          </a:bodyPr>
+          <a:lstStyle/>
+          <a:p>
+            <a:pPr algn="l">
+              <a:lnSpc>
+                <a:spcPct val="100000"/>
+              </a:lnSpc>
+              <a:spcBef>
+                <a:spcPts val="0"/>
+              </a:spcBef>
+              <a:spcAft>
+                <a:spcPts val="400"/>
+              </a:spcAft>
+            </a:pPr>
+            <a:r>
+              <a:rPr sz="3000" b="1">
+                <a:solidFill>
+                  <a:srgbClr val="CF0A2C"/>
+                </a:solidFill>
+                <a:latin typeface="Microsoft YaHei"/>
+              </a:rPr>
+              <a:t>03</a:t>
+            </a:r>
+          </a:p>
+        </p:txBody>
+      </p:sp>
+      <p:sp>
+        <p:nvSpPr>
+          <p:cNvPr id="5" name="TextBox 4"/>
+          <p:cNvSpPr txBox="1"/>
+          <p:nvPr/>
+        </p:nvSpPr>
+        <p:spPr>
+          <a:xfrm>
+            <a:off x="1600200" y="365760"/>
+            <a:ext cx="9875520" cy="603504"/>
+          </a:xfrm>
+          <a:prstGeom prst="rect">
+            <a:avLst/>
+          </a:prstGeom>
+          <a:noFill/>
+        </p:spPr>
+        <p:txBody>
+          <a:bodyPr wrap="square" anchor="ctr" lIns="50800" rIns="50800" tIns="25400" bIns="25400">
+            <a:spAutoFit/>
+          </a:bodyPr>
+          <a:lstStyle/>
+          <a:p>
+            <a:pPr algn="l">
+              <a:lnSpc>
+                <a:spcPct val="100000"/>
+              </a:lnSpc>
+              <a:spcBef>
+                <a:spcPts val="0"/>
+              </a:spcBef>
+              <a:spcAft>
+                <a:spcPts val="400"/>
+              </a:spcAft>
+            </a:pPr>
+            <a:r>
+              <a:rPr sz="2600" b="1">
+                <a:solidFill>
+                  <a:srgbClr val="1A1A1A"/>
+                </a:solidFill>
+                <a:latin typeface="Microsoft YaHei"/>
+              </a:rPr>
+              <a:t>创新点：六大机制有机组合</a:t>
+            </a:r>
+          </a:p>
+        </p:txBody>
+      </p:sp>
+      <p:sp>
+        <p:nvSpPr>
+          <p:cNvPr id="6" name="Rectangle 5"/>
+          <p:cNvSpPr/>
+          <p:nvPr/>
+        </p:nvSpPr>
+        <p:spPr>
+          <a:xfrm>
+            <a:off x="731520" y="1024128"/>
+            <a:ext cx="10725912" cy="25400"/>
+          </a:xfrm>
+          <a:prstGeom prst="rect">
+            <a:avLst/>
+          </a:prstGeom>
+          <a:solidFill>
+            <a:srgbClr val="CF0A2C"/>
+          </a:solidFill>
+          <a:ln>
+            <a:noFill/>
+          </a:ln>
+          <a:effectLst/>
+        </p:spPr>
+        <p:style>
+          <a:lnRef idx="1">
+            <a:schemeClr val="accent1"/>
+          </a:lnRef>
+          <a:fillRef idx="3">
+            <a:schemeClr val="accent1"/>
+          </a:fillRef>
+          <a:effectRef idx="2">
+            <a:schemeClr val="accent1"/>
+          </a:effectRef>
+          <a:fontRef idx="minor">
+            <a:schemeClr val="lt1"/>
+          </a:fontRef>
+        </p:style>
+        <p:txBody>
+          <a:bodyPr rtlCol="0" anchor="ctr"/>
+          <a:lstStyle/>
+          <a:p>
+            <a:pPr algn="ctr"/>
+          </a:p>
+        </p:txBody>
+      </p:sp>
+      <p:sp>
+        <p:nvSpPr>
+          <p:cNvPr id="7" name="TextBox 6"/>
+          <p:cNvSpPr txBox="1"/>
+          <p:nvPr/>
+        </p:nvSpPr>
+        <p:spPr>
+          <a:xfrm>
+            <a:off x="9692640" y="420624"/>
+            <a:ext cx="1783080" cy="365760"/>
+          </a:xfrm>
+          <a:prstGeom prst="rect">
+            <a:avLst/>
+          </a:prstGeom>
+          <a:noFill/>
+        </p:spPr>
+        <p:txBody>
+          <a:bodyPr wrap="square" anchor="ctr" lIns="50800" rIns="50800" tIns="25400" bIns="25400">
+            <a:spAutoFit/>
+          </a:bodyPr>
+          <a:lstStyle/>
+          <a:p>
+            <a:pPr algn="r">
+              <a:lnSpc>
+                <a:spcPct val="100000"/>
+              </a:lnSpc>
+              <a:spcBef>
+                <a:spcPts val="0"/>
+              </a:spcBef>
+              <a:spcAft>
+                <a:spcPts val="400"/>
+              </a:spcAft>
+            </a:pPr>
+            <a:r>
+              <a:rPr sz="1100" b="0">
+                <a:solidFill>
+                  <a:srgbClr val="595959"/>
+                </a:solidFill>
+                <a:latin typeface="Microsoft YaHei"/>
+              </a:rPr>
+              <a:t>专利介绍</a:t>
+            </a:r>
+          </a:p>
+        </p:txBody>
+      </p:sp>
+      <p:sp>
+        <p:nvSpPr>
+          <p:cNvPr id="8" name="Rectangle 7"/>
+          <p:cNvSpPr/>
+          <p:nvPr/>
+        </p:nvSpPr>
+        <p:spPr>
+          <a:xfrm>
+            <a:off x="731520" y="1188720"/>
+            <a:ext cx="5458968" cy="1536192"/>
+          </a:xfrm>
+          <a:prstGeom prst="rect">
+            <a:avLst/>
+          </a:prstGeom>
+          <a:solidFill>
+            <a:srgbClr val="F4F4F4"/>
+          </a:solidFill>
+          <a:ln w="12700">
+            <a:solidFill>
+              <a:srgbClr val="D9D9D9"/>
+            </a:solidFill>
+          </a:ln>
+          <a:effectLst/>
+        </p:spPr>
+        <p:style>
+          <a:lnRef idx="1">
+            <a:schemeClr val="accent1"/>
+          </a:lnRef>
+          <a:fillRef idx="3">
+            <a:schemeClr val="accent1"/>
+          </a:fillRef>
+          <a:effectRef idx="2">
+            <a:schemeClr val="accent1"/>
+          </a:effectRef>
+          <a:fontRef idx="minor">
+            <a:schemeClr val="lt1"/>
+          </a:fontRef>
+        </p:style>
+        <p:txBody>
+          <a:bodyPr rtlCol="0" anchor="ctr"/>
+          <a:lstStyle/>
+          <a:p>
+            <a:pPr algn="ctr"/>
+          </a:p>
+        </p:txBody>
+      </p:sp>
+      <p:sp>
+        <p:nvSpPr>
+          <p:cNvPr id="9" name="Rectangle 8"/>
+          <p:cNvSpPr/>
+          <p:nvPr/>
+        </p:nvSpPr>
+        <p:spPr>
+          <a:xfrm>
+            <a:off x="731520" y="1188720"/>
+            <a:ext cx="548640" cy="1536192"/>
+          </a:xfrm>
+          <a:prstGeom prst="rect">
+            <a:avLst/>
+          </a:prstGeom>
+          <a:solidFill>
+            <a:srgbClr val="CF0A2C"/>
+          </a:solidFill>
+          <a:ln>
+            <a:noFill/>
+          </a:ln>
+          <a:effectLst/>
+        </p:spPr>
+        <p:style>
+          <a:lnRef idx="1">
+            <a:schemeClr val="accent1"/>
+          </a:lnRef>
+          <a:fillRef idx="3">
+            <a:schemeClr val="accent1"/>
+          </a:fillRef>
+          <a:effectRef idx="2">
+            <a:schemeClr val="accent1"/>
+          </a:effectRef>
+          <a:fontRef idx="minor">
+            <a:schemeClr val="lt1"/>
+          </a:fontRef>
+        </p:style>
+        <p:txBody>
+          <a:bodyPr rtlCol="0" anchor="ctr"/>
+          <a:lstStyle/>
+          <a:p>
+            <a:pPr algn="ctr"/>
+          </a:p>
+        </p:txBody>
+      </p:sp>
+      <p:sp>
+        <p:nvSpPr>
+          <p:cNvPr id="10" name="TextBox 9"/>
+          <p:cNvSpPr txBox="1"/>
+          <p:nvPr/>
+        </p:nvSpPr>
+        <p:spPr>
+          <a:xfrm>
+            <a:off x="731520" y="1188720"/>
+            <a:ext cx="548640" cy="1536192"/>
           </a:xfrm>
           <a:prstGeom prst="rect">
             <a:avLst/>
@@ -6342,27 +6959,27 @@
               </a:spcAft>
             </a:pPr>
             <a:r>
-              <a:rPr sz="2200" b="1">
+              <a:rPr sz="2600" b="1">
                 <a:solidFill>
                   <a:srgbClr val="FFFFFF"/>
                 </a:solidFill>
                 <a:latin typeface="Microsoft YaHei"/>
               </a:rPr>
-              <a:t>3</a:t>
-            </a:r>
-          </a:p>
-        </p:txBody>
-      </p:sp>
-      <p:sp>
-        <p:nvSpPr>
-          <p:cNvPr id="5" name="TextBox 4"/>
+              <a:t>1</a:t>
+            </a:r>
+          </a:p>
+        </p:txBody>
+      </p:sp>
+      <p:sp>
+        <p:nvSpPr>
+          <p:cNvPr id="11" name="TextBox 10"/>
           <p:cNvSpPr txBox="1"/>
           <p:nvPr/>
         </p:nvSpPr>
         <p:spPr>
           <a:xfrm>
-            <a:off x="1051560" y="365760"/>
-            <a:ext cx="10515600" cy="548640"/>
+            <a:off x="1444752" y="1316736"/>
+            <a:ext cx="4590288" cy="457200"/>
           </a:xfrm>
           <a:prstGeom prst="rect">
             <a:avLst/>
@@ -6370,7 +6987,7 @@
           <a:noFill/>
         </p:spPr>
         <p:txBody>
-          <a:bodyPr wrap="square" anchor="ctr" lIns="50800" rIns="50800" tIns="25400" bIns="25400">
+          <a:bodyPr wrap="square" anchor="t" lIns="50800" rIns="50800" tIns="25400" bIns="25400">
             <a:spAutoFit/>
           </a:bodyPr>
           <a:lstStyle/>
@@ -6387,35 +7004,124 @@
               </a:spcAft>
             </a:pPr>
             <a:r>
-              <a:rPr sz="2600" b="1">
-                <a:solidFill>
-                  <a:srgbClr val="1F2D5A"/>
+              <a:rPr sz="1500" b="1">
+                <a:solidFill>
+                  <a:srgbClr val="1A1A1A"/>
                 </a:solidFill>
                 <a:latin typeface="Microsoft YaHei"/>
               </a:rPr>
-              <a:t>创新点：六大机制有机组合</a:t>
-            </a:r>
-          </a:p>
-        </p:txBody>
-      </p:sp>
-      <p:sp>
-        <p:nvSpPr>
-          <p:cNvPr id="6" name="Rounded Rectangle 5"/>
+              <a:t>运行时 panic 抑制 + 接管接力</a:t>
+            </a:r>
+          </a:p>
+        </p:txBody>
+      </p:sp>
+      <p:sp>
+        <p:nvSpPr>
+          <p:cNvPr id="12" name="TextBox 11"/>
+          <p:cNvSpPr txBox="1"/>
+          <p:nvPr/>
+        </p:nvSpPr>
+        <p:spPr>
+          <a:xfrm>
+            <a:off x="1444752" y="1773936"/>
+            <a:ext cx="4590288" cy="896112"/>
+          </a:xfrm>
+          <a:prstGeom prst="rect">
+            <a:avLst/>
+          </a:prstGeom>
+          <a:noFill/>
+        </p:spPr>
+        <p:txBody>
+          <a:bodyPr wrap="square" anchor="t" lIns="50800" rIns="50800" tIns="25400" bIns="25400">
+            <a:spAutoFit/>
+          </a:bodyPr>
+          <a:lstStyle/>
+          <a:p>
+            <a:pPr algn="l">
+              <a:lnSpc>
+                <a:spcPct val="110000"/>
+              </a:lnSpc>
+              <a:spcBef>
+                <a:spcPts val="0"/>
+              </a:spcBef>
+              <a:spcAft>
+                <a:spcPts val="400"/>
+              </a:spcAft>
+            </a:pPr>
+            <a:r>
+              <a:rPr sz="1200" b="0">
+                <a:solidFill>
+                  <a:srgbClr val="595959"/>
+                </a:solidFill>
+                <a:latin typeface="Microsoft YaHei"/>
+              </a:rPr>
+              <a:t>kprobe 直写未导出 mce_tolerant，致命 MCE 退化为“记录+返回”回流解码链，模块接管分类隔离；双层 panic 兜底，卸载完整回滚</a:t>
+            </a:r>
+          </a:p>
+        </p:txBody>
+      </p:sp>
+      <p:sp>
+        <p:nvSpPr>
+          <p:cNvPr id="13" name="Rectangle 12"/>
           <p:cNvSpPr/>
           <p:nvPr/>
         </p:nvSpPr>
         <p:spPr>
           <a:xfrm>
-            <a:off x="1051560" y="932688"/>
-            <a:ext cx="10058400" cy="27940"/>
-          </a:xfrm>
-          <a:prstGeom prst="roundRect">
-            <a:avLst>
-              <a:gd name="adj" fmla="val 6000"/>
-            </a:avLst>
+            <a:off x="6373368" y="1188720"/>
+            <a:ext cx="5458968" cy="1536192"/>
+          </a:xfrm>
+          <a:prstGeom prst="rect">
+            <a:avLst/>
           </a:prstGeom>
           <a:solidFill>
-            <a:srgbClr val="1E8E3E"/>
+            <a:srgbClr val="FBECEE"/>
+          </a:solidFill>
+          <a:ln w="19050">
+            <a:solidFill>
+              <a:srgbClr val="CF0A2C"/>
+            </a:solidFill>
+          </a:ln>
+          <a:effectLst/>
+        </p:spPr>
+        <p:style>
+          <a:lnRef idx="1">
+            <a:schemeClr val="accent1"/>
+          </a:lnRef>
+          <a:fillRef idx="3">
+            <a:schemeClr val="accent1"/>
+          </a:fillRef>
+          <a:effectRef idx="2">
+            <a:schemeClr val="accent1"/>
+          </a:effectRef>
+          <a:fontRef idx="minor">
+            <a:schemeClr val="lt1"/>
+          </a:fontRef>
+        </p:style>
+        <p:txBody>
+          <a:bodyPr rtlCol="0" anchor="ctr"/>
+          <a:lstStyle/>
+          <a:p>
+            <a:pPr algn="ctr"/>
+          </a:p>
+        </p:txBody>
+      </p:sp>
+      <p:sp>
+        <p:nvSpPr>
+          <p:cNvPr id="14" name="Rectangle 13"/>
+          <p:cNvSpPr/>
+          <p:nvPr/>
+        </p:nvSpPr>
+        <p:spPr>
+          <a:xfrm>
+            <a:off x="6373368" y="1188720"/>
+            <a:ext cx="548640" cy="1536192"/>
+          </a:xfrm>
+          <a:prstGeom prst="rect">
+            <a:avLst/>
+          </a:prstGeom>
+          <a:solidFill>
+            <a:srgbClr val="CF0A2C"/>
           </a:solidFill>
           <a:ln>
             <a:noFill/>
@@ -6446,108 +7152,59 @@
       </p:sp>
       <p:sp>
         <p:nvSpPr>
-          <p:cNvPr id="7" name="Rounded Rectangle 6"/>
-          <p:cNvSpPr/>
-          <p:nvPr/>
-        </p:nvSpPr>
-        <p:spPr>
-          <a:xfrm>
-            <a:off x="457200" y="1188720"/>
-            <a:ext cx="5532120" cy="1554480"/>
-          </a:xfrm>
-          <a:prstGeom prst="roundRect">
-            <a:avLst>
-              <a:gd name="adj" fmla="val 6000"/>
-            </a:avLst>
-          </a:prstGeom>
-          <a:solidFill>
-            <a:srgbClr val="FFFFFF"/>
-          </a:solidFill>
-          <a:ln w="19050">
-            <a:solidFill>
-              <a:srgbClr val="2E5BC8"/>
-            </a:solidFill>
-          </a:ln>
-          <a:effectLst/>
-        </p:spPr>
-        <p:style>
-          <a:lnRef idx="1">
-            <a:schemeClr val="accent1"/>
-          </a:lnRef>
-          <a:fillRef idx="3">
-            <a:schemeClr val="accent1"/>
-          </a:fillRef>
-          <a:effectRef idx="2">
-            <a:schemeClr val="accent1"/>
-          </a:effectRef>
-          <a:fontRef idx="minor">
-            <a:schemeClr val="lt1"/>
-          </a:fontRef>
-        </p:style>
-        <p:txBody>
-          <a:bodyPr rtlCol="0" anchor="ctr"/>
-          <a:lstStyle/>
-          <a:p>
-            <a:pPr algn="ctr"/>
-          </a:p>
-        </p:txBody>
-      </p:sp>
-      <p:sp>
-        <p:nvSpPr>
-          <p:cNvPr id="8" name="Rounded Rectangle 7"/>
-          <p:cNvSpPr/>
-          <p:nvPr/>
-        </p:nvSpPr>
-        <p:spPr>
-          <a:xfrm>
-            <a:off x="457200" y="1188720"/>
-            <a:ext cx="118872" cy="1554480"/>
-          </a:xfrm>
-          <a:prstGeom prst="roundRect">
-            <a:avLst>
-              <a:gd name="adj" fmla="val 6000"/>
-            </a:avLst>
-          </a:prstGeom>
-          <a:solidFill>
-            <a:srgbClr val="2E5BC8"/>
-          </a:solidFill>
-          <a:ln>
-            <a:noFill/>
-          </a:ln>
-          <a:effectLst/>
-        </p:spPr>
-        <p:style>
-          <a:lnRef idx="1">
-            <a:schemeClr val="accent1"/>
-          </a:lnRef>
-          <a:fillRef idx="3">
-            <a:schemeClr val="accent1"/>
-          </a:fillRef>
-          <a:effectRef idx="2">
-            <a:schemeClr val="accent1"/>
-          </a:effectRef>
-          <a:fontRef idx="minor">
-            <a:schemeClr val="lt1"/>
-          </a:fontRef>
-        </p:style>
-        <p:txBody>
-          <a:bodyPr rtlCol="0" anchor="ctr"/>
-          <a:lstStyle/>
-          <a:p>
-            <a:pPr algn="ctr"/>
-          </a:p>
-        </p:txBody>
-      </p:sp>
-      <p:sp>
-        <p:nvSpPr>
-          <p:cNvPr id="9" name="TextBox 8"/>
+          <p:cNvPr id="15" name="TextBox 14"/>
           <p:cNvSpPr txBox="1"/>
           <p:nvPr/>
         </p:nvSpPr>
         <p:spPr>
           <a:xfrm>
-            <a:off x="713232" y="1298448"/>
-            <a:ext cx="5166360" cy="457200"/>
+            <a:off x="6373368" y="1188720"/>
+            <a:ext cx="548640" cy="1536192"/>
+          </a:xfrm>
+          <a:prstGeom prst="rect">
+            <a:avLst/>
+          </a:prstGeom>
+          <a:noFill/>
+        </p:spPr>
+        <p:txBody>
+          <a:bodyPr wrap="square" anchor="ctr" lIns="50800" rIns="50800" tIns="25400" bIns="25400">
+            <a:spAutoFit/>
+          </a:bodyPr>
+          <a:lstStyle/>
+          <a:p>
+            <a:pPr algn="ctr">
+              <a:lnSpc>
+                <a:spcPct val="100000"/>
+              </a:lnSpc>
+              <a:spcBef>
+                <a:spcPts val="0"/>
+              </a:spcBef>
+              <a:spcAft>
+                <a:spcPts val="400"/>
+              </a:spcAft>
+            </a:pPr>
+            <a:r>
+              <a:rPr sz="2600" b="1">
+                <a:solidFill>
+                  <a:srgbClr val="FFFFFF"/>
+                </a:solidFill>
+                <a:latin typeface="Microsoft YaHei"/>
+              </a:rPr>
+              <a:t>2</a:t>
+            </a:r>
+          </a:p>
+        </p:txBody>
+      </p:sp>
+      <p:sp>
+        <p:nvSpPr>
+          <p:cNvPr id="16" name="TextBox 15"/>
+          <p:cNvSpPr txBox="1"/>
+          <p:nvPr/>
+        </p:nvSpPr>
+        <p:spPr>
+          <a:xfrm>
+            <a:off x="7086600" y="1316736"/>
+            <a:ext cx="4590288" cy="457200"/>
           </a:xfrm>
           <a:prstGeom prst="rect">
             <a:avLst/>
@@ -6574,25 +7231,25 @@
             <a:r>
               <a:rPr sz="1500" b="1">
                 <a:solidFill>
-                  <a:srgbClr val="2E5BC8"/>
+                  <a:srgbClr val="A30822"/>
                 </a:solidFill>
                 <a:latin typeface="Microsoft YaHei"/>
               </a:rPr>
-              <a:t>1  运行时 panic 抑制 + 接管接力</a:t>
-            </a:r>
-          </a:p>
-        </p:txBody>
-      </p:sp>
-      <p:sp>
-        <p:nvSpPr>
-          <p:cNvPr id="10" name="TextBox 9"/>
+              <a:t>三档隔离 + 无下电隔离模式 ★</a:t>
+            </a:r>
+          </a:p>
+        </p:txBody>
+      </p:sp>
+      <p:sp>
+        <p:nvSpPr>
+          <p:cNvPr id="17" name="TextBox 16"/>
           <p:cNvSpPr txBox="1"/>
           <p:nvPr/>
         </p:nvSpPr>
         <p:spPr>
           <a:xfrm>
-            <a:off x="713232" y="1755648"/>
-            <a:ext cx="5120640" cy="914400"/>
+            <a:off x="7086600" y="1773936"/>
+            <a:ext cx="4590288" cy="896112"/>
           </a:xfrm>
           <a:prstGeom prst="rect">
             <a:avLst/>
@@ -6607,7 +7264,7 @@
           <a:p>
             <a:pPr algn="l">
               <a:lnSpc>
-                <a:spcPct val="108000"/>
+                <a:spcPct val="110000"/>
               </a:lnSpc>
               <a:spcBef>
                 <a:spcPts val="0"/>
@@ -6619,37 +7276,35 @@
             <a:r>
               <a:rPr sz="1200" b="0">
                 <a:solidFill>
-                  <a:srgbClr val="222222"/>
+                  <a:srgbClr val="595959"/>
                 </a:solidFill>
                 <a:latin typeface="Microsoft YaHei"/>
               </a:rPr>
-              <a:t>kprobe 直写未导出 mce_tolerant，致命 MCE 退化为“记录+返回”回流解码链，模块接管分类隔离；双层 panic 兜底，卸载完整回滚</a:t>
-            </a:r>
-          </a:p>
-        </p:txBody>
-      </p:sp>
-      <p:sp>
-        <p:nvSpPr>
-          <p:cNvPr id="11" name="Rounded Rectangle 10"/>
+              <a:t>full/inactive/soft 按内核能力自适应；inactive 清 cpu_active_mask + 迁 IRQ，CPU 在线但调度/中断不可见，绕开 hotplug 死锁</a:t>
+            </a:r>
+          </a:p>
+        </p:txBody>
+      </p:sp>
+      <p:sp>
+        <p:nvSpPr>
+          <p:cNvPr id="18" name="Rectangle 17"/>
           <p:cNvSpPr/>
           <p:nvPr/>
         </p:nvSpPr>
         <p:spPr>
           <a:xfrm>
-            <a:off x="6172200" y="1188720"/>
-            <a:ext cx="5532120" cy="1554480"/>
-          </a:xfrm>
-          <a:prstGeom prst="roundRect">
-            <a:avLst>
-              <a:gd name="adj" fmla="val 6000"/>
-            </a:avLst>
+            <a:off x="731520" y="2862072"/>
+            <a:ext cx="5458968" cy="1536192"/>
+          </a:xfrm>
+          <a:prstGeom prst="rect">
+            <a:avLst/>
           </a:prstGeom>
           <a:solidFill>
-            <a:srgbClr val="FFFFFF"/>
+            <a:srgbClr val="F4F4F4"/>
           </a:solidFill>
-          <a:ln w="19050">
+          <a:ln w="12700">
             <a:solidFill>
-              <a:srgbClr val="1E8E3E"/>
+              <a:srgbClr val="D9D9D9"/>
             </a:solidFill>
           </a:ln>
           <a:effectLst/>
@@ -6678,22 +7333,20 @@
       </p:sp>
       <p:sp>
         <p:nvSpPr>
-          <p:cNvPr id="12" name="Rounded Rectangle 11"/>
+          <p:cNvPr id="19" name="Rectangle 18"/>
           <p:cNvSpPr/>
           <p:nvPr/>
         </p:nvSpPr>
         <p:spPr>
           <a:xfrm>
-            <a:off x="6172200" y="1188720"/>
-            <a:ext cx="118872" cy="1554480"/>
-          </a:xfrm>
-          <a:prstGeom prst="roundRect">
-            <a:avLst>
-              <a:gd name="adj" fmla="val 6000"/>
-            </a:avLst>
+            <a:off x="731520" y="2862072"/>
+            <a:ext cx="548640" cy="1536192"/>
+          </a:xfrm>
+          <a:prstGeom prst="rect">
+            <a:avLst/>
           </a:prstGeom>
           <a:solidFill>
-            <a:srgbClr val="1E8E3E"/>
+            <a:srgbClr val="CF0A2C"/>
           </a:solidFill>
           <a:ln>
             <a:noFill/>
@@ -6724,14 +7377,59 @@
       </p:sp>
       <p:sp>
         <p:nvSpPr>
-          <p:cNvPr id="13" name="TextBox 12"/>
+          <p:cNvPr id="20" name="TextBox 19"/>
           <p:cNvSpPr txBox="1"/>
           <p:nvPr/>
         </p:nvSpPr>
         <p:spPr>
           <a:xfrm>
-            <a:off x="6428232" y="1298448"/>
-            <a:ext cx="5166360" cy="457200"/>
+            <a:off x="731520" y="2862072"/>
+            <a:ext cx="548640" cy="1536192"/>
+          </a:xfrm>
+          <a:prstGeom prst="rect">
+            <a:avLst/>
+          </a:prstGeom>
+          <a:noFill/>
+        </p:spPr>
+        <p:txBody>
+          <a:bodyPr wrap="square" anchor="ctr" lIns="50800" rIns="50800" tIns="25400" bIns="25400">
+            <a:spAutoFit/>
+          </a:bodyPr>
+          <a:lstStyle/>
+          <a:p>
+            <a:pPr algn="ctr">
+              <a:lnSpc>
+                <a:spcPct val="100000"/>
+              </a:lnSpc>
+              <a:spcBef>
+                <a:spcPts val="0"/>
+              </a:spcBef>
+              <a:spcAft>
+                <a:spcPts val="400"/>
+              </a:spcAft>
+            </a:pPr>
+            <a:r>
+              <a:rPr sz="2600" b="1">
+                <a:solidFill>
+                  <a:srgbClr val="FFFFFF"/>
+                </a:solidFill>
+                <a:latin typeface="Microsoft YaHei"/>
+              </a:rPr>
+              <a:t>3</a:t>
+            </a:r>
+          </a:p>
+        </p:txBody>
+      </p:sp>
+      <p:sp>
+        <p:nvSpPr>
+          <p:cNvPr id="21" name="TextBox 20"/>
+          <p:cNvSpPr txBox="1"/>
+          <p:nvPr/>
+        </p:nvSpPr>
+        <p:spPr>
+          <a:xfrm>
+            <a:off x="1444752" y="2990088"/>
+            <a:ext cx="4590288" cy="457200"/>
           </a:xfrm>
           <a:prstGeom prst="rect">
             <a:avLst/>
@@ -6758,25 +7456,25 @@
             <a:r>
               <a:rPr sz="1500" b="1">
                 <a:solidFill>
-                  <a:srgbClr val="1E8E3E"/>
+                  <a:srgbClr val="1A1A1A"/>
                 </a:solidFill>
                 <a:latin typeface="Microsoft YaHei"/>
               </a:rPr>
-              <a:t>2  三档隔离 + 无下电隔离模式 ★</a:t>
-            </a:r>
-          </a:p>
-        </p:txBody>
-      </p:sp>
-      <p:sp>
-        <p:nvSpPr>
-          <p:cNvPr id="14" name="TextBox 13"/>
+              <a:t>按缓存物理拓扑分级决策</a:t>
+            </a:r>
+          </a:p>
+        </p:txBody>
+      </p:sp>
+      <p:sp>
+        <p:nvSpPr>
+          <p:cNvPr id="22" name="TextBox 21"/>
           <p:cNvSpPr txBox="1"/>
           <p:nvPr/>
         </p:nvSpPr>
         <p:spPr>
           <a:xfrm>
-            <a:off x="6428232" y="1755648"/>
-            <a:ext cx="5120640" cy="914400"/>
+            <a:off x="1444752" y="3447288"/>
+            <a:ext cx="4590288" cy="896112"/>
           </a:xfrm>
           <a:prstGeom prst="rect">
             <a:avLst/>
@@ -6791,7 +7489,7 @@
           <a:p>
             <a:pPr algn="l">
               <a:lnSpc>
-                <a:spcPct val="108000"/>
+                <a:spcPct val="110000"/>
               </a:lnSpc>
               <a:spcBef>
                 <a:spcPts val="0"/>
@@ -6803,37 +7501,35 @@
             <a:r>
               <a:rPr sz="1200" b="0">
                 <a:solidFill>
-                  <a:srgbClr val="222222"/>
+                  <a:srgbClr val="595959"/>
                 </a:solidFill>
                 <a:latin typeface="Microsoft YaHei"/>
               </a:rPr>
-              <a:t>full/inactive/soft 按内核能力自适应；inactive 清 cpu_active_mask + 迁 IRQ，CPU 在线但调度/中断不可见，绕开 hotplug 死锁</a:t>
-            </a:r>
-          </a:p>
-        </p:txBody>
-      </p:sp>
-      <p:sp>
-        <p:nvSpPr>
-          <p:cNvPr id="15" name="Rounded Rectangle 14"/>
+              <a:t>L1/L2/TLB/总线 per-core → 隔离该核；L3/LLC socket 共享 → 仅记账上报交 daemon，避免误伤健康核</a:t>
+            </a:r>
+          </a:p>
+        </p:txBody>
+      </p:sp>
+      <p:sp>
+        <p:nvSpPr>
+          <p:cNvPr id="23" name="Rectangle 22"/>
           <p:cNvSpPr/>
           <p:nvPr/>
         </p:nvSpPr>
         <p:spPr>
           <a:xfrm>
-            <a:off x="457200" y="2880360"/>
-            <a:ext cx="5532120" cy="1554480"/>
-          </a:xfrm>
-          <a:prstGeom prst="roundRect">
-            <a:avLst>
-              <a:gd name="adj" fmla="val 6000"/>
-            </a:avLst>
+            <a:off x="6373368" y="2862072"/>
+            <a:ext cx="5458968" cy="1536192"/>
+          </a:xfrm>
+          <a:prstGeom prst="rect">
+            <a:avLst/>
           </a:prstGeom>
           <a:solidFill>
-            <a:srgbClr val="FFFFFF"/>
+            <a:srgbClr val="F4F4F4"/>
           </a:solidFill>
-          <a:ln w="19050">
+          <a:ln w="12700">
             <a:solidFill>
-              <a:srgbClr val="6B3FA0"/>
+              <a:srgbClr val="D9D9D9"/>
             </a:solidFill>
           </a:ln>
           <a:effectLst/>
@@ -6862,22 +7558,20 @@
       </p:sp>
       <p:sp>
         <p:nvSpPr>
-          <p:cNvPr id="16" name="Rounded Rectangle 15"/>
+          <p:cNvPr id="24" name="Rectangle 23"/>
           <p:cNvSpPr/>
           <p:nvPr/>
         </p:nvSpPr>
         <p:spPr>
           <a:xfrm>
-            <a:off x="457200" y="2880360"/>
-            <a:ext cx="118872" cy="1554480"/>
-          </a:xfrm>
-          <a:prstGeom prst="roundRect">
-            <a:avLst>
-              <a:gd name="adj" fmla="val 6000"/>
-            </a:avLst>
+            <a:off x="6373368" y="2862072"/>
+            <a:ext cx="548640" cy="1536192"/>
+          </a:xfrm>
+          <a:prstGeom prst="rect">
+            <a:avLst/>
           </a:prstGeom>
           <a:solidFill>
-            <a:srgbClr val="6B3FA0"/>
+            <a:srgbClr val="CF0A2C"/>
           </a:solidFill>
           <a:ln>
             <a:noFill/>
@@ -6908,14 +7602,59 @@
       </p:sp>
       <p:sp>
         <p:nvSpPr>
-          <p:cNvPr id="17" name="TextBox 16"/>
+          <p:cNvPr id="25" name="TextBox 24"/>
           <p:cNvSpPr txBox="1"/>
           <p:nvPr/>
         </p:nvSpPr>
         <p:spPr>
           <a:xfrm>
-            <a:off x="713232" y="2990088"/>
-            <a:ext cx="5166360" cy="457200"/>
+            <a:off x="6373368" y="2862072"/>
+            <a:ext cx="548640" cy="1536192"/>
+          </a:xfrm>
+          <a:prstGeom prst="rect">
+            <a:avLst/>
+          </a:prstGeom>
+          <a:noFill/>
+        </p:spPr>
+        <p:txBody>
+          <a:bodyPr wrap="square" anchor="ctr" lIns="50800" rIns="50800" tIns="25400" bIns="25400">
+            <a:spAutoFit/>
+          </a:bodyPr>
+          <a:lstStyle/>
+          <a:p>
+            <a:pPr algn="ctr">
+              <a:lnSpc>
+                <a:spcPct val="100000"/>
+              </a:lnSpc>
+              <a:spcBef>
+                <a:spcPts val="0"/>
+              </a:spcBef>
+              <a:spcAft>
+                <a:spcPts val="400"/>
+              </a:spcAft>
+            </a:pPr>
+            <a:r>
+              <a:rPr sz="2600" b="1">
+                <a:solidFill>
+                  <a:srgbClr val="FFFFFF"/>
+                </a:solidFill>
+                <a:latin typeface="Microsoft YaHei"/>
+              </a:rPr>
+              <a:t>4</a:t>
+            </a:r>
+          </a:p>
+        </p:txBody>
+      </p:sp>
+      <p:sp>
+        <p:nvSpPr>
+          <p:cNvPr id="26" name="TextBox 25"/>
+          <p:cNvSpPr txBox="1"/>
+          <p:nvPr/>
+        </p:nvSpPr>
+        <p:spPr>
+          <a:xfrm>
+            <a:off x="7086600" y="2990088"/>
+            <a:ext cx="4590288" cy="457200"/>
           </a:xfrm>
           <a:prstGeom prst="rect">
             <a:avLst/>
@@ -6942,25 +7681,25 @@
             <a:r>
               <a:rPr sz="1500" b="1">
                 <a:solidFill>
-                  <a:srgbClr val="6B3FA0"/>
+                  <a:srgbClr val="1A1A1A"/>
                 </a:solidFill>
                 <a:latin typeface="Microsoft YaHei"/>
               </a:rPr>
-              <a:t>3  按缓存物理拓扑分级决策</a:t>
-            </a:r>
-          </a:p>
-        </p:txBody>
-      </p:sp>
-      <p:sp>
-        <p:nvSpPr>
-          <p:cNvPr id="18" name="TextBox 17"/>
+              <a:t>内核-用户态延迟隔离协议</a:t>
+            </a:r>
+          </a:p>
+        </p:txBody>
+      </p:sp>
+      <p:sp>
+        <p:nvSpPr>
+          <p:cNvPr id="27" name="TextBox 26"/>
           <p:cNvSpPr txBox="1"/>
           <p:nvPr/>
         </p:nvSpPr>
         <p:spPr>
           <a:xfrm>
-            <a:off x="713232" y="3447288"/>
-            <a:ext cx="5120640" cy="914400"/>
+            <a:off x="7086600" y="3447288"/>
+            <a:ext cx="4590288" cy="896112"/>
           </a:xfrm>
           <a:prstGeom prst="rect">
             <a:avLst/>
@@ -6975,7 +7714,7 @@
           <a:p>
             <a:pPr algn="l">
               <a:lnSpc>
-                <a:spcPct val="108000"/>
+                <a:spcPct val="110000"/>
               </a:lnSpc>
               <a:spcBef>
                 <a:spcPts val="0"/>
@@ -6987,37 +7726,35 @@
             <a:r>
               <a:rPr sz="1200" b="0">
                 <a:solidFill>
-                  <a:srgbClr val="222222"/>
+                  <a:srgbClr val="595959"/>
                 </a:solidFill>
                 <a:latin typeface="Microsoft YaHei"/>
               </a:rPr>
-              <a:t>L1/L2/TLB/总线 per-core → 隔离该核；L3/LLC socket 共享 → 仅记账上报交 daemon，避免误伤健康核</a:t>
-            </a:r>
-          </a:p>
-        </p:txBody>
-      </p:sp>
-      <p:sp>
-        <p:nvSpPr>
-          <p:cNvPr id="19" name="Rounded Rectangle 18"/>
+              <a:t>进入隔离态先通知 daemon 热迁移 VM，收 ACK 再下线；超时强制兜底，兼顾“尽快隔离”与“零损失疏散”</a:t>
+            </a:r>
+          </a:p>
+        </p:txBody>
+      </p:sp>
+      <p:sp>
+        <p:nvSpPr>
+          <p:cNvPr id="28" name="Rectangle 27"/>
           <p:cNvSpPr/>
           <p:nvPr/>
         </p:nvSpPr>
         <p:spPr>
           <a:xfrm>
-            <a:off x="6172200" y="2880360"/>
-            <a:ext cx="5532120" cy="1554480"/>
-          </a:xfrm>
-          <a:prstGeom prst="roundRect">
-            <a:avLst>
-              <a:gd name="adj" fmla="val 6000"/>
-            </a:avLst>
+            <a:off x="731520" y="4535424"/>
+            <a:ext cx="5458968" cy="1536192"/>
+          </a:xfrm>
+          <a:prstGeom prst="rect">
+            <a:avLst/>
           </a:prstGeom>
           <a:solidFill>
-            <a:srgbClr val="FFFFFF"/>
+            <a:srgbClr val="FBECEE"/>
           </a:solidFill>
           <a:ln w="19050">
             <a:solidFill>
-              <a:srgbClr val="2E5BC8"/>
+              <a:srgbClr val="CF0A2C"/>
             </a:solidFill>
           </a:ln>
           <a:effectLst/>
@@ -7046,22 +7783,20 @@
       </p:sp>
       <p:sp>
         <p:nvSpPr>
-          <p:cNvPr id="20" name="Rounded Rectangle 19"/>
+          <p:cNvPr id="29" name="Rectangle 28"/>
           <p:cNvSpPr/>
           <p:nvPr/>
         </p:nvSpPr>
         <p:spPr>
           <a:xfrm>
-            <a:off x="6172200" y="2880360"/>
-            <a:ext cx="118872" cy="1554480"/>
-          </a:xfrm>
-          <a:prstGeom prst="roundRect">
-            <a:avLst>
-              <a:gd name="adj" fmla="val 6000"/>
-            </a:avLst>
+            <a:off x="731520" y="4535424"/>
+            <a:ext cx="548640" cy="1536192"/>
+          </a:xfrm>
+          <a:prstGeom prst="rect">
+            <a:avLst/>
           </a:prstGeom>
           <a:solidFill>
-            <a:srgbClr val="2E5BC8"/>
+            <a:srgbClr val="CF0A2C"/>
           </a:solidFill>
           <a:ln>
             <a:noFill/>
@@ -7092,14 +7827,59 @@
       </p:sp>
       <p:sp>
         <p:nvSpPr>
-          <p:cNvPr id="21" name="TextBox 20"/>
+          <p:cNvPr id="30" name="TextBox 29"/>
           <p:cNvSpPr txBox="1"/>
           <p:nvPr/>
         </p:nvSpPr>
         <p:spPr>
           <a:xfrm>
-            <a:off x="6428232" y="2990088"/>
-            <a:ext cx="5166360" cy="457200"/>
+            <a:off x="731520" y="4535424"/>
+            <a:ext cx="548640" cy="1536192"/>
+          </a:xfrm>
+          <a:prstGeom prst="rect">
+            <a:avLst/>
+          </a:prstGeom>
+          <a:noFill/>
+        </p:spPr>
+        <p:txBody>
+          <a:bodyPr wrap="square" anchor="ctr" lIns="50800" rIns="50800" tIns="25400" bIns="25400">
+            <a:spAutoFit/>
+          </a:bodyPr>
+          <a:lstStyle/>
+          <a:p>
+            <a:pPr algn="ctr">
+              <a:lnSpc>
+                <a:spcPct val="100000"/>
+              </a:lnSpc>
+              <a:spcBef>
+                <a:spcPts val="0"/>
+              </a:spcBef>
+              <a:spcAft>
+                <a:spcPts val="400"/>
+              </a:spcAft>
+            </a:pPr>
+            <a:r>
+              <a:rPr sz="2600" b="1">
+                <a:solidFill>
+                  <a:srgbClr val="FFFFFF"/>
+                </a:solidFill>
+                <a:latin typeface="Microsoft YaHei"/>
+              </a:rPr>
+              <a:t>5</a:t>
+            </a:r>
+          </a:p>
+        </p:txBody>
+      </p:sp>
+      <p:sp>
+        <p:nvSpPr>
+          <p:cNvPr id="31" name="TextBox 30"/>
+          <p:cNvSpPr txBox="1"/>
+          <p:nvPr/>
+        </p:nvSpPr>
+        <p:spPr>
+          <a:xfrm>
+            <a:off x="1444752" y="4663440"/>
+            <a:ext cx="4590288" cy="457200"/>
           </a:xfrm>
           <a:prstGeom prst="rect">
             <a:avLst/>
@@ -7126,25 +7906,25 @@
             <a:r>
               <a:rPr sz="1500" b="1">
                 <a:solidFill>
-                  <a:srgbClr val="2E5BC8"/>
+                  <a:srgbClr val="A30822"/>
                 </a:solidFill>
                 <a:latin typeface="Microsoft YaHei"/>
               </a:rPr>
-              <a:t>4  内核-用户态延迟隔离协议</a:t>
-            </a:r>
-          </a:p>
-        </p:txBody>
-      </p:sp>
-      <p:sp>
-        <p:nvSpPr>
-          <p:cNvPr id="22" name="TextBox 21"/>
+              <a:t>内核态 UCE 落点甄别白名单 ★</a:t>
+            </a:r>
+          </a:p>
+        </p:txBody>
+      </p:sp>
+      <p:sp>
+        <p:nvSpPr>
+          <p:cNvPr id="32" name="TextBox 31"/>
           <p:cNvSpPr txBox="1"/>
           <p:nvPr/>
         </p:nvSpPr>
         <p:spPr>
           <a:xfrm>
-            <a:off x="6428232" y="3447288"/>
-            <a:ext cx="5120640" cy="914400"/>
+            <a:off x="1444752" y="5120640"/>
+            <a:ext cx="4590288" cy="896112"/>
           </a:xfrm>
           <a:prstGeom prst="rect">
             <a:avLst/>
@@ -7159,7 +7939,7 @@
           <a:p>
             <a:pPr algn="l">
               <a:lnSpc>
-                <a:spcPct val="108000"/>
+                <a:spcPct val="110000"/>
               </a:lnSpc>
               <a:spcBef>
                 <a:spcPts val="0"/>
@@ -7171,37 +7951,35 @@
             <a:r>
               <a:rPr sz="1200" b="0">
                 <a:solidFill>
-                  <a:srgbClr val="222222"/>
+                  <a:srgbClr val="595959"/>
                 </a:solidFill>
                 <a:latin typeface="Microsoft YaHei"/>
               </a:rPr>
-              <a:t>进入隔离态先通知 daemon 热迁移 VM，收 ACK 再下线；超时强制兜底，兼顾“尽快隔离”与“零损失疏散”</a:t>
-            </a:r>
-          </a:p>
-        </p:txBody>
-      </p:sp>
-      <p:sp>
-        <p:nvSpPr>
-          <p:cNvPr id="23" name="Rounded Rectangle 22"/>
+              <a:t>页归属×消费方式×可恢复信号 二维判决：能救的救成单 VM 损失，不在白名单一律主动 kdump，杜绝静默数据损坏</a:t>
+            </a:r>
+          </a:p>
+        </p:txBody>
+      </p:sp>
+      <p:sp>
+        <p:nvSpPr>
+          <p:cNvPr id="33" name="Rectangle 32"/>
           <p:cNvSpPr/>
           <p:nvPr/>
         </p:nvSpPr>
         <p:spPr>
           <a:xfrm>
-            <a:off x="457200" y="4572000"/>
-            <a:ext cx="5532120" cy="1554480"/>
-          </a:xfrm>
-          <a:prstGeom prst="roundRect">
-            <a:avLst>
-              <a:gd name="adj" fmla="val 6000"/>
-            </a:avLst>
+            <a:off x="6373368" y="4535424"/>
+            <a:ext cx="5458968" cy="1536192"/>
+          </a:xfrm>
+          <a:prstGeom prst="rect">
+            <a:avLst/>
           </a:prstGeom>
           <a:solidFill>
-            <a:srgbClr val="FFFFFF"/>
+            <a:srgbClr val="F4F4F4"/>
           </a:solidFill>
-          <a:ln w="19050">
+          <a:ln w="12700">
             <a:solidFill>
-              <a:srgbClr val="C0392B"/>
+              <a:srgbClr val="D9D9D9"/>
             </a:solidFill>
           </a:ln>
           <a:effectLst/>
@@ -7230,22 +8008,20 @@
       </p:sp>
       <p:sp>
         <p:nvSpPr>
-          <p:cNvPr id="24" name="Rounded Rectangle 23"/>
+          <p:cNvPr id="34" name="Rectangle 33"/>
           <p:cNvSpPr/>
           <p:nvPr/>
         </p:nvSpPr>
         <p:spPr>
           <a:xfrm>
-            <a:off x="457200" y="4572000"/>
-            <a:ext cx="118872" cy="1554480"/>
-          </a:xfrm>
-          <a:prstGeom prst="roundRect">
-            <a:avLst>
-              <a:gd name="adj" fmla="val 6000"/>
-            </a:avLst>
+            <a:off x="6373368" y="4535424"/>
+            <a:ext cx="548640" cy="1536192"/>
+          </a:xfrm>
+          <a:prstGeom prst="rect">
+            <a:avLst/>
           </a:prstGeom>
           <a:solidFill>
-            <a:srgbClr val="C0392B"/>
+            <a:srgbClr val="CF0A2C"/>
           </a:solidFill>
           <a:ln>
             <a:noFill/>
@@ -7276,14 +8052,59 @@
       </p:sp>
       <p:sp>
         <p:nvSpPr>
-          <p:cNvPr id="25" name="TextBox 24"/>
+          <p:cNvPr id="35" name="TextBox 34"/>
           <p:cNvSpPr txBox="1"/>
           <p:nvPr/>
         </p:nvSpPr>
         <p:spPr>
           <a:xfrm>
-            <a:off x="713232" y="4681728"/>
-            <a:ext cx="5166360" cy="457200"/>
+            <a:off x="6373368" y="4535424"/>
+            <a:ext cx="548640" cy="1536192"/>
+          </a:xfrm>
+          <a:prstGeom prst="rect">
+            <a:avLst/>
+          </a:prstGeom>
+          <a:noFill/>
+        </p:spPr>
+        <p:txBody>
+          <a:bodyPr wrap="square" anchor="ctr" lIns="50800" rIns="50800" tIns="25400" bIns="25400">
+            <a:spAutoFit/>
+          </a:bodyPr>
+          <a:lstStyle/>
+          <a:p>
+            <a:pPr algn="ctr">
+              <a:lnSpc>
+                <a:spcPct val="100000"/>
+              </a:lnSpc>
+              <a:spcBef>
+                <a:spcPts val="0"/>
+              </a:spcBef>
+              <a:spcAft>
+                <a:spcPts val="400"/>
+              </a:spcAft>
+            </a:pPr>
+            <a:r>
+              <a:rPr sz="2600" b="1">
+                <a:solidFill>
+                  <a:srgbClr val="FFFFFF"/>
+                </a:solidFill>
+                <a:latin typeface="Microsoft YaHei"/>
+              </a:rPr>
+              <a:t>6</a:t>
+            </a:r>
+          </a:p>
+        </p:txBody>
+      </p:sp>
+      <p:sp>
+        <p:nvSpPr>
+          <p:cNvPr id="36" name="TextBox 35"/>
+          <p:cNvSpPr txBox="1"/>
+          <p:nvPr/>
+        </p:nvSpPr>
+        <p:spPr>
+          <a:xfrm>
+            <a:off x="7086600" y="4663440"/>
+            <a:ext cx="4590288" cy="457200"/>
           </a:xfrm>
           <a:prstGeom prst="rect">
             <a:avLst/>
@@ -7310,25 +8131,25 @@
             <a:r>
               <a:rPr sz="1500" b="1">
                 <a:solidFill>
-                  <a:srgbClr val="C0392B"/>
+                  <a:srgbClr val="1A1A1A"/>
                 </a:solidFill>
                 <a:latin typeface="Microsoft YaHei"/>
               </a:rPr>
-              <a:t>5  内核态 UCE 落点甄别白名单 ★</a:t>
-            </a:r>
-          </a:p>
-        </p:txBody>
-      </p:sp>
-      <p:sp>
-        <p:nvSpPr>
-          <p:cNvPr id="26" name="TextBox 25"/>
+              <a:t>统一双故障域 + 跨架构框架</a:t>
+            </a:r>
+          </a:p>
+        </p:txBody>
+      </p:sp>
+      <p:sp>
+        <p:nvSpPr>
+          <p:cNvPr id="37" name="TextBox 36"/>
           <p:cNvSpPr txBox="1"/>
           <p:nvPr/>
         </p:nvSpPr>
         <p:spPr>
           <a:xfrm>
-            <a:off x="713232" y="5138928"/>
-            <a:ext cx="5120640" cy="914400"/>
+            <a:off x="7086600" y="5120640"/>
+            <a:ext cx="4590288" cy="896112"/>
           </a:xfrm>
           <a:prstGeom prst="rect">
             <a:avLst/>
@@ -7343,7 +8164,7 @@
           <a:p>
             <a:pPr algn="l">
               <a:lnSpc>
-                <a:spcPct val="108000"/>
+                <a:spcPct val="110000"/>
               </a:lnSpc>
               <a:spcBef>
                 <a:spcPts val="0"/>
@@ -7355,191 +8176,7 @@
             <a:r>
               <a:rPr sz="1200" b="0">
                 <a:solidFill>
-                  <a:srgbClr val="222222"/>
-                </a:solidFill>
-                <a:latin typeface="Microsoft YaHei"/>
-              </a:rPr>
-              <a:t>页归属×消费方式×可恢复信号 二维判决：能救的救成单 VM 损失，不在白名单一律主动 kdump，杜绝静默数据损坏</a:t>
-            </a:r>
-          </a:p>
-        </p:txBody>
-      </p:sp>
-      <p:sp>
-        <p:nvSpPr>
-          <p:cNvPr id="27" name="Rounded Rectangle 26"/>
-          <p:cNvSpPr/>
-          <p:nvPr/>
-        </p:nvSpPr>
-        <p:spPr>
-          <a:xfrm>
-            <a:off x="6172200" y="4572000"/>
-            <a:ext cx="5532120" cy="1554480"/>
-          </a:xfrm>
-          <a:prstGeom prst="roundRect">
-            <a:avLst>
-              <a:gd name="adj" fmla="val 6000"/>
-            </a:avLst>
-          </a:prstGeom>
-          <a:solidFill>
-            <a:srgbClr val="FFFFFF"/>
-          </a:solidFill>
-          <a:ln w="19050">
-            <a:solidFill>
-              <a:srgbClr val="555555"/>
-            </a:solidFill>
-          </a:ln>
-          <a:effectLst/>
-        </p:spPr>
-        <p:style>
-          <a:lnRef idx="1">
-            <a:schemeClr val="accent1"/>
-          </a:lnRef>
-          <a:fillRef idx="3">
-            <a:schemeClr val="accent1"/>
-          </a:fillRef>
-          <a:effectRef idx="2">
-            <a:schemeClr val="accent1"/>
-          </a:effectRef>
-          <a:fontRef idx="minor">
-            <a:schemeClr val="lt1"/>
-          </a:fontRef>
-        </p:style>
-        <p:txBody>
-          <a:bodyPr rtlCol="0" anchor="ctr"/>
-          <a:lstStyle/>
-          <a:p>
-            <a:pPr algn="ctr"/>
-          </a:p>
-        </p:txBody>
-      </p:sp>
-      <p:sp>
-        <p:nvSpPr>
-          <p:cNvPr id="28" name="Rounded Rectangle 27"/>
-          <p:cNvSpPr/>
-          <p:nvPr/>
-        </p:nvSpPr>
-        <p:spPr>
-          <a:xfrm>
-            <a:off x="6172200" y="4572000"/>
-            <a:ext cx="118872" cy="1554480"/>
-          </a:xfrm>
-          <a:prstGeom prst="roundRect">
-            <a:avLst>
-              <a:gd name="adj" fmla="val 6000"/>
-            </a:avLst>
-          </a:prstGeom>
-          <a:solidFill>
-            <a:srgbClr val="555555"/>
-          </a:solidFill>
-          <a:ln>
-            <a:noFill/>
-          </a:ln>
-          <a:effectLst/>
-        </p:spPr>
-        <p:style>
-          <a:lnRef idx="1">
-            <a:schemeClr val="accent1"/>
-          </a:lnRef>
-          <a:fillRef idx="3">
-            <a:schemeClr val="accent1"/>
-          </a:fillRef>
-          <a:effectRef idx="2">
-            <a:schemeClr val="accent1"/>
-          </a:effectRef>
-          <a:fontRef idx="minor">
-            <a:schemeClr val="lt1"/>
-          </a:fontRef>
-        </p:style>
-        <p:txBody>
-          <a:bodyPr rtlCol="0" anchor="ctr"/>
-          <a:lstStyle/>
-          <a:p>
-            <a:pPr algn="ctr"/>
-          </a:p>
-        </p:txBody>
-      </p:sp>
-      <p:sp>
-        <p:nvSpPr>
-          <p:cNvPr id="29" name="TextBox 28"/>
-          <p:cNvSpPr txBox="1"/>
-          <p:nvPr/>
-        </p:nvSpPr>
-        <p:spPr>
-          <a:xfrm>
-            <a:off x="6428232" y="4681728"/>
-            <a:ext cx="5166360" cy="457200"/>
-          </a:xfrm>
-          <a:prstGeom prst="rect">
-            <a:avLst/>
-          </a:prstGeom>
-          <a:noFill/>
-        </p:spPr>
-        <p:txBody>
-          <a:bodyPr wrap="square" anchor="t" lIns="50800" rIns="50800" tIns="25400" bIns="25400">
-            <a:spAutoFit/>
-          </a:bodyPr>
-          <a:lstStyle/>
-          <a:p>
-            <a:pPr algn="l">
-              <a:lnSpc>
-                <a:spcPct val="100000"/>
-              </a:lnSpc>
-              <a:spcBef>
-                <a:spcPts val="0"/>
-              </a:spcBef>
-              <a:spcAft>
-                <a:spcPts val="400"/>
-              </a:spcAft>
-            </a:pPr>
-            <a:r>
-              <a:rPr sz="1500" b="1">
-                <a:solidFill>
-                  <a:srgbClr val="555555"/>
-                </a:solidFill>
-                <a:latin typeface="Microsoft YaHei"/>
-              </a:rPr>
-              <a:t>6  统一双故障域 + 跨架构框架</a:t>
-            </a:r>
-          </a:p>
-        </p:txBody>
-      </p:sp>
-      <p:sp>
-        <p:nvSpPr>
-          <p:cNvPr id="30" name="TextBox 29"/>
-          <p:cNvSpPr txBox="1"/>
-          <p:nvPr/>
-        </p:nvSpPr>
-        <p:spPr>
-          <a:xfrm>
-            <a:off x="6428232" y="5138928"/>
-            <a:ext cx="5120640" cy="914400"/>
-          </a:xfrm>
-          <a:prstGeom prst="rect">
-            <a:avLst/>
-          </a:prstGeom>
-          <a:noFill/>
-        </p:spPr>
-        <p:txBody>
-          <a:bodyPr wrap="square" anchor="t" lIns="50800" rIns="50800" tIns="25400" bIns="25400">
-            <a:spAutoFit/>
-          </a:bodyPr>
-          <a:lstStyle/>
-          <a:p>
-            <a:pPr algn="l">
-              <a:lnSpc>
-                <a:spcPct val="108000"/>
-              </a:lnSpc>
-              <a:spcBef>
-                <a:spcPts val="0"/>
-              </a:spcBef>
-              <a:spcAft>
-                <a:spcPts val="400"/>
-              </a:spcAft>
-            </a:pPr>
-            <a:r>
-              <a:rPr sz="1200" b="0">
-                <a:solidFill>
-                  <a:srgbClr val="222222"/>
+                  <a:srgbClr val="595959"/>
                 </a:solidFill>
                 <a:latin typeface="Microsoft YaHei"/>
               </a:rPr>
@@ -7550,14 +8187,14 @@
       </p:sp>
       <p:sp>
         <p:nvSpPr>
-          <p:cNvPr id="31" name="TextBox 30"/>
+          <p:cNvPr id="38" name="TextBox 37"/>
           <p:cNvSpPr txBox="1"/>
           <p:nvPr/>
         </p:nvSpPr>
         <p:spPr>
           <a:xfrm>
-            <a:off x="457200" y="6263640"/>
-            <a:ext cx="11247120" cy="365760"/>
+            <a:off x="731520" y="6217920"/>
+            <a:ext cx="10725912" cy="365760"/>
           </a:xfrm>
           <a:prstGeom prst="rect">
             <a:avLst/>
@@ -7584,7 +8221,7 @@
             <a:r>
               <a:rPr sz="1300" b="1">
                 <a:solidFill>
-                  <a:srgbClr val="C0392B"/>
+                  <a:srgbClr val="CF0A2C"/>
                 </a:solidFill>
                 <a:latin typeface="Microsoft YaHei"/>
               </a:rPr>
@@ -7613,22 +8250,20 @@
       <p:grpSpPr/>
       <p:sp>
         <p:nvSpPr>
-          <p:cNvPr id="2" name="Rounded Rectangle 1"/>
+          <p:cNvPr id="2" name="Rectangle 1"/>
           <p:cNvSpPr/>
           <p:nvPr/>
         </p:nvSpPr>
         <p:spPr>
           <a:xfrm>
             <a:off x="0" y="0"/>
-            <a:ext cx="12191695" cy="109728"/>
-          </a:xfrm>
-          <a:prstGeom prst="roundRect">
-            <a:avLst>
-              <a:gd name="adj" fmla="val 6000"/>
-            </a:avLst>
+            <a:ext cx="12191695" cy="6858000"/>
+          </a:xfrm>
+          <a:prstGeom prst="rect">
+            <a:avLst/>
           </a:prstGeom>
           <a:solidFill>
-            <a:srgbClr val="2E5BC8"/>
+            <a:srgbClr val="FFFFFF"/>
           </a:solidFill>
           <a:ln>
             <a:noFill/>
@@ -7659,22 +8294,20 @@
       </p:sp>
       <p:sp>
         <p:nvSpPr>
-          <p:cNvPr id="3" name="Rounded Rectangle 2"/>
+          <p:cNvPr id="3" name="Rectangle 2"/>
           <p:cNvSpPr/>
           <p:nvPr/>
         </p:nvSpPr>
         <p:spPr>
           <a:xfrm>
-            <a:off x="457200" y="384048"/>
-            <a:ext cx="457200" cy="457200"/>
-          </a:xfrm>
-          <a:prstGeom prst="roundRect">
-            <a:avLst>
-              <a:gd name="adj" fmla="val 6000"/>
-            </a:avLst>
+            <a:off x="457200" y="420624"/>
+            <a:ext cx="146304" cy="512064"/>
+          </a:xfrm>
+          <a:prstGeom prst="rect">
+            <a:avLst/>
           </a:prstGeom>
           <a:solidFill>
-            <a:srgbClr val="2E5BC8"/>
+            <a:srgbClr val="CF0A2C"/>
           </a:solidFill>
           <a:ln>
             <a:noFill/>
@@ -7711,8 +8344,8 @@
         </p:nvSpPr>
         <p:spPr>
           <a:xfrm>
-            <a:off x="457200" y="384048"/>
-            <a:ext cx="457200" cy="457200"/>
+            <a:off x="731520" y="365760"/>
+            <a:ext cx="1005840" cy="603504"/>
           </a:xfrm>
           <a:prstGeom prst="rect">
             <a:avLst/>
@@ -7721,6 +8354,546 @@
         </p:spPr>
         <p:txBody>
           <a:bodyPr wrap="square" anchor="ctr" lIns="50800" rIns="50800" tIns="25400" bIns="25400">
+            <a:spAutoFit/>
+          </a:bodyPr>
+          <a:lstStyle/>
+          <a:p>
+            <a:pPr algn="l">
+              <a:lnSpc>
+                <a:spcPct val="100000"/>
+              </a:lnSpc>
+              <a:spcBef>
+                <a:spcPts val="0"/>
+              </a:spcBef>
+              <a:spcAft>
+                <a:spcPts val="400"/>
+              </a:spcAft>
+            </a:pPr>
+            <a:r>
+              <a:rPr sz="3000" b="1">
+                <a:solidFill>
+                  <a:srgbClr val="CF0A2C"/>
+                </a:solidFill>
+                <a:latin typeface="Microsoft YaHei"/>
+              </a:rPr>
+              <a:t>04</a:t>
+            </a:r>
+          </a:p>
+        </p:txBody>
+      </p:sp>
+      <p:sp>
+        <p:nvSpPr>
+          <p:cNvPr id="5" name="TextBox 4"/>
+          <p:cNvSpPr txBox="1"/>
+          <p:nvPr/>
+        </p:nvSpPr>
+        <p:spPr>
+          <a:xfrm>
+            <a:off x="1600200" y="365760"/>
+            <a:ext cx="9875520" cy="603504"/>
+          </a:xfrm>
+          <a:prstGeom prst="rect">
+            <a:avLst/>
+          </a:prstGeom>
+          <a:noFill/>
+        </p:spPr>
+        <p:txBody>
+          <a:bodyPr wrap="square" anchor="ctr" lIns="50800" rIns="50800" tIns="25400" bIns="25400">
+            <a:spAutoFit/>
+          </a:bodyPr>
+          <a:lstStyle/>
+          <a:p>
+            <a:pPr algn="l">
+              <a:lnSpc>
+                <a:spcPct val="100000"/>
+              </a:lnSpc>
+              <a:spcBef>
+                <a:spcPts val="0"/>
+              </a:spcBef>
+              <a:spcAft>
+                <a:spcPts val="400"/>
+              </a:spcAft>
+            </a:pPr>
+            <a:r>
+              <a:rPr sz="2600" b="1">
+                <a:solidFill>
+                  <a:srgbClr val="1A1A1A"/>
+                </a:solidFill>
+                <a:latin typeface="Microsoft YaHei"/>
+              </a:rPr>
+              <a:t>技术效果与业务价值</a:t>
+            </a:r>
+          </a:p>
+        </p:txBody>
+      </p:sp>
+      <p:sp>
+        <p:nvSpPr>
+          <p:cNvPr id="6" name="Rectangle 5"/>
+          <p:cNvSpPr/>
+          <p:nvPr/>
+        </p:nvSpPr>
+        <p:spPr>
+          <a:xfrm>
+            <a:off x="731520" y="1024128"/>
+            <a:ext cx="10725912" cy="25400"/>
+          </a:xfrm>
+          <a:prstGeom prst="rect">
+            <a:avLst/>
+          </a:prstGeom>
+          <a:solidFill>
+            <a:srgbClr val="CF0A2C"/>
+          </a:solidFill>
+          <a:ln>
+            <a:noFill/>
+          </a:ln>
+          <a:effectLst/>
+        </p:spPr>
+        <p:style>
+          <a:lnRef idx="1">
+            <a:schemeClr val="accent1"/>
+          </a:lnRef>
+          <a:fillRef idx="3">
+            <a:schemeClr val="accent1"/>
+          </a:fillRef>
+          <a:effectRef idx="2">
+            <a:schemeClr val="accent1"/>
+          </a:effectRef>
+          <a:fontRef idx="minor">
+            <a:schemeClr val="lt1"/>
+          </a:fontRef>
+        </p:style>
+        <p:txBody>
+          <a:bodyPr rtlCol="0" anchor="ctr"/>
+          <a:lstStyle/>
+          <a:p>
+            <a:pPr algn="ctr"/>
+          </a:p>
+        </p:txBody>
+      </p:sp>
+      <p:sp>
+        <p:nvSpPr>
+          <p:cNvPr id="7" name="TextBox 6"/>
+          <p:cNvSpPr txBox="1"/>
+          <p:nvPr/>
+        </p:nvSpPr>
+        <p:spPr>
+          <a:xfrm>
+            <a:off x="9692640" y="420624"/>
+            <a:ext cx="1783080" cy="365760"/>
+          </a:xfrm>
+          <a:prstGeom prst="rect">
+            <a:avLst/>
+          </a:prstGeom>
+          <a:noFill/>
+        </p:spPr>
+        <p:txBody>
+          <a:bodyPr wrap="square" anchor="ctr" lIns="50800" rIns="50800" tIns="25400" bIns="25400">
+            <a:spAutoFit/>
+          </a:bodyPr>
+          <a:lstStyle/>
+          <a:p>
+            <a:pPr algn="r">
+              <a:lnSpc>
+                <a:spcPct val="100000"/>
+              </a:lnSpc>
+              <a:spcBef>
+                <a:spcPts val="0"/>
+              </a:spcBef>
+              <a:spcAft>
+                <a:spcPts val="400"/>
+              </a:spcAft>
+            </a:pPr>
+            <a:r>
+              <a:rPr sz="1100" b="0">
+                <a:solidFill>
+                  <a:srgbClr val="595959"/>
+                </a:solidFill>
+                <a:latin typeface="Microsoft YaHei"/>
+              </a:rPr>
+              <a:t>专利介绍</a:t>
+            </a:r>
+          </a:p>
+        </p:txBody>
+      </p:sp>
+      <p:sp>
+        <p:nvSpPr>
+          <p:cNvPr id="8" name="TextBox 7"/>
+          <p:cNvSpPr txBox="1"/>
+          <p:nvPr/>
+        </p:nvSpPr>
+        <p:spPr>
+          <a:xfrm>
+            <a:off x="731520" y="1143000"/>
+            <a:ext cx="10881360" cy="365760"/>
+          </a:xfrm>
+          <a:prstGeom prst="rect">
+            <a:avLst/>
+          </a:prstGeom>
+          <a:noFill/>
+        </p:spPr>
+        <p:txBody>
+          <a:bodyPr wrap="square" anchor="t" lIns="50800" rIns="50800" tIns="25400" bIns="25400">
+            <a:spAutoFit/>
+          </a:bodyPr>
+          <a:lstStyle/>
+          <a:p>
+            <a:pPr algn="l">
+              <a:lnSpc>
+                <a:spcPct val="100000"/>
+              </a:lnSpc>
+              <a:spcBef>
+                <a:spcPts val="0"/>
+              </a:spcBef>
+              <a:spcAft>
+                <a:spcPts val="400"/>
+              </a:spcAft>
+            </a:pPr>
+            <a:r>
+              <a:rPr sz="1600" b="1">
+                <a:solidFill>
+                  <a:srgbClr val="1A1A1A"/>
+                </a:solidFill>
+                <a:latin typeface="Microsoft YaHei"/>
+              </a:rPr>
+              <a:t>物理机实证（同一份 .mce 注入，Huawei 2288H V5 + HCE2）：</a:t>
+            </a:r>
+          </a:p>
+        </p:txBody>
+      </p:sp>
+      <p:sp>
+        <p:nvSpPr>
+          <p:cNvPr id="9" name="Rectangle 8"/>
+          <p:cNvSpPr/>
+          <p:nvPr/>
+        </p:nvSpPr>
+        <p:spPr>
+          <a:xfrm>
+            <a:off x="731520" y="1591056"/>
+            <a:ext cx="5285232" cy="1325880"/>
+          </a:xfrm>
+          <a:prstGeom prst="rect">
+            <a:avLst/>
+          </a:prstGeom>
+          <a:solidFill>
+            <a:srgbClr val="FBECEE"/>
+          </a:solidFill>
+          <a:ln w="19050">
+            <a:solidFill>
+              <a:srgbClr val="CF0A2C"/>
+            </a:solidFill>
+          </a:ln>
+          <a:effectLst/>
+        </p:spPr>
+        <p:style>
+          <a:lnRef idx="1">
+            <a:schemeClr val="accent1"/>
+          </a:lnRef>
+          <a:fillRef idx="3">
+            <a:schemeClr val="accent1"/>
+          </a:fillRef>
+          <a:effectRef idx="2">
+            <a:schemeClr val="accent1"/>
+          </a:effectRef>
+          <a:fontRef idx="minor">
+            <a:schemeClr val="lt1"/>
+          </a:fontRef>
+        </p:style>
+        <p:txBody>
+          <a:bodyPr rtlCol="0" anchor="ctr"/>
+          <a:lstStyle/>
+          <a:p>
+            <a:pPr algn="ctr"/>
+          </a:p>
+        </p:txBody>
+      </p:sp>
+      <p:sp>
+        <p:nvSpPr>
+          <p:cNvPr id="10" name="TextBox 9"/>
+          <p:cNvSpPr txBox="1"/>
+          <p:nvPr/>
+        </p:nvSpPr>
+        <p:spPr>
+          <a:xfrm>
+            <a:off x="868680" y="1682496"/>
+            <a:ext cx="5029200" cy="457200"/>
+          </a:xfrm>
+          <a:prstGeom prst="rect">
+            <a:avLst/>
+          </a:prstGeom>
+          <a:noFill/>
+        </p:spPr>
+        <p:txBody>
+          <a:bodyPr wrap="square" anchor="t" lIns="50800" rIns="50800" tIns="25400" bIns="25400">
+            <a:spAutoFit/>
+          </a:bodyPr>
+          <a:lstStyle/>
+          <a:p>
+            <a:pPr algn="l">
+              <a:lnSpc>
+                <a:spcPct val="100000"/>
+              </a:lnSpc>
+              <a:spcBef>
+                <a:spcPts val="0"/>
+              </a:spcBef>
+              <a:spcAft>
+                <a:spcPts val="400"/>
+              </a:spcAft>
+            </a:pPr>
+            <a:r>
+              <a:rPr sz="1600" b="1">
+                <a:solidFill>
+                  <a:srgbClr val="CF0A2C"/>
+                </a:solidFill>
+                <a:latin typeface="Microsoft YaHei"/>
+              </a:rPr>
+              <a:t>未加载模块</a:t>
+            </a:r>
+          </a:p>
+        </p:txBody>
+      </p:sp>
+      <p:sp>
+        <p:nvSpPr>
+          <p:cNvPr id="11" name="TextBox 10"/>
+          <p:cNvSpPr txBox="1"/>
+          <p:nvPr/>
+        </p:nvSpPr>
+        <p:spPr>
+          <a:xfrm>
+            <a:off x="868680" y="2139696"/>
+            <a:ext cx="5029200" cy="731520"/>
+          </a:xfrm>
+          <a:prstGeom prst="rect">
+            <a:avLst/>
+          </a:prstGeom>
+          <a:noFill/>
+        </p:spPr>
+        <p:txBody>
+          <a:bodyPr wrap="square" anchor="t" lIns="50800" rIns="50800" tIns="25400" bIns="25400">
+            <a:spAutoFit/>
+          </a:bodyPr>
+          <a:lstStyle/>
+          <a:p>
+            <a:pPr algn="l">
+              <a:lnSpc>
+                <a:spcPct val="110000"/>
+              </a:lnSpc>
+              <a:spcBef>
+                <a:spcPts val="0"/>
+              </a:spcBef>
+              <a:spcAft>
+                <a:spcPts val="400"/>
+              </a:spcAft>
+            </a:pPr>
+            <a:r>
+              <a:rPr sz="1300" b="0">
+                <a:solidFill>
+                  <a:srgbClr val="1A1A1A"/>
+                </a:solidFill>
+                <a:latin typeface="Microsoft YaHei"/>
+              </a:rPr>
+              <a:t>mce_panic → kdump → 整机重启，全部 VM 掉线</a:t>
+            </a:r>
+          </a:p>
+        </p:txBody>
+      </p:sp>
+      <p:sp>
+        <p:nvSpPr>
+          <p:cNvPr id="12" name="Rectangle 11"/>
+          <p:cNvSpPr/>
+          <p:nvPr/>
+        </p:nvSpPr>
+        <p:spPr>
+          <a:xfrm>
+            <a:off x="6172200" y="1591056"/>
+            <a:ext cx="5285232" cy="1325880"/>
+          </a:xfrm>
+          <a:prstGeom prst="rect">
+            <a:avLst/>
+          </a:prstGeom>
+          <a:solidFill>
+            <a:srgbClr val="FFFFFF"/>
+          </a:solidFill>
+          <a:ln w="19050">
+            <a:solidFill>
+              <a:srgbClr val="CF0A2C"/>
+            </a:solidFill>
+          </a:ln>
+          <a:effectLst/>
+        </p:spPr>
+        <p:style>
+          <a:lnRef idx="1">
+            <a:schemeClr val="accent1"/>
+          </a:lnRef>
+          <a:fillRef idx="3">
+            <a:schemeClr val="accent1"/>
+          </a:fillRef>
+          <a:effectRef idx="2">
+            <a:schemeClr val="accent1"/>
+          </a:effectRef>
+          <a:fontRef idx="minor">
+            <a:schemeClr val="lt1"/>
+          </a:fontRef>
+        </p:style>
+        <p:txBody>
+          <a:bodyPr rtlCol="0" anchor="ctr"/>
+          <a:lstStyle/>
+          <a:p>
+            <a:pPr algn="ctr"/>
+          </a:p>
+        </p:txBody>
+      </p:sp>
+      <p:sp>
+        <p:nvSpPr>
+          <p:cNvPr id="13" name="TextBox 12"/>
+          <p:cNvSpPr txBox="1"/>
+          <p:nvPr/>
+        </p:nvSpPr>
+        <p:spPr>
+          <a:xfrm>
+            <a:off x="6309360" y="1682496"/>
+            <a:ext cx="5029200" cy="457200"/>
+          </a:xfrm>
+          <a:prstGeom prst="rect">
+            <a:avLst/>
+          </a:prstGeom>
+          <a:noFill/>
+        </p:spPr>
+        <p:txBody>
+          <a:bodyPr wrap="square" anchor="t" lIns="50800" rIns="50800" tIns="25400" bIns="25400">
+            <a:spAutoFit/>
+          </a:bodyPr>
+          <a:lstStyle/>
+          <a:p>
+            <a:pPr algn="l">
+              <a:lnSpc>
+                <a:spcPct val="100000"/>
+              </a:lnSpc>
+              <a:spcBef>
+                <a:spcPts val="0"/>
+              </a:spcBef>
+              <a:spcAft>
+                <a:spcPts val="400"/>
+              </a:spcAft>
+            </a:pPr>
+            <a:r>
+              <a:rPr sz="1600" b="1">
+                <a:solidFill>
+                  <a:srgbClr val="A30822"/>
+                </a:solidFill>
+                <a:latin typeface="Microsoft YaHei"/>
+              </a:rPr>
+              <a:t>加载模块（inactive）</a:t>
+            </a:r>
+          </a:p>
+        </p:txBody>
+      </p:sp>
+      <p:sp>
+        <p:nvSpPr>
+          <p:cNvPr id="14" name="TextBox 13"/>
+          <p:cNvSpPr txBox="1"/>
+          <p:nvPr/>
+        </p:nvSpPr>
+        <p:spPr>
+          <a:xfrm>
+            <a:off x="6309360" y="2139696"/>
+            <a:ext cx="5029200" cy="731520"/>
+          </a:xfrm>
+          <a:prstGeom prst="rect">
+            <a:avLst/>
+          </a:prstGeom>
+          <a:noFill/>
+        </p:spPr>
+        <p:txBody>
+          <a:bodyPr wrap="square" anchor="t" lIns="50800" rIns="50800" tIns="25400" bIns="25400">
+            <a:spAutoFit/>
+          </a:bodyPr>
+          <a:lstStyle/>
+          <a:p>
+            <a:pPr algn="l">
+              <a:lnSpc>
+                <a:spcPct val="110000"/>
+              </a:lnSpc>
+              <a:spcBef>
+                <a:spcPts val="0"/>
+              </a:spcBef>
+              <a:spcAft>
+                <a:spcPts val="400"/>
+              </a:spcAft>
+            </a:pPr>
+            <a:r>
+              <a:rPr sz="1300" b="0">
+                <a:solidFill>
+                  <a:srgbClr val="1A1A1A"/>
+                </a:solidFill>
+                <a:latin typeface="Microsoft YaHei"/>
+              </a:rPr>
+              <a:t>故障核无下电隔离（迁 462 IRQ，CPU 仍在线），整机存活，该核对业务不可见</a:t>
+            </a:r>
+          </a:p>
+        </p:txBody>
+      </p:sp>
+      <p:sp>
+        <p:nvSpPr>
+          <p:cNvPr id="15" name="Rectangle 14"/>
+          <p:cNvSpPr/>
+          <p:nvPr/>
+        </p:nvSpPr>
+        <p:spPr>
+          <a:xfrm>
+            <a:off x="731520" y="3200400"/>
+            <a:ext cx="2606040" cy="1554480"/>
+          </a:xfrm>
+          <a:prstGeom prst="rect">
+            <a:avLst/>
+          </a:prstGeom>
+          <a:solidFill>
+            <a:srgbClr val="CF0A2C"/>
+          </a:solidFill>
+          <a:ln>
+            <a:noFill/>
+          </a:ln>
+          <a:effectLst/>
+        </p:spPr>
+        <p:style>
+          <a:lnRef idx="1">
+            <a:schemeClr val="accent1"/>
+          </a:lnRef>
+          <a:fillRef idx="3">
+            <a:schemeClr val="accent1"/>
+          </a:fillRef>
+          <a:effectRef idx="2">
+            <a:schemeClr val="accent1"/>
+          </a:effectRef>
+          <a:fontRef idx="minor">
+            <a:schemeClr val="lt1"/>
+          </a:fontRef>
+        </p:style>
+        <p:txBody>
+          <a:bodyPr rtlCol="0" anchor="ctr"/>
+          <a:lstStyle/>
+          <a:p>
+            <a:pPr algn="ctr"/>
+          </a:p>
+        </p:txBody>
+      </p:sp>
+      <p:sp>
+        <p:nvSpPr>
+          <p:cNvPr id="16" name="TextBox 15"/>
+          <p:cNvSpPr txBox="1"/>
+          <p:nvPr/>
+        </p:nvSpPr>
+        <p:spPr>
+          <a:xfrm>
+            <a:off x="731520" y="3346704"/>
+            <a:ext cx="2606040" cy="457200"/>
+          </a:xfrm>
+          <a:prstGeom prst="rect">
+            <a:avLst/>
+          </a:prstGeom>
+          <a:noFill/>
+        </p:spPr>
+        <p:txBody>
+          <a:bodyPr wrap="square" anchor="t" lIns="50800" rIns="50800" tIns="25400" bIns="25400">
             <a:spAutoFit/>
           </a:bodyPr>
           <a:lstStyle/>
@@ -7737,27 +8910,71 @@
               </a:spcAft>
             </a:pPr>
             <a:r>
-              <a:rPr sz="2200" b="1">
+              <a:rPr sz="1500" b="1">
                 <a:solidFill>
                   <a:srgbClr val="FFFFFF"/>
                 </a:solidFill>
                 <a:latin typeface="Microsoft YaHei"/>
               </a:rPr>
-              <a:t>4</a:t>
-            </a:r>
-          </a:p>
-        </p:txBody>
-      </p:sp>
-      <p:sp>
-        <p:nvSpPr>
-          <p:cNvPr id="5" name="TextBox 4"/>
+              <a:t>爆炸半径</a:t>
+            </a:r>
+          </a:p>
+        </p:txBody>
+      </p:sp>
+      <p:sp>
+        <p:nvSpPr>
+          <p:cNvPr id="17" name="Rectangle 16"/>
+          <p:cNvSpPr/>
+          <p:nvPr/>
+        </p:nvSpPr>
+        <p:spPr>
+          <a:xfrm>
+            <a:off x="1188720" y="3767328"/>
+            <a:ext cx="1691640" cy="19050"/>
+          </a:xfrm>
+          <a:prstGeom prst="rect">
+            <a:avLst/>
+          </a:prstGeom>
+          <a:solidFill>
+            <a:srgbClr val="F0A9B3"/>
+          </a:solidFill>
+          <a:ln>
+            <a:noFill/>
+          </a:ln>
+          <a:effectLst/>
+        </p:spPr>
+        <p:style>
+          <a:lnRef idx="1">
+            <a:schemeClr val="accent1"/>
+          </a:lnRef>
+          <a:fillRef idx="3">
+            <a:schemeClr val="accent1"/>
+          </a:fillRef>
+          <a:effectRef idx="2">
+            <a:schemeClr val="accent1"/>
+          </a:effectRef>
+          <a:fontRef idx="minor">
+            <a:schemeClr val="lt1"/>
+          </a:fontRef>
+        </p:style>
+        <p:txBody>
+          <a:bodyPr rtlCol="0" anchor="ctr"/>
+          <a:lstStyle/>
+          <a:p>
+            <a:pPr algn="ctr"/>
+          </a:p>
+        </p:txBody>
+      </p:sp>
+      <p:sp>
+        <p:nvSpPr>
+          <p:cNvPr id="18" name="TextBox 17"/>
           <p:cNvSpPr txBox="1"/>
           <p:nvPr/>
         </p:nvSpPr>
         <p:spPr>
           <a:xfrm>
-            <a:off x="1051560" y="365760"/>
-            <a:ext cx="10515600" cy="548640"/>
+            <a:off x="822960" y="3858768"/>
+            <a:ext cx="2423160" cy="457200"/>
           </a:xfrm>
           <a:prstGeom prst="rect">
             <a:avLst/>
@@ -7765,7 +8982,856 @@
           <a:noFill/>
         </p:spPr>
         <p:txBody>
-          <a:bodyPr wrap="square" anchor="ctr" lIns="50800" rIns="50800" tIns="25400" bIns="25400">
+          <a:bodyPr wrap="square" anchor="t" lIns="50800" rIns="50800" tIns="25400" bIns="25400">
+            <a:spAutoFit/>
+          </a:bodyPr>
+          <a:lstStyle/>
+          <a:p>
+            <a:pPr algn="ctr">
+              <a:lnSpc>
+                <a:spcPct val="100000"/>
+              </a:lnSpc>
+              <a:spcBef>
+                <a:spcPts val="0"/>
+              </a:spcBef>
+              <a:spcAft>
+                <a:spcPts val="400"/>
+              </a:spcAft>
+            </a:pPr>
+            <a:r>
+              <a:rPr sz="1300" b="1">
+                <a:solidFill>
+                  <a:srgbClr val="FFFFFF"/>
+                </a:solidFill>
+                <a:latin typeface="Microsoft YaHei"/>
+              </a:rPr>
+              <a:t>整机 100+ VM</a:t>
+            </a:r>
+          </a:p>
+        </p:txBody>
+      </p:sp>
+      <p:sp>
+        <p:nvSpPr>
+          <p:cNvPr id="19" name="TextBox 18"/>
+          <p:cNvSpPr txBox="1"/>
+          <p:nvPr/>
+        </p:nvSpPr>
+        <p:spPr>
+          <a:xfrm>
+            <a:off x="822960" y="4261104"/>
+            <a:ext cx="2423160" cy="457200"/>
+          </a:xfrm>
+          <a:prstGeom prst="rect">
+            <a:avLst/>
+          </a:prstGeom>
+          <a:noFill/>
+        </p:spPr>
+        <p:txBody>
+          <a:bodyPr wrap="square" anchor="t" lIns="50800" rIns="50800" tIns="25400" bIns="25400">
+            <a:spAutoFit/>
+          </a:bodyPr>
+          <a:lstStyle/>
+          <a:p>
+            <a:pPr algn="ctr">
+              <a:lnSpc>
+                <a:spcPct val="105000"/>
+              </a:lnSpc>
+              <a:spcBef>
+                <a:spcPts val="0"/>
+              </a:spcBef>
+              <a:spcAft>
+                <a:spcPts val="400"/>
+              </a:spcAft>
+            </a:pPr>
+            <a:r>
+              <a:rPr sz="1100" b="0">
+                <a:solidFill>
+                  <a:srgbClr val="FBDCE1"/>
+                </a:solidFill>
+                <a:latin typeface="Microsoft YaHei"/>
+              </a:rPr>
+              <a:t>→ 单 VM / 热迁零损失</a:t>
+            </a:r>
+          </a:p>
+        </p:txBody>
+      </p:sp>
+      <p:sp>
+        <p:nvSpPr>
+          <p:cNvPr id="20" name="Rectangle 19"/>
+          <p:cNvSpPr/>
+          <p:nvPr/>
+        </p:nvSpPr>
+        <p:spPr>
+          <a:xfrm>
+            <a:off x="3483864" y="3200400"/>
+            <a:ext cx="2606040" cy="1554480"/>
+          </a:xfrm>
+          <a:prstGeom prst="rect">
+            <a:avLst/>
+          </a:prstGeom>
+          <a:solidFill>
+            <a:srgbClr val="CF0A2C"/>
+          </a:solidFill>
+          <a:ln>
+            <a:noFill/>
+          </a:ln>
+          <a:effectLst/>
+        </p:spPr>
+        <p:style>
+          <a:lnRef idx="1">
+            <a:schemeClr val="accent1"/>
+          </a:lnRef>
+          <a:fillRef idx="3">
+            <a:schemeClr val="accent1"/>
+          </a:fillRef>
+          <a:effectRef idx="2">
+            <a:schemeClr val="accent1"/>
+          </a:effectRef>
+          <a:fontRef idx="minor">
+            <a:schemeClr val="lt1"/>
+          </a:fontRef>
+        </p:style>
+        <p:txBody>
+          <a:bodyPr rtlCol="0" anchor="ctr"/>
+          <a:lstStyle/>
+          <a:p>
+            <a:pPr algn="ctr"/>
+          </a:p>
+        </p:txBody>
+      </p:sp>
+      <p:sp>
+        <p:nvSpPr>
+          <p:cNvPr id="21" name="TextBox 20"/>
+          <p:cNvSpPr txBox="1"/>
+          <p:nvPr/>
+        </p:nvSpPr>
+        <p:spPr>
+          <a:xfrm>
+            <a:off x="3483864" y="3346704"/>
+            <a:ext cx="2606040" cy="457200"/>
+          </a:xfrm>
+          <a:prstGeom prst="rect">
+            <a:avLst/>
+          </a:prstGeom>
+          <a:noFill/>
+        </p:spPr>
+        <p:txBody>
+          <a:bodyPr wrap="square" anchor="t" lIns="50800" rIns="50800" tIns="25400" bIns="25400">
+            <a:spAutoFit/>
+          </a:bodyPr>
+          <a:lstStyle/>
+          <a:p>
+            <a:pPr algn="ctr">
+              <a:lnSpc>
+                <a:spcPct val="100000"/>
+              </a:lnSpc>
+              <a:spcBef>
+                <a:spcPts val="0"/>
+              </a:spcBef>
+              <a:spcAft>
+                <a:spcPts val="400"/>
+              </a:spcAft>
+            </a:pPr>
+            <a:r>
+              <a:rPr sz="1500" b="1">
+                <a:solidFill>
+                  <a:srgbClr val="FFFFFF"/>
+                </a:solidFill>
+                <a:latin typeface="Microsoft YaHei"/>
+              </a:rPr>
+              <a:t>交付形态</a:t>
+            </a:r>
+          </a:p>
+        </p:txBody>
+      </p:sp>
+      <p:sp>
+        <p:nvSpPr>
+          <p:cNvPr id="22" name="Rectangle 21"/>
+          <p:cNvSpPr/>
+          <p:nvPr/>
+        </p:nvSpPr>
+        <p:spPr>
+          <a:xfrm>
+            <a:off x="3941064" y="3767328"/>
+            <a:ext cx="1691640" cy="19050"/>
+          </a:xfrm>
+          <a:prstGeom prst="rect">
+            <a:avLst/>
+          </a:prstGeom>
+          <a:solidFill>
+            <a:srgbClr val="F0A9B3"/>
+          </a:solidFill>
+          <a:ln>
+            <a:noFill/>
+          </a:ln>
+          <a:effectLst/>
+        </p:spPr>
+        <p:style>
+          <a:lnRef idx="1">
+            <a:schemeClr val="accent1"/>
+          </a:lnRef>
+          <a:fillRef idx="3">
+            <a:schemeClr val="accent1"/>
+          </a:fillRef>
+          <a:effectRef idx="2">
+            <a:schemeClr val="accent1"/>
+          </a:effectRef>
+          <a:fontRef idx="minor">
+            <a:schemeClr val="lt1"/>
+          </a:fontRef>
+        </p:style>
+        <p:txBody>
+          <a:bodyPr rtlCol="0" anchor="ctr"/>
+          <a:lstStyle/>
+          <a:p>
+            <a:pPr algn="ctr"/>
+          </a:p>
+        </p:txBody>
+      </p:sp>
+      <p:sp>
+        <p:nvSpPr>
+          <p:cNvPr id="23" name="TextBox 22"/>
+          <p:cNvSpPr txBox="1"/>
+          <p:nvPr/>
+        </p:nvSpPr>
+        <p:spPr>
+          <a:xfrm>
+            <a:off x="3575304" y="3858768"/>
+            <a:ext cx="2423160" cy="457200"/>
+          </a:xfrm>
+          <a:prstGeom prst="rect">
+            <a:avLst/>
+          </a:prstGeom>
+          <a:noFill/>
+        </p:spPr>
+        <p:txBody>
+          <a:bodyPr wrap="square" anchor="t" lIns="50800" rIns="50800" tIns="25400" bIns="25400">
+            <a:spAutoFit/>
+          </a:bodyPr>
+          <a:lstStyle/>
+          <a:p>
+            <a:pPr algn="ctr">
+              <a:lnSpc>
+                <a:spcPct val="100000"/>
+              </a:lnSpc>
+              <a:spcBef>
+                <a:spcPts val="0"/>
+              </a:spcBef>
+              <a:spcAft>
+                <a:spcPts val="400"/>
+              </a:spcAft>
+            </a:pPr>
+            <a:r>
+              <a:rPr sz="1300" b="1">
+                <a:solidFill>
+                  <a:srgbClr val="FFFFFF"/>
+                </a:solidFill>
+                <a:latin typeface="Microsoft YaHei"/>
+              </a:rPr>
+              <a:t>外挂 ko</a:t>
+            </a:r>
+          </a:p>
+        </p:txBody>
+      </p:sp>
+      <p:sp>
+        <p:nvSpPr>
+          <p:cNvPr id="24" name="TextBox 23"/>
+          <p:cNvSpPr txBox="1"/>
+          <p:nvPr/>
+        </p:nvSpPr>
+        <p:spPr>
+          <a:xfrm>
+            <a:off x="3575304" y="4261104"/>
+            <a:ext cx="2423160" cy="457200"/>
+          </a:xfrm>
+          <a:prstGeom prst="rect">
+            <a:avLst/>
+          </a:prstGeom>
+          <a:noFill/>
+        </p:spPr>
+        <p:txBody>
+          <a:bodyPr wrap="square" anchor="t" lIns="50800" rIns="50800" tIns="25400" bIns="25400">
+            <a:spAutoFit/>
+          </a:bodyPr>
+          <a:lstStyle/>
+          <a:p>
+            <a:pPr algn="ctr">
+              <a:lnSpc>
+                <a:spcPct val="105000"/>
+              </a:lnSpc>
+              <a:spcBef>
+                <a:spcPts val="0"/>
+              </a:spcBef>
+              <a:spcAft>
+                <a:spcPts val="400"/>
+              </a:spcAft>
+            </a:pPr>
+            <a:r>
+              <a:rPr sz="1100" b="0">
+                <a:solidFill>
+                  <a:srgbClr val="FBDCE1"/>
+                </a:solidFill>
+                <a:latin typeface="Microsoft YaHei"/>
+              </a:rPr>
+              <a:t>零源码改动 · 可灰度可回滚</a:t>
+            </a:r>
+          </a:p>
+        </p:txBody>
+      </p:sp>
+      <p:sp>
+        <p:nvSpPr>
+          <p:cNvPr id="25" name="Rectangle 24"/>
+          <p:cNvSpPr/>
+          <p:nvPr/>
+        </p:nvSpPr>
+        <p:spPr>
+          <a:xfrm>
+            <a:off x="6236208" y="3200400"/>
+            <a:ext cx="2606040" cy="1554480"/>
+          </a:xfrm>
+          <a:prstGeom prst="rect">
+            <a:avLst/>
+          </a:prstGeom>
+          <a:solidFill>
+            <a:srgbClr val="CF0A2C"/>
+          </a:solidFill>
+          <a:ln>
+            <a:noFill/>
+          </a:ln>
+          <a:effectLst/>
+        </p:spPr>
+        <p:style>
+          <a:lnRef idx="1">
+            <a:schemeClr val="accent1"/>
+          </a:lnRef>
+          <a:fillRef idx="3">
+            <a:schemeClr val="accent1"/>
+          </a:fillRef>
+          <a:effectRef idx="2">
+            <a:schemeClr val="accent1"/>
+          </a:effectRef>
+          <a:fontRef idx="minor">
+            <a:schemeClr val="lt1"/>
+          </a:fontRef>
+        </p:style>
+        <p:txBody>
+          <a:bodyPr rtlCol="0" anchor="ctr"/>
+          <a:lstStyle/>
+          <a:p>
+            <a:pPr algn="ctr"/>
+          </a:p>
+        </p:txBody>
+      </p:sp>
+      <p:sp>
+        <p:nvSpPr>
+          <p:cNvPr id="26" name="TextBox 25"/>
+          <p:cNvSpPr txBox="1"/>
+          <p:nvPr/>
+        </p:nvSpPr>
+        <p:spPr>
+          <a:xfrm>
+            <a:off x="6236208" y="3346704"/>
+            <a:ext cx="2606040" cy="457200"/>
+          </a:xfrm>
+          <a:prstGeom prst="rect">
+            <a:avLst/>
+          </a:prstGeom>
+          <a:noFill/>
+        </p:spPr>
+        <p:txBody>
+          <a:bodyPr wrap="square" anchor="t" lIns="50800" rIns="50800" tIns="25400" bIns="25400">
+            <a:spAutoFit/>
+          </a:bodyPr>
+          <a:lstStyle/>
+          <a:p>
+            <a:pPr algn="ctr">
+              <a:lnSpc>
+                <a:spcPct val="100000"/>
+              </a:lnSpc>
+              <a:spcBef>
+                <a:spcPts val="0"/>
+              </a:spcBef>
+              <a:spcAft>
+                <a:spcPts val="400"/>
+              </a:spcAft>
+            </a:pPr>
+            <a:r>
+              <a:rPr sz="1500" b="1">
+                <a:solidFill>
+                  <a:srgbClr val="FFFFFF"/>
+                </a:solidFill>
+                <a:latin typeface="Microsoft YaHei"/>
+              </a:rPr>
+              <a:t>算力留存</a:t>
+            </a:r>
+          </a:p>
+        </p:txBody>
+      </p:sp>
+      <p:sp>
+        <p:nvSpPr>
+          <p:cNvPr id="27" name="Rectangle 26"/>
+          <p:cNvSpPr/>
+          <p:nvPr/>
+        </p:nvSpPr>
+        <p:spPr>
+          <a:xfrm>
+            <a:off x="6693408" y="3767328"/>
+            <a:ext cx="1691640" cy="19050"/>
+          </a:xfrm>
+          <a:prstGeom prst="rect">
+            <a:avLst/>
+          </a:prstGeom>
+          <a:solidFill>
+            <a:srgbClr val="F0A9B3"/>
+          </a:solidFill>
+          <a:ln>
+            <a:noFill/>
+          </a:ln>
+          <a:effectLst/>
+        </p:spPr>
+        <p:style>
+          <a:lnRef idx="1">
+            <a:schemeClr val="accent1"/>
+          </a:lnRef>
+          <a:fillRef idx="3">
+            <a:schemeClr val="accent1"/>
+          </a:fillRef>
+          <a:effectRef idx="2">
+            <a:schemeClr val="accent1"/>
+          </a:effectRef>
+          <a:fontRef idx="minor">
+            <a:schemeClr val="lt1"/>
+          </a:fontRef>
+        </p:style>
+        <p:txBody>
+          <a:bodyPr rtlCol="0" anchor="ctr"/>
+          <a:lstStyle/>
+          <a:p>
+            <a:pPr algn="ctr"/>
+          </a:p>
+        </p:txBody>
+      </p:sp>
+      <p:sp>
+        <p:nvSpPr>
+          <p:cNvPr id="28" name="TextBox 27"/>
+          <p:cNvSpPr txBox="1"/>
+          <p:nvPr/>
+        </p:nvSpPr>
+        <p:spPr>
+          <a:xfrm>
+            <a:off x="6327648" y="3858768"/>
+            <a:ext cx="2423160" cy="457200"/>
+          </a:xfrm>
+          <a:prstGeom prst="rect">
+            <a:avLst/>
+          </a:prstGeom>
+          <a:noFill/>
+        </p:spPr>
+        <p:txBody>
+          <a:bodyPr wrap="square" anchor="t" lIns="50800" rIns="50800" tIns="25400" bIns="25400">
+            <a:spAutoFit/>
+          </a:bodyPr>
+          <a:lstStyle/>
+          <a:p>
+            <a:pPr algn="ctr">
+              <a:lnSpc>
+                <a:spcPct val="100000"/>
+              </a:lnSpc>
+              <a:spcBef>
+                <a:spcPts val="0"/>
+              </a:spcBef>
+              <a:spcAft>
+                <a:spcPts val="400"/>
+              </a:spcAft>
+            </a:pPr>
+            <a:r>
+              <a:rPr sz="1300" b="1">
+                <a:solidFill>
+                  <a:srgbClr val="FFFFFF"/>
+                </a:solidFill>
+                <a:latin typeface="Microsoft YaHei"/>
+              </a:rPr>
+              <a:t>隔离对齐故障域</a:t>
+            </a:r>
+          </a:p>
+        </p:txBody>
+      </p:sp>
+      <p:sp>
+        <p:nvSpPr>
+          <p:cNvPr id="29" name="TextBox 28"/>
+          <p:cNvSpPr txBox="1"/>
+          <p:nvPr/>
+        </p:nvSpPr>
+        <p:spPr>
+          <a:xfrm>
+            <a:off x="6327648" y="4261104"/>
+            <a:ext cx="2423160" cy="457200"/>
+          </a:xfrm>
+          <a:prstGeom prst="rect">
+            <a:avLst/>
+          </a:prstGeom>
+          <a:noFill/>
+        </p:spPr>
+        <p:txBody>
+          <a:bodyPr wrap="square" anchor="t" lIns="50800" rIns="50800" tIns="25400" bIns="25400">
+            <a:spAutoFit/>
+          </a:bodyPr>
+          <a:lstStyle/>
+          <a:p>
+            <a:pPr algn="ctr">
+              <a:lnSpc>
+                <a:spcPct val="105000"/>
+              </a:lnSpc>
+              <a:spcBef>
+                <a:spcPts val="0"/>
+              </a:spcBef>
+              <a:spcAft>
+                <a:spcPts val="400"/>
+              </a:spcAft>
+            </a:pPr>
+            <a:r>
+              <a:rPr sz="1100" b="0">
+                <a:solidFill>
+                  <a:srgbClr val="FBDCE1"/>
+                </a:solidFill>
+                <a:latin typeface="Microsoft YaHei"/>
+              </a:rPr>
+              <a:t>不误伤健康核</a:t>
+            </a:r>
+          </a:p>
+        </p:txBody>
+      </p:sp>
+      <p:sp>
+        <p:nvSpPr>
+          <p:cNvPr id="30" name="Rectangle 29"/>
+          <p:cNvSpPr/>
+          <p:nvPr/>
+        </p:nvSpPr>
+        <p:spPr>
+          <a:xfrm>
+            <a:off x="8988552" y="3200400"/>
+            <a:ext cx="2606040" cy="1554480"/>
+          </a:xfrm>
+          <a:prstGeom prst="rect">
+            <a:avLst/>
+          </a:prstGeom>
+          <a:solidFill>
+            <a:srgbClr val="CF0A2C"/>
+          </a:solidFill>
+          <a:ln>
+            <a:noFill/>
+          </a:ln>
+          <a:effectLst/>
+        </p:spPr>
+        <p:style>
+          <a:lnRef idx="1">
+            <a:schemeClr val="accent1"/>
+          </a:lnRef>
+          <a:fillRef idx="3">
+            <a:schemeClr val="accent1"/>
+          </a:fillRef>
+          <a:effectRef idx="2">
+            <a:schemeClr val="accent1"/>
+          </a:effectRef>
+          <a:fontRef idx="minor">
+            <a:schemeClr val="lt1"/>
+          </a:fontRef>
+        </p:style>
+        <p:txBody>
+          <a:bodyPr rtlCol="0" anchor="ctr"/>
+          <a:lstStyle/>
+          <a:p>
+            <a:pPr algn="ctr"/>
+          </a:p>
+        </p:txBody>
+      </p:sp>
+      <p:sp>
+        <p:nvSpPr>
+          <p:cNvPr id="31" name="TextBox 30"/>
+          <p:cNvSpPr txBox="1"/>
+          <p:nvPr/>
+        </p:nvSpPr>
+        <p:spPr>
+          <a:xfrm>
+            <a:off x="8988552" y="3346704"/>
+            <a:ext cx="2606040" cy="457200"/>
+          </a:xfrm>
+          <a:prstGeom prst="rect">
+            <a:avLst/>
+          </a:prstGeom>
+          <a:noFill/>
+        </p:spPr>
+        <p:txBody>
+          <a:bodyPr wrap="square" anchor="t" lIns="50800" rIns="50800" tIns="25400" bIns="25400">
+            <a:spAutoFit/>
+          </a:bodyPr>
+          <a:lstStyle/>
+          <a:p>
+            <a:pPr algn="ctr">
+              <a:lnSpc>
+                <a:spcPct val="100000"/>
+              </a:lnSpc>
+              <a:spcBef>
+                <a:spcPts val="0"/>
+              </a:spcBef>
+              <a:spcAft>
+                <a:spcPts val="400"/>
+              </a:spcAft>
+            </a:pPr>
+            <a:r>
+              <a:rPr sz="1500" b="1">
+                <a:solidFill>
+                  <a:srgbClr val="FFFFFF"/>
+                </a:solidFill>
+                <a:latin typeface="Microsoft YaHei"/>
+              </a:rPr>
+              <a:t>内存侧</a:t>
+            </a:r>
+          </a:p>
+        </p:txBody>
+      </p:sp>
+      <p:sp>
+        <p:nvSpPr>
+          <p:cNvPr id="32" name="Rectangle 31"/>
+          <p:cNvSpPr/>
+          <p:nvPr/>
+        </p:nvSpPr>
+        <p:spPr>
+          <a:xfrm>
+            <a:off x="9445752" y="3767328"/>
+            <a:ext cx="1691640" cy="19050"/>
+          </a:xfrm>
+          <a:prstGeom prst="rect">
+            <a:avLst/>
+          </a:prstGeom>
+          <a:solidFill>
+            <a:srgbClr val="F0A9B3"/>
+          </a:solidFill>
+          <a:ln>
+            <a:noFill/>
+          </a:ln>
+          <a:effectLst/>
+        </p:spPr>
+        <p:style>
+          <a:lnRef idx="1">
+            <a:schemeClr val="accent1"/>
+          </a:lnRef>
+          <a:fillRef idx="3">
+            <a:schemeClr val="accent1"/>
+          </a:fillRef>
+          <a:effectRef idx="2">
+            <a:schemeClr val="accent1"/>
+          </a:effectRef>
+          <a:fontRef idx="minor">
+            <a:schemeClr val="lt1"/>
+          </a:fontRef>
+        </p:style>
+        <p:txBody>
+          <a:bodyPr rtlCol="0" anchor="ctr"/>
+          <a:lstStyle/>
+          <a:p>
+            <a:pPr algn="ctr"/>
+          </a:p>
+        </p:txBody>
+      </p:sp>
+      <p:sp>
+        <p:nvSpPr>
+          <p:cNvPr id="33" name="TextBox 32"/>
+          <p:cNvSpPr txBox="1"/>
+          <p:nvPr/>
+        </p:nvSpPr>
+        <p:spPr>
+          <a:xfrm>
+            <a:off x="9079992" y="3858768"/>
+            <a:ext cx="2423160" cy="457200"/>
+          </a:xfrm>
+          <a:prstGeom prst="rect">
+            <a:avLst/>
+          </a:prstGeom>
+          <a:noFill/>
+        </p:spPr>
+        <p:txBody>
+          <a:bodyPr wrap="square" anchor="t" lIns="50800" rIns="50800" tIns="25400" bIns="25400">
+            <a:spAutoFit/>
+          </a:bodyPr>
+          <a:lstStyle/>
+          <a:p>
+            <a:pPr algn="ctr">
+              <a:lnSpc>
+                <a:spcPct val="100000"/>
+              </a:lnSpc>
+              <a:spcBef>
+                <a:spcPts val="0"/>
+              </a:spcBef>
+              <a:spcAft>
+                <a:spcPts val="400"/>
+              </a:spcAft>
+            </a:pPr>
+            <a:r>
+              <a:rPr sz="1300" b="1">
+                <a:solidFill>
+                  <a:srgbClr val="FFFFFF"/>
+                </a:solidFill>
+                <a:latin typeface="Microsoft YaHei"/>
+              </a:rPr>
+              <a:t>CE 前兆期预隔离</a:t>
+            </a:r>
+          </a:p>
+        </p:txBody>
+      </p:sp>
+      <p:sp>
+        <p:nvSpPr>
+          <p:cNvPr id="34" name="TextBox 33"/>
+          <p:cNvSpPr txBox="1"/>
+          <p:nvPr/>
+        </p:nvSpPr>
+        <p:spPr>
+          <a:xfrm>
+            <a:off x="9079992" y="4261104"/>
+            <a:ext cx="2423160" cy="457200"/>
+          </a:xfrm>
+          <a:prstGeom prst="rect">
+            <a:avLst/>
+          </a:prstGeom>
+          <a:noFill/>
+        </p:spPr>
+        <p:txBody>
+          <a:bodyPr wrap="square" anchor="t" lIns="50800" rIns="50800" tIns="25400" bIns="25400">
+            <a:spAutoFit/>
+          </a:bodyPr>
+          <a:lstStyle/>
+          <a:p>
+            <a:pPr algn="ctr">
+              <a:lnSpc>
+                <a:spcPct val="105000"/>
+              </a:lnSpc>
+              <a:spcBef>
+                <a:spcPts val="0"/>
+              </a:spcBef>
+              <a:spcAft>
+                <a:spcPts val="400"/>
+              </a:spcAft>
+            </a:pPr>
+            <a:r>
+              <a:rPr sz="1100" b="0">
+                <a:solidFill>
+                  <a:srgbClr val="FBDCE1"/>
+                </a:solidFill>
+                <a:latin typeface="Microsoft YaHei"/>
+              </a:rPr>
+              <a:t>+ DIMM 介质换件闭环</a:t>
+            </a:r>
+          </a:p>
+        </p:txBody>
+      </p:sp>
+      <p:sp>
+        <p:nvSpPr>
+          <p:cNvPr id="35" name="Rectangle 34"/>
+          <p:cNvSpPr/>
+          <p:nvPr/>
+        </p:nvSpPr>
+        <p:spPr>
+          <a:xfrm>
+            <a:off x="731520" y="5029200"/>
+            <a:ext cx="10725912" cy="1325880"/>
+          </a:xfrm>
+          <a:prstGeom prst="rect">
+            <a:avLst/>
+          </a:prstGeom>
+          <a:solidFill>
+            <a:srgbClr val="F4F4F4"/>
+          </a:solidFill>
+          <a:ln w="15240">
+            <a:solidFill>
+              <a:srgbClr val="CF0A2C"/>
+            </a:solidFill>
+          </a:ln>
+          <a:effectLst/>
+        </p:spPr>
+        <p:style>
+          <a:lnRef idx="1">
+            <a:schemeClr val="accent1"/>
+          </a:lnRef>
+          <a:fillRef idx="3">
+            <a:schemeClr val="accent1"/>
+          </a:fillRef>
+          <a:effectRef idx="2">
+            <a:schemeClr val="accent1"/>
+          </a:effectRef>
+          <a:fontRef idx="minor">
+            <a:schemeClr val="lt1"/>
+          </a:fontRef>
+        </p:style>
+        <p:txBody>
+          <a:bodyPr rtlCol="0" anchor="ctr"/>
+          <a:lstStyle/>
+          <a:p>
+            <a:pPr algn="ctr"/>
+          </a:p>
+        </p:txBody>
+      </p:sp>
+      <p:sp>
+        <p:nvSpPr>
+          <p:cNvPr id="36" name="Rectangle 35"/>
+          <p:cNvSpPr/>
+          <p:nvPr/>
+        </p:nvSpPr>
+        <p:spPr>
+          <a:xfrm>
+            <a:off x="731520" y="5029200"/>
+            <a:ext cx="109728" cy="1325880"/>
+          </a:xfrm>
+          <a:prstGeom prst="rect">
+            <a:avLst/>
+          </a:prstGeom>
+          <a:solidFill>
+            <a:srgbClr val="CF0A2C"/>
+          </a:solidFill>
+          <a:ln>
+            <a:noFill/>
+          </a:ln>
+          <a:effectLst/>
+        </p:spPr>
+        <p:style>
+          <a:lnRef idx="1">
+            <a:schemeClr val="accent1"/>
+          </a:lnRef>
+          <a:fillRef idx="3">
+            <a:schemeClr val="accent1"/>
+          </a:fillRef>
+          <a:effectRef idx="2">
+            <a:schemeClr val="accent1"/>
+          </a:effectRef>
+          <a:fontRef idx="minor">
+            <a:schemeClr val="lt1"/>
+          </a:fontRef>
+        </p:style>
+        <p:txBody>
+          <a:bodyPr rtlCol="0" anchor="ctr"/>
+          <a:lstStyle/>
+          <a:p>
+            <a:pPr algn="ctr"/>
+          </a:p>
+        </p:txBody>
+      </p:sp>
+      <p:sp>
+        <p:nvSpPr>
+          <p:cNvPr id="37" name="TextBox 36"/>
+          <p:cNvSpPr txBox="1"/>
+          <p:nvPr/>
+        </p:nvSpPr>
+        <p:spPr>
+          <a:xfrm>
+            <a:off x="960120" y="5138928"/>
+            <a:ext cx="10424160" cy="457200"/>
+          </a:xfrm>
+          <a:prstGeom prst="rect">
+            <a:avLst/>
+          </a:prstGeom>
+          <a:noFill/>
+        </p:spPr>
+        <p:txBody>
+          <a:bodyPr wrap="square" anchor="t" lIns="50800" rIns="50800" tIns="25400" bIns="25400">
             <a:spAutoFit/>
           </a:bodyPr>
           <a:lstStyle/>
@@ -7782,1193 +9848,9 @@
               </a:spcAft>
             </a:pPr>
             <a:r>
-              <a:rPr sz="2600" b="1">
-                <a:solidFill>
-                  <a:srgbClr val="1F2D5A"/>
-                </a:solidFill>
-                <a:latin typeface="Microsoft YaHei"/>
-              </a:rPr>
-              <a:t>技术效果与业务价值</a:t>
-            </a:r>
-          </a:p>
-        </p:txBody>
-      </p:sp>
-      <p:sp>
-        <p:nvSpPr>
-          <p:cNvPr id="6" name="Rounded Rectangle 5"/>
-          <p:cNvSpPr/>
-          <p:nvPr/>
-        </p:nvSpPr>
-        <p:spPr>
-          <a:xfrm>
-            <a:off x="1051560" y="932688"/>
-            <a:ext cx="10058400" cy="27940"/>
-          </a:xfrm>
-          <a:prstGeom prst="roundRect">
-            <a:avLst>
-              <a:gd name="adj" fmla="val 6000"/>
-            </a:avLst>
-          </a:prstGeom>
-          <a:solidFill>
-            <a:srgbClr val="2E5BC8"/>
-          </a:solidFill>
-          <a:ln>
-            <a:noFill/>
-          </a:ln>
-          <a:effectLst/>
-        </p:spPr>
-        <p:style>
-          <a:lnRef idx="1">
-            <a:schemeClr val="accent1"/>
-          </a:lnRef>
-          <a:fillRef idx="3">
-            <a:schemeClr val="accent1"/>
-          </a:fillRef>
-          <a:effectRef idx="2">
-            <a:schemeClr val="accent1"/>
-          </a:effectRef>
-          <a:fontRef idx="minor">
-            <a:schemeClr val="lt1"/>
-          </a:fontRef>
-        </p:style>
-        <p:txBody>
-          <a:bodyPr rtlCol="0" anchor="ctr"/>
-          <a:lstStyle/>
-          <a:p>
-            <a:pPr algn="ctr"/>
-          </a:p>
-        </p:txBody>
-      </p:sp>
-      <p:sp>
-        <p:nvSpPr>
-          <p:cNvPr id="7" name="TextBox 6"/>
-          <p:cNvSpPr txBox="1"/>
-          <p:nvPr/>
-        </p:nvSpPr>
-        <p:spPr>
-          <a:xfrm>
-            <a:off x="548640" y="1097280"/>
-            <a:ext cx="11064240" cy="365760"/>
-          </a:xfrm>
-          <a:prstGeom prst="rect">
-            <a:avLst/>
-          </a:prstGeom>
-          <a:noFill/>
-        </p:spPr>
-        <p:txBody>
-          <a:bodyPr wrap="square" anchor="t" lIns="50800" rIns="50800" tIns="25400" bIns="25400">
-            <a:spAutoFit/>
-          </a:bodyPr>
-          <a:lstStyle/>
-          <a:p>
-            <a:pPr algn="l">
-              <a:lnSpc>
-                <a:spcPct val="100000"/>
-              </a:lnSpc>
-              <a:spcBef>
-                <a:spcPts val="0"/>
-              </a:spcBef>
-              <a:spcAft>
-                <a:spcPts val="400"/>
-              </a:spcAft>
-            </a:pPr>
-            <a:r>
               <a:rPr sz="1600" b="1">
                 <a:solidFill>
-                  <a:srgbClr val="1F2D5A"/>
-                </a:solidFill>
-                <a:latin typeface="Microsoft YaHei"/>
-              </a:rPr>
-              <a:t>物理机实证（同一份 .mce 注入，Huawei 2288H V5 + HCE2）：</a:t>
-            </a:r>
-          </a:p>
-        </p:txBody>
-      </p:sp>
-      <p:sp>
-        <p:nvSpPr>
-          <p:cNvPr id="8" name="Rounded Rectangle 7"/>
-          <p:cNvSpPr/>
-          <p:nvPr/>
-        </p:nvSpPr>
-        <p:spPr>
-          <a:xfrm>
-            <a:off x="548640" y="1554480"/>
-            <a:ext cx="5440680" cy="1371600"/>
-          </a:xfrm>
-          <a:prstGeom prst="roundRect">
-            <a:avLst>
-              <a:gd name="adj" fmla="val 6000"/>
-            </a:avLst>
-          </a:prstGeom>
-          <a:solidFill>
-            <a:srgbClr val="FDF0EE"/>
-          </a:solidFill>
-          <a:ln w="19050">
-            <a:solidFill>
-              <a:srgbClr val="C0392B"/>
-            </a:solidFill>
-          </a:ln>
-          <a:effectLst/>
-        </p:spPr>
-        <p:style>
-          <a:lnRef idx="1">
-            <a:schemeClr val="accent1"/>
-          </a:lnRef>
-          <a:fillRef idx="3">
-            <a:schemeClr val="accent1"/>
-          </a:fillRef>
-          <a:effectRef idx="2">
-            <a:schemeClr val="accent1"/>
-          </a:effectRef>
-          <a:fontRef idx="minor">
-            <a:schemeClr val="lt1"/>
-          </a:fontRef>
-        </p:style>
-        <p:txBody>
-          <a:bodyPr rtlCol="0" anchor="ctr"/>
-          <a:lstStyle/>
-          <a:p>
-            <a:pPr algn="ctr"/>
-          </a:p>
-        </p:txBody>
-      </p:sp>
-      <p:sp>
-        <p:nvSpPr>
-          <p:cNvPr id="9" name="TextBox 8"/>
-          <p:cNvSpPr txBox="1"/>
-          <p:nvPr/>
-        </p:nvSpPr>
-        <p:spPr>
-          <a:xfrm>
-            <a:off x="685800" y="1645920"/>
-            <a:ext cx="5166360" cy="457200"/>
-          </a:xfrm>
-          <a:prstGeom prst="rect">
-            <a:avLst/>
-          </a:prstGeom>
-          <a:noFill/>
-        </p:spPr>
-        <p:txBody>
-          <a:bodyPr wrap="square" anchor="t" lIns="50800" rIns="50800" tIns="25400" bIns="25400">
-            <a:spAutoFit/>
-          </a:bodyPr>
-          <a:lstStyle/>
-          <a:p>
-            <a:pPr algn="l">
-              <a:lnSpc>
-                <a:spcPct val="100000"/>
-              </a:lnSpc>
-              <a:spcBef>
-                <a:spcPts val="0"/>
-              </a:spcBef>
-              <a:spcAft>
-                <a:spcPts val="400"/>
-              </a:spcAft>
-            </a:pPr>
-            <a:r>
-              <a:rPr sz="1600" b="1">
-                <a:solidFill>
-                  <a:srgbClr val="C0392B"/>
-                </a:solidFill>
-                <a:latin typeface="Microsoft YaHei"/>
-              </a:rPr>
-              <a:t>未加载模块</a:t>
-            </a:r>
-          </a:p>
-        </p:txBody>
-      </p:sp>
-      <p:sp>
-        <p:nvSpPr>
-          <p:cNvPr id="10" name="TextBox 9"/>
-          <p:cNvSpPr txBox="1"/>
-          <p:nvPr/>
-        </p:nvSpPr>
-        <p:spPr>
-          <a:xfrm>
-            <a:off x="685800" y="2103120"/>
-            <a:ext cx="5166360" cy="777240"/>
-          </a:xfrm>
-          <a:prstGeom prst="rect">
-            <a:avLst/>
-          </a:prstGeom>
-          <a:noFill/>
-        </p:spPr>
-        <p:txBody>
-          <a:bodyPr wrap="square" anchor="t" lIns="50800" rIns="50800" tIns="25400" bIns="25400">
-            <a:spAutoFit/>
-          </a:bodyPr>
-          <a:lstStyle/>
-          <a:p>
-            <a:pPr algn="l">
-              <a:lnSpc>
-                <a:spcPct val="110000"/>
-              </a:lnSpc>
-              <a:spcBef>
-                <a:spcPts val="0"/>
-              </a:spcBef>
-              <a:spcAft>
-                <a:spcPts val="400"/>
-              </a:spcAft>
-            </a:pPr>
-            <a:r>
-              <a:rPr sz="1300" b="0">
-                <a:solidFill>
-                  <a:srgbClr val="222222"/>
-                </a:solidFill>
-                <a:latin typeface="Microsoft YaHei"/>
-              </a:rPr>
-              <a:t>mce_panic → kdump → 整机重启，全部 VM 掉线</a:t>
-            </a:r>
-          </a:p>
-        </p:txBody>
-      </p:sp>
-      <p:sp>
-        <p:nvSpPr>
-          <p:cNvPr id="11" name="Rounded Rectangle 10"/>
-          <p:cNvSpPr/>
-          <p:nvPr/>
-        </p:nvSpPr>
-        <p:spPr>
-          <a:xfrm>
-            <a:off x="6172200" y="1554480"/>
-            <a:ext cx="5440680" cy="1371600"/>
-          </a:xfrm>
-          <a:prstGeom prst="roundRect">
-            <a:avLst>
-              <a:gd name="adj" fmla="val 6000"/>
-            </a:avLst>
-          </a:prstGeom>
-          <a:solidFill>
-            <a:srgbClr val="ECF7EE"/>
-          </a:solidFill>
-          <a:ln w="19050">
-            <a:solidFill>
-              <a:srgbClr val="1E8E3E"/>
-            </a:solidFill>
-          </a:ln>
-          <a:effectLst/>
-        </p:spPr>
-        <p:style>
-          <a:lnRef idx="1">
-            <a:schemeClr val="accent1"/>
-          </a:lnRef>
-          <a:fillRef idx="3">
-            <a:schemeClr val="accent1"/>
-          </a:fillRef>
-          <a:effectRef idx="2">
-            <a:schemeClr val="accent1"/>
-          </a:effectRef>
-          <a:fontRef idx="minor">
-            <a:schemeClr val="lt1"/>
-          </a:fontRef>
-        </p:style>
-        <p:txBody>
-          <a:bodyPr rtlCol="0" anchor="ctr"/>
-          <a:lstStyle/>
-          <a:p>
-            <a:pPr algn="ctr"/>
-          </a:p>
-        </p:txBody>
-      </p:sp>
-      <p:sp>
-        <p:nvSpPr>
-          <p:cNvPr id="12" name="TextBox 11"/>
-          <p:cNvSpPr txBox="1"/>
-          <p:nvPr/>
-        </p:nvSpPr>
-        <p:spPr>
-          <a:xfrm>
-            <a:off x="6309360" y="1645920"/>
-            <a:ext cx="5166360" cy="457200"/>
-          </a:xfrm>
-          <a:prstGeom prst="rect">
-            <a:avLst/>
-          </a:prstGeom>
-          <a:noFill/>
-        </p:spPr>
-        <p:txBody>
-          <a:bodyPr wrap="square" anchor="t" lIns="50800" rIns="50800" tIns="25400" bIns="25400">
-            <a:spAutoFit/>
-          </a:bodyPr>
-          <a:lstStyle/>
-          <a:p>
-            <a:pPr algn="l">
-              <a:lnSpc>
-                <a:spcPct val="100000"/>
-              </a:lnSpc>
-              <a:spcBef>
-                <a:spcPts val="0"/>
-              </a:spcBef>
-              <a:spcAft>
-                <a:spcPts val="400"/>
-              </a:spcAft>
-            </a:pPr>
-            <a:r>
-              <a:rPr sz="1600" b="1">
-                <a:solidFill>
-                  <a:srgbClr val="1E8E3E"/>
-                </a:solidFill>
-                <a:latin typeface="Microsoft YaHei"/>
-              </a:rPr>
-              <a:t>加载模块（inactive）</a:t>
-            </a:r>
-          </a:p>
-        </p:txBody>
-      </p:sp>
-      <p:sp>
-        <p:nvSpPr>
-          <p:cNvPr id="13" name="TextBox 12"/>
-          <p:cNvSpPr txBox="1"/>
-          <p:nvPr/>
-        </p:nvSpPr>
-        <p:spPr>
-          <a:xfrm>
-            <a:off x="6309360" y="2103120"/>
-            <a:ext cx="5166360" cy="777240"/>
-          </a:xfrm>
-          <a:prstGeom prst="rect">
-            <a:avLst/>
-          </a:prstGeom>
-          <a:noFill/>
-        </p:spPr>
-        <p:txBody>
-          <a:bodyPr wrap="square" anchor="t" lIns="50800" rIns="50800" tIns="25400" bIns="25400">
-            <a:spAutoFit/>
-          </a:bodyPr>
-          <a:lstStyle/>
-          <a:p>
-            <a:pPr algn="l">
-              <a:lnSpc>
-                <a:spcPct val="110000"/>
-              </a:lnSpc>
-              <a:spcBef>
-                <a:spcPts val="0"/>
-              </a:spcBef>
-              <a:spcAft>
-                <a:spcPts val="400"/>
-              </a:spcAft>
-            </a:pPr>
-            <a:r>
-              <a:rPr sz="1300" b="0">
-                <a:solidFill>
-                  <a:srgbClr val="222222"/>
-                </a:solidFill>
-                <a:latin typeface="Microsoft YaHei"/>
-              </a:rPr>
-              <a:t>故障核无下电隔离（迁 462 IRQ，CPU 仍在线），整机存活，该核对业务不可见</a:t>
-            </a:r>
-          </a:p>
-        </p:txBody>
-      </p:sp>
-      <p:sp>
-        <p:nvSpPr>
-          <p:cNvPr id="14" name="Rounded Rectangle 13"/>
-          <p:cNvSpPr/>
-          <p:nvPr/>
-        </p:nvSpPr>
-        <p:spPr>
-          <a:xfrm>
-            <a:off x="548640" y="3200400"/>
-            <a:ext cx="2679192" cy="1554480"/>
-          </a:xfrm>
-          <a:prstGeom prst="roundRect">
-            <a:avLst>
-              <a:gd name="adj" fmla="val 6000"/>
-            </a:avLst>
-          </a:prstGeom>
-          <a:solidFill>
-            <a:srgbClr val="1F2D5A"/>
-          </a:solidFill>
-          <a:ln>
-            <a:noFill/>
-          </a:ln>
-          <a:effectLst/>
-        </p:spPr>
-        <p:style>
-          <a:lnRef idx="1">
-            <a:schemeClr val="accent1"/>
-          </a:lnRef>
-          <a:fillRef idx="3">
-            <a:schemeClr val="accent1"/>
-          </a:fillRef>
-          <a:effectRef idx="2">
-            <a:schemeClr val="accent1"/>
-          </a:effectRef>
-          <a:fontRef idx="minor">
-            <a:schemeClr val="lt1"/>
-          </a:fontRef>
-        </p:style>
-        <p:txBody>
-          <a:bodyPr rtlCol="0" anchor="ctr"/>
-          <a:lstStyle/>
-          <a:p>
-            <a:pPr algn="ctr"/>
-          </a:p>
-        </p:txBody>
-      </p:sp>
-      <p:sp>
-        <p:nvSpPr>
-          <p:cNvPr id="15" name="TextBox 14"/>
-          <p:cNvSpPr txBox="1"/>
-          <p:nvPr/>
-        </p:nvSpPr>
-        <p:spPr>
-          <a:xfrm>
-            <a:off x="548640" y="3337560"/>
-            <a:ext cx="2679192" cy="457200"/>
-          </a:xfrm>
-          <a:prstGeom prst="rect">
-            <a:avLst/>
-          </a:prstGeom>
-          <a:noFill/>
-        </p:spPr>
-        <p:txBody>
-          <a:bodyPr wrap="square" anchor="t" lIns="50800" rIns="50800" tIns="25400" bIns="25400">
-            <a:spAutoFit/>
-          </a:bodyPr>
-          <a:lstStyle/>
-          <a:p>
-            <a:pPr algn="ctr">
-              <a:lnSpc>
-                <a:spcPct val="100000"/>
-              </a:lnSpc>
-              <a:spcBef>
-                <a:spcPts val="0"/>
-              </a:spcBef>
-              <a:spcAft>
-                <a:spcPts val="400"/>
-              </a:spcAft>
-            </a:pPr>
-            <a:r>
-              <a:rPr sz="1500" b="1">
-                <a:solidFill>
-                  <a:srgbClr val="FFD26A"/>
-                </a:solidFill>
-                <a:latin typeface="Microsoft YaHei"/>
-              </a:rPr>
-              <a:t>爆炸半径</a:t>
-            </a:r>
-          </a:p>
-        </p:txBody>
-      </p:sp>
-      <p:sp>
-        <p:nvSpPr>
-          <p:cNvPr id="16" name="TextBox 15"/>
-          <p:cNvSpPr txBox="1"/>
-          <p:nvPr/>
-        </p:nvSpPr>
-        <p:spPr>
-          <a:xfrm>
-            <a:off x="640080" y="3840480"/>
-            <a:ext cx="2496312" cy="457200"/>
-          </a:xfrm>
-          <a:prstGeom prst="rect">
-            <a:avLst/>
-          </a:prstGeom>
-          <a:noFill/>
-        </p:spPr>
-        <p:txBody>
-          <a:bodyPr wrap="square" anchor="t" lIns="50800" rIns="50800" tIns="25400" bIns="25400">
-            <a:spAutoFit/>
-          </a:bodyPr>
-          <a:lstStyle/>
-          <a:p>
-            <a:pPr algn="ctr">
-              <a:lnSpc>
-                <a:spcPct val="100000"/>
-              </a:lnSpc>
-              <a:spcBef>
-                <a:spcPts val="0"/>
-              </a:spcBef>
-              <a:spcAft>
-                <a:spcPts val="400"/>
-              </a:spcAft>
-            </a:pPr>
-            <a:r>
-              <a:rPr sz="1300" b="1">
-                <a:solidFill>
-                  <a:srgbClr val="FFFFFF"/>
-                </a:solidFill>
-                <a:latin typeface="Microsoft YaHei"/>
-              </a:rPr>
-              <a:t>整机 100+ VM</a:t>
-            </a:r>
-          </a:p>
-        </p:txBody>
-      </p:sp>
-      <p:sp>
-        <p:nvSpPr>
-          <p:cNvPr id="17" name="TextBox 16"/>
-          <p:cNvSpPr txBox="1"/>
-          <p:nvPr/>
-        </p:nvSpPr>
-        <p:spPr>
-          <a:xfrm>
-            <a:off x="640080" y="4251960"/>
-            <a:ext cx="2496312" cy="457200"/>
-          </a:xfrm>
-          <a:prstGeom prst="rect">
-            <a:avLst/>
-          </a:prstGeom>
-          <a:noFill/>
-        </p:spPr>
-        <p:txBody>
-          <a:bodyPr wrap="square" anchor="t" lIns="50800" rIns="50800" tIns="25400" bIns="25400">
-            <a:spAutoFit/>
-          </a:bodyPr>
-          <a:lstStyle/>
-          <a:p>
-            <a:pPr algn="ctr">
-              <a:lnSpc>
-                <a:spcPct val="105000"/>
-              </a:lnSpc>
-              <a:spcBef>
-                <a:spcPts val="0"/>
-              </a:spcBef>
-              <a:spcAft>
-                <a:spcPts val="400"/>
-              </a:spcAft>
-            </a:pPr>
-            <a:r>
-              <a:rPr sz="1100" b="0">
-                <a:solidFill>
-                  <a:srgbClr val="C6D2EC"/>
-                </a:solidFill>
-                <a:latin typeface="Microsoft YaHei"/>
-              </a:rPr>
-              <a:t>→ 单 VM / 热迁零损失</a:t>
-            </a:r>
-          </a:p>
-        </p:txBody>
-      </p:sp>
-      <p:sp>
-        <p:nvSpPr>
-          <p:cNvPr id="18" name="Rounded Rectangle 17"/>
-          <p:cNvSpPr/>
-          <p:nvPr/>
-        </p:nvSpPr>
-        <p:spPr>
-          <a:xfrm>
-            <a:off x="3346704" y="3200400"/>
-            <a:ext cx="2679192" cy="1554480"/>
-          </a:xfrm>
-          <a:prstGeom prst="roundRect">
-            <a:avLst>
-              <a:gd name="adj" fmla="val 6000"/>
-            </a:avLst>
-          </a:prstGeom>
-          <a:solidFill>
-            <a:srgbClr val="1F2D5A"/>
-          </a:solidFill>
-          <a:ln>
-            <a:noFill/>
-          </a:ln>
-          <a:effectLst/>
-        </p:spPr>
-        <p:style>
-          <a:lnRef idx="1">
-            <a:schemeClr val="accent1"/>
-          </a:lnRef>
-          <a:fillRef idx="3">
-            <a:schemeClr val="accent1"/>
-          </a:fillRef>
-          <a:effectRef idx="2">
-            <a:schemeClr val="accent1"/>
-          </a:effectRef>
-          <a:fontRef idx="minor">
-            <a:schemeClr val="lt1"/>
-          </a:fontRef>
-        </p:style>
-        <p:txBody>
-          <a:bodyPr rtlCol="0" anchor="ctr"/>
-          <a:lstStyle/>
-          <a:p>
-            <a:pPr algn="ctr"/>
-          </a:p>
-        </p:txBody>
-      </p:sp>
-      <p:sp>
-        <p:nvSpPr>
-          <p:cNvPr id="19" name="TextBox 18"/>
-          <p:cNvSpPr txBox="1"/>
-          <p:nvPr/>
-        </p:nvSpPr>
-        <p:spPr>
-          <a:xfrm>
-            <a:off x="3346704" y="3337560"/>
-            <a:ext cx="2679192" cy="457200"/>
-          </a:xfrm>
-          <a:prstGeom prst="rect">
-            <a:avLst/>
-          </a:prstGeom>
-          <a:noFill/>
-        </p:spPr>
-        <p:txBody>
-          <a:bodyPr wrap="square" anchor="t" lIns="50800" rIns="50800" tIns="25400" bIns="25400">
-            <a:spAutoFit/>
-          </a:bodyPr>
-          <a:lstStyle/>
-          <a:p>
-            <a:pPr algn="ctr">
-              <a:lnSpc>
-                <a:spcPct val="100000"/>
-              </a:lnSpc>
-              <a:spcBef>
-                <a:spcPts val="0"/>
-              </a:spcBef>
-              <a:spcAft>
-                <a:spcPts val="400"/>
-              </a:spcAft>
-            </a:pPr>
-            <a:r>
-              <a:rPr sz="1500" b="1">
-                <a:solidFill>
-                  <a:srgbClr val="FFD26A"/>
-                </a:solidFill>
-                <a:latin typeface="Microsoft YaHei"/>
-              </a:rPr>
-              <a:t>交付形态</a:t>
-            </a:r>
-          </a:p>
-        </p:txBody>
-      </p:sp>
-      <p:sp>
-        <p:nvSpPr>
-          <p:cNvPr id="20" name="TextBox 19"/>
-          <p:cNvSpPr txBox="1"/>
-          <p:nvPr/>
-        </p:nvSpPr>
-        <p:spPr>
-          <a:xfrm>
-            <a:off x="3438144" y="3840480"/>
-            <a:ext cx="2496312" cy="457200"/>
-          </a:xfrm>
-          <a:prstGeom prst="rect">
-            <a:avLst/>
-          </a:prstGeom>
-          <a:noFill/>
-        </p:spPr>
-        <p:txBody>
-          <a:bodyPr wrap="square" anchor="t" lIns="50800" rIns="50800" tIns="25400" bIns="25400">
-            <a:spAutoFit/>
-          </a:bodyPr>
-          <a:lstStyle/>
-          <a:p>
-            <a:pPr algn="ctr">
-              <a:lnSpc>
-                <a:spcPct val="100000"/>
-              </a:lnSpc>
-              <a:spcBef>
-                <a:spcPts val="0"/>
-              </a:spcBef>
-              <a:spcAft>
-                <a:spcPts val="400"/>
-              </a:spcAft>
-            </a:pPr>
-            <a:r>
-              <a:rPr sz="1300" b="1">
-                <a:solidFill>
-                  <a:srgbClr val="FFFFFF"/>
-                </a:solidFill>
-                <a:latin typeface="Microsoft YaHei"/>
-              </a:rPr>
-              <a:t>外挂 ko</a:t>
-            </a:r>
-          </a:p>
-        </p:txBody>
-      </p:sp>
-      <p:sp>
-        <p:nvSpPr>
-          <p:cNvPr id="21" name="TextBox 20"/>
-          <p:cNvSpPr txBox="1"/>
-          <p:nvPr/>
-        </p:nvSpPr>
-        <p:spPr>
-          <a:xfrm>
-            <a:off x="3438144" y="4251960"/>
-            <a:ext cx="2496312" cy="457200"/>
-          </a:xfrm>
-          <a:prstGeom prst="rect">
-            <a:avLst/>
-          </a:prstGeom>
-          <a:noFill/>
-        </p:spPr>
-        <p:txBody>
-          <a:bodyPr wrap="square" anchor="t" lIns="50800" rIns="50800" tIns="25400" bIns="25400">
-            <a:spAutoFit/>
-          </a:bodyPr>
-          <a:lstStyle/>
-          <a:p>
-            <a:pPr algn="ctr">
-              <a:lnSpc>
-                <a:spcPct val="105000"/>
-              </a:lnSpc>
-              <a:spcBef>
-                <a:spcPts val="0"/>
-              </a:spcBef>
-              <a:spcAft>
-                <a:spcPts val="400"/>
-              </a:spcAft>
-            </a:pPr>
-            <a:r>
-              <a:rPr sz="1100" b="0">
-                <a:solidFill>
-                  <a:srgbClr val="C6D2EC"/>
-                </a:solidFill>
-                <a:latin typeface="Microsoft YaHei"/>
-              </a:rPr>
-              <a:t>零源码改动 · 可灰度可回滚</a:t>
-            </a:r>
-          </a:p>
-        </p:txBody>
-      </p:sp>
-      <p:sp>
-        <p:nvSpPr>
-          <p:cNvPr id="22" name="Rounded Rectangle 21"/>
-          <p:cNvSpPr/>
-          <p:nvPr/>
-        </p:nvSpPr>
-        <p:spPr>
-          <a:xfrm>
-            <a:off x="6144768" y="3200400"/>
-            <a:ext cx="2679192" cy="1554480"/>
-          </a:xfrm>
-          <a:prstGeom prst="roundRect">
-            <a:avLst>
-              <a:gd name="adj" fmla="val 6000"/>
-            </a:avLst>
-          </a:prstGeom>
-          <a:solidFill>
-            <a:srgbClr val="1F2D5A"/>
-          </a:solidFill>
-          <a:ln>
-            <a:noFill/>
-          </a:ln>
-          <a:effectLst/>
-        </p:spPr>
-        <p:style>
-          <a:lnRef idx="1">
-            <a:schemeClr val="accent1"/>
-          </a:lnRef>
-          <a:fillRef idx="3">
-            <a:schemeClr val="accent1"/>
-          </a:fillRef>
-          <a:effectRef idx="2">
-            <a:schemeClr val="accent1"/>
-          </a:effectRef>
-          <a:fontRef idx="minor">
-            <a:schemeClr val="lt1"/>
-          </a:fontRef>
-        </p:style>
-        <p:txBody>
-          <a:bodyPr rtlCol="0" anchor="ctr"/>
-          <a:lstStyle/>
-          <a:p>
-            <a:pPr algn="ctr"/>
-          </a:p>
-        </p:txBody>
-      </p:sp>
-      <p:sp>
-        <p:nvSpPr>
-          <p:cNvPr id="23" name="TextBox 22"/>
-          <p:cNvSpPr txBox="1"/>
-          <p:nvPr/>
-        </p:nvSpPr>
-        <p:spPr>
-          <a:xfrm>
-            <a:off x="6144768" y="3337560"/>
-            <a:ext cx="2679192" cy="457200"/>
-          </a:xfrm>
-          <a:prstGeom prst="rect">
-            <a:avLst/>
-          </a:prstGeom>
-          <a:noFill/>
-        </p:spPr>
-        <p:txBody>
-          <a:bodyPr wrap="square" anchor="t" lIns="50800" rIns="50800" tIns="25400" bIns="25400">
-            <a:spAutoFit/>
-          </a:bodyPr>
-          <a:lstStyle/>
-          <a:p>
-            <a:pPr algn="ctr">
-              <a:lnSpc>
-                <a:spcPct val="100000"/>
-              </a:lnSpc>
-              <a:spcBef>
-                <a:spcPts val="0"/>
-              </a:spcBef>
-              <a:spcAft>
-                <a:spcPts val="400"/>
-              </a:spcAft>
-            </a:pPr>
-            <a:r>
-              <a:rPr sz="1500" b="1">
-                <a:solidFill>
-                  <a:srgbClr val="FFD26A"/>
-                </a:solidFill>
-                <a:latin typeface="Microsoft YaHei"/>
-              </a:rPr>
-              <a:t>算力留存</a:t>
-            </a:r>
-          </a:p>
-        </p:txBody>
-      </p:sp>
-      <p:sp>
-        <p:nvSpPr>
-          <p:cNvPr id="24" name="TextBox 23"/>
-          <p:cNvSpPr txBox="1"/>
-          <p:nvPr/>
-        </p:nvSpPr>
-        <p:spPr>
-          <a:xfrm>
-            <a:off x="6236208" y="3840480"/>
-            <a:ext cx="2496312" cy="457200"/>
-          </a:xfrm>
-          <a:prstGeom prst="rect">
-            <a:avLst/>
-          </a:prstGeom>
-          <a:noFill/>
-        </p:spPr>
-        <p:txBody>
-          <a:bodyPr wrap="square" anchor="t" lIns="50800" rIns="50800" tIns="25400" bIns="25400">
-            <a:spAutoFit/>
-          </a:bodyPr>
-          <a:lstStyle/>
-          <a:p>
-            <a:pPr algn="ctr">
-              <a:lnSpc>
-                <a:spcPct val="100000"/>
-              </a:lnSpc>
-              <a:spcBef>
-                <a:spcPts val="0"/>
-              </a:spcBef>
-              <a:spcAft>
-                <a:spcPts val="400"/>
-              </a:spcAft>
-            </a:pPr>
-            <a:r>
-              <a:rPr sz="1300" b="1">
-                <a:solidFill>
-                  <a:srgbClr val="FFFFFF"/>
-                </a:solidFill>
-                <a:latin typeface="Microsoft YaHei"/>
-              </a:rPr>
-              <a:t>隔离对齐故障域</a:t>
-            </a:r>
-          </a:p>
-        </p:txBody>
-      </p:sp>
-      <p:sp>
-        <p:nvSpPr>
-          <p:cNvPr id="25" name="TextBox 24"/>
-          <p:cNvSpPr txBox="1"/>
-          <p:nvPr/>
-        </p:nvSpPr>
-        <p:spPr>
-          <a:xfrm>
-            <a:off x="6236208" y="4251960"/>
-            <a:ext cx="2496312" cy="457200"/>
-          </a:xfrm>
-          <a:prstGeom prst="rect">
-            <a:avLst/>
-          </a:prstGeom>
-          <a:noFill/>
-        </p:spPr>
-        <p:txBody>
-          <a:bodyPr wrap="square" anchor="t" lIns="50800" rIns="50800" tIns="25400" bIns="25400">
-            <a:spAutoFit/>
-          </a:bodyPr>
-          <a:lstStyle/>
-          <a:p>
-            <a:pPr algn="ctr">
-              <a:lnSpc>
-                <a:spcPct val="105000"/>
-              </a:lnSpc>
-              <a:spcBef>
-                <a:spcPts val="0"/>
-              </a:spcBef>
-              <a:spcAft>
-                <a:spcPts val="400"/>
-              </a:spcAft>
-            </a:pPr>
-            <a:r>
-              <a:rPr sz="1100" b="0">
-                <a:solidFill>
-                  <a:srgbClr val="C6D2EC"/>
-                </a:solidFill>
-                <a:latin typeface="Microsoft YaHei"/>
-              </a:rPr>
-              <a:t>不误伤健康核</a:t>
-            </a:r>
-          </a:p>
-        </p:txBody>
-      </p:sp>
-      <p:sp>
-        <p:nvSpPr>
-          <p:cNvPr id="26" name="Rounded Rectangle 25"/>
-          <p:cNvSpPr/>
-          <p:nvPr/>
-        </p:nvSpPr>
-        <p:spPr>
-          <a:xfrm>
-            <a:off x="8942832" y="3200400"/>
-            <a:ext cx="2679192" cy="1554480"/>
-          </a:xfrm>
-          <a:prstGeom prst="roundRect">
-            <a:avLst>
-              <a:gd name="adj" fmla="val 6000"/>
-            </a:avLst>
-          </a:prstGeom>
-          <a:solidFill>
-            <a:srgbClr val="1F2D5A"/>
-          </a:solidFill>
-          <a:ln>
-            <a:noFill/>
-          </a:ln>
-          <a:effectLst/>
-        </p:spPr>
-        <p:style>
-          <a:lnRef idx="1">
-            <a:schemeClr val="accent1"/>
-          </a:lnRef>
-          <a:fillRef idx="3">
-            <a:schemeClr val="accent1"/>
-          </a:fillRef>
-          <a:effectRef idx="2">
-            <a:schemeClr val="accent1"/>
-          </a:effectRef>
-          <a:fontRef idx="minor">
-            <a:schemeClr val="lt1"/>
-          </a:fontRef>
-        </p:style>
-        <p:txBody>
-          <a:bodyPr rtlCol="0" anchor="ctr"/>
-          <a:lstStyle/>
-          <a:p>
-            <a:pPr algn="ctr"/>
-          </a:p>
-        </p:txBody>
-      </p:sp>
-      <p:sp>
-        <p:nvSpPr>
-          <p:cNvPr id="27" name="TextBox 26"/>
-          <p:cNvSpPr txBox="1"/>
-          <p:nvPr/>
-        </p:nvSpPr>
-        <p:spPr>
-          <a:xfrm>
-            <a:off x="8942832" y="3337560"/>
-            <a:ext cx="2679192" cy="457200"/>
-          </a:xfrm>
-          <a:prstGeom prst="rect">
-            <a:avLst/>
-          </a:prstGeom>
-          <a:noFill/>
-        </p:spPr>
-        <p:txBody>
-          <a:bodyPr wrap="square" anchor="t" lIns="50800" rIns="50800" tIns="25400" bIns="25400">
-            <a:spAutoFit/>
-          </a:bodyPr>
-          <a:lstStyle/>
-          <a:p>
-            <a:pPr algn="ctr">
-              <a:lnSpc>
-                <a:spcPct val="100000"/>
-              </a:lnSpc>
-              <a:spcBef>
-                <a:spcPts val="0"/>
-              </a:spcBef>
-              <a:spcAft>
-                <a:spcPts val="400"/>
-              </a:spcAft>
-            </a:pPr>
-            <a:r>
-              <a:rPr sz="1500" b="1">
-                <a:solidFill>
-                  <a:srgbClr val="FFD26A"/>
-                </a:solidFill>
-                <a:latin typeface="Microsoft YaHei"/>
-              </a:rPr>
-              <a:t>内存侧</a:t>
-            </a:r>
-          </a:p>
-        </p:txBody>
-      </p:sp>
-      <p:sp>
-        <p:nvSpPr>
-          <p:cNvPr id="28" name="TextBox 27"/>
-          <p:cNvSpPr txBox="1"/>
-          <p:nvPr/>
-        </p:nvSpPr>
-        <p:spPr>
-          <a:xfrm>
-            <a:off x="9034272" y="3840480"/>
-            <a:ext cx="2496312" cy="457200"/>
-          </a:xfrm>
-          <a:prstGeom prst="rect">
-            <a:avLst/>
-          </a:prstGeom>
-          <a:noFill/>
-        </p:spPr>
-        <p:txBody>
-          <a:bodyPr wrap="square" anchor="t" lIns="50800" rIns="50800" tIns="25400" bIns="25400">
-            <a:spAutoFit/>
-          </a:bodyPr>
-          <a:lstStyle/>
-          <a:p>
-            <a:pPr algn="ctr">
-              <a:lnSpc>
-                <a:spcPct val="100000"/>
-              </a:lnSpc>
-              <a:spcBef>
-                <a:spcPts val="0"/>
-              </a:spcBef>
-              <a:spcAft>
-                <a:spcPts val="400"/>
-              </a:spcAft>
-            </a:pPr>
-            <a:r>
-              <a:rPr sz="1300" b="1">
-                <a:solidFill>
-                  <a:srgbClr val="FFFFFF"/>
-                </a:solidFill>
-                <a:latin typeface="Microsoft YaHei"/>
-              </a:rPr>
-              <a:t>CE 前兆期预隔离</a:t>
-            </a:r>
-          </a:p>
-        </p:txBody>
-      </p:sp>
-      <p:sp>
-        <p:nvSpPr>
-          <p:cNvPr id="29" name="TextBox 28"/>
-          <p:cNvSpPr txBox="1"/>
-          <p:nvPr/>
-        </p:nvSpPr>
-        <p:spPr>
-          <a:xfrm>
-            <a:off x="9034272" y="4251960"/>
-            <a:ext cx="2496312" cy="457200"/>
-          </a:xfrm>
-          <a:prstGeom prst="rect">
-            <a:avLst/>
-          </a:prstGeom>
-          <a:noFill/>
-        </p:spPr>
-        <p:txBody>
-          <a:bodyPr wrap="square" anchor="t" lIns="50800" rIns="50800" tIns="25400" bIns="25400">
-            <a:spAutoFit/>
-          </a:bodyPr>
-          <a:lstStyle/>
-          <a:p>
-            <a:pPr algn="ctr">
-              <a:lnSpc>
-                <a:spcPct val="105000"/>
-              </a:lnSpc>
-              <a:spcBef>
-                <a:spcPts val="0"/>
-              </a:spcBef>
-              <a:spcAft>
-                <a:spcPts val="400"/>
-              </a:spcAft>
-            </a:pPr>
-            <a:r>
-              <a:rPr sz="1100" b="0">
-                <a:solidFill>
-                  <a:srgbClr val="C6D2EC"/>
-                </a:solidFill>
-                <a:latin typeface="Microsoft YaHei"/>
-              </a:rPr>
-              <a:t>+ DIMM 介质换件闭环</a:t>
-            </a:r>
-          </a:p>
-        </p:txBody>
-      </p:sp>
-      <p:sp>
-        <p:nvSpPr>
-          <p:cNvPr id="30" name="Rounded Rectangle 29"/>
-          <p:cNvSpPr/>
-          <p:nvPr/>
-        </p:nvSpPr>
-        <p:spPr>
-          <a:xfrm>
-            <a:off x="548640" y="5029200"/>
-            <a:ext cx="11064240" cy="1280160"/>
-          </a:xfrm>
-          <a:prstGeom prst="roundRect">
-            <a:avLst>
-              <a:gd name="adj" fmla="val 6000"/>
-            </a:avLst>
-          </a:prstGeom>
-          <a:solidFill>
-            <a:srgbClr val="F2F4F8"/>
-          </a:solidFill>
-          <a:ln w="15240">
-            <a:solidFill>
-              <a:srgbClr val="2E5BC8"/>
-            </a:solidFill>
-          </a:ln>
-          <a:effectLst/>
-        </p:spPr>
-        <p:style>
-          <a:lnRef idx="1">
-            <a:schemeClr val="accent1"/>
-          </a:lnRef>
-          <a:fillRef idx="3">
-            <a:schemeClr val="accent1"/>
-          </a:fillRef>
-          <a:effectRef idx="2">
-            <a:schemeClr val="accent1"/>
-          </a:effectRef>
-          <a:fontRef idx="minor">
-            <a:schemeClr val="lt1"/>
-          </a:fontRef>
-        </p:style>
-        <p:txBody>
-          <a:bodyPr rtlCol="0" anchor="ctr"/>
-          <a:lstStyle/>
-          <a:p>
-            <a:pPr algn="ctr"/>
-          </a:p>
-        </p:txBody>
-      </p:sp>
-      <p:sp>
-        <p:nvSpPr>
-          <p:cNvPr id="31" name="TextBox 30"/>
-          <p:cNvSpPr txBox="1"/>
-          <p:nvPr/>
-        </p:nvSpPr>
-        <p:spPr>
-          <a:xfrm>
-            <a:off x="731520" y="5138928"/>
-            <a:ext cx="10698480" cy="457200"/>
-          </a:xfrm>
-          <a:prstGeom prst="rect">
-            <a:avLst/>
-          </a:prstGeom>
-          <a:noFill/>
-        </p:spPr>
-        <p:txBody>
-          <a:bodyPr wrap="square" anchor="t" lIns="50800" rIns="50800" tIns="25400" bIns="25400">
-            <a:spAutoFit/>
-          </a:bodyPr>
-          <a:lstStyle/>
-          <a:p>
-            <a:pPr algn="l">
-              <a:lnSpc>
-                <a:spcPct val="100000"/>
-              </a:lnSpc>
-              <a:spcBef>
-                <a:spcPts val="0"/>
-              </a:spcBef>
-              <a:spcAft>
-                <a:spcPts val="400"/>
-              </a:spcAft>
-            </a:pPr>
-            <a:r>
-              <a:rPr sz="1600" b="1">
-                <a:solidFill>
-                  <a:srgbClr val="2E5BC8"/>
+                  <a:srgbClr val="CF0A2C"/>
                 </a:solidFill>
                 <a:latin typeface="Microsoft YaHei"/>
               </a:rPr>
@@ -8979,14 +9861,14 @@
       </p:sp>
       <p:sp>
         <p:nvSpPr>
-          <p:cNvPr id="32" name="TextBox 31"/>
+          <p:cNvPr id="38" name="TextBox 37"/>
           <p:cNvSpPr txBox="1"/>
           <p:nvPr/>
         </p:nvSpPr>
         <p:spPr>
           <a:xfrm>
-            <a:off x="731520" y="5532120"/>
-            <a:ext cx="10698480" cy="777240"/>
+            <a:off x="960120" y="5532120"/>
+            <a:ext cx="10332720" cy="777240"/>
           </a:xfrm>
           <a:prstGeom prst="rect">
             <a:avLst/>
@@ -9013,7 +9895,7 @@
             <a:r>
               <a:rPr sz="1400" b="1">
                 <a:solidFill>
-                  <a:srgbClr val="222222"/>
+                  <a:srgbClr val="1A1A1A"/>
                 </a:solidFill>
                 <a:latin typeface="Microsoft YaHei"/>
               </a:rPr>
